--- a/documents/Minor Project Synopsis Presentation - MindSpace.pptx
+++ b/documents/Minor Project Synopsis Presentation - MindSpace.pptx
@@ -6,7 +6,7 @@
     <p:sldMasterId id="2147483671" r:id="rId2"/>
   </p:sldMasterIdLst>
   <p:notesMasterIdLst>
-    <p:notesMasterId r:id="rId16"/>
+    <p:notesMasterId r:id="rId20"/>
   </p:notesMasterIdLst>
   <p:sldIdLst>
     <p:sldId id="256" r:id="rId3"/>
@@ -15,35 +15,39 @@
     <p:sldId id="258" r:id="rId6"/>
     <p:sldId id="259" r:id="rId7"/>
     <p:sldId id="260" r:id="rId8"/>
-    <p:sldId id="261" r:id="rId9"/>
-    <p:sldId id="262" r:id="rId10"/>
-    <p:sldId id="263" r:id="rId11"/>
-    <p:sldId id="264" r:id="rId12"/>
-    <p:sldId id="265" r:id="rId13"/>
-    <p:sldId id="266" r:id="rId14"/>
-    <p:sldId id="267" r:id="rId15"/>
+    <p:sldId id="273" r:id="rId9"/>
+    <p:sldId id="272" r:id="rId10"/>
+    <p:sldId id="264" r:id="rId11"/>
+    <p:sldId id="262" r:id="rId12"/>
+    <p:sldId id="270" r:id="rId13"/>
+    <p:sldId id="271" r:id="rId14"/>
+    <p:sldId id="266" r:id="rId15"/>
+    <p:sldId id="263" r:id="rId16"/>
+    <p:sldId id="261" r:id="rId17"/>
+    <p:sldId id="265" r:id="rId18"/>
+    <p:sldId id="267" r:id="rId19"/>
   </p:sldIdLst>
   <p:sldSz cx="9144000" cy="5143500" type="screen16x9"/>
   <p:notesSz cx="6858000" cy="9144000"/>
   <p:embeddedFontLst>
     <p:embeddedFont>
       <p:font typeface="Nunito Sans" pitchFamily="2" charset="0"/>
-      <p:regular r:id="rId17"/>
-      <p:bold r:id="rId18"/>
-      <p:italic r:id="rId19"/>
-      <p:boldItalic r:id="rId20"/>
+      <p:regular r:id="rId21"/>
+      <p:bold r:id="rId22"/>
+      <p:italic r:id="rId23"/>
+      <p:boldItalic r:id="rId24"/>
     </p:embeddedFont>
     <p:embeddedFont>
       <p:font typeface="Play" panose="020B0604020202020204" charset="0"/>
-      <p:regular r:id="rId21"/>
-      <p:bold r:id="rId22"/>
+      <p:regular r:id="rId25"/>
+      <p:bold r:id="rId26"/>
     </p:embeddedFont>
     <p:embeddedFont>
       <p:font typeface="Poppins" panose="00000500000000000000" pitchFamily="2" charset="0"/>
-      <p:regular r:id="rId23"/>
-      <p:bold r:id="rId24"/>
-      <p:italic r:id="rId25"/>
-      <p:boldItalic r:id="rId26"/>
+      <p:regular r:id="rId27"/>
+      <p:bold r:id="rId28"/>
+      <p:italic r:id="rId29"/>
+      <p:boldItalic r:id="rId30"/>
     </p:embeddedFont>
   </p:embeddedFontLst>
   <p:defaultTextStyle>
@@ -844,7 +848,7 @@
   <p:cSld>
     <p:spTree>
       <p:nvGrpSpPr>
-        <p:cNvPr id="1" name="Shape 224"/>
+        <p:cNvPr id="1" name="Shape 199"/>
         <p:cNvGrpSpPr/>
         <p:nvPr/>
       </p:nvGrpSpPr>
@@ -858,7 +862,7 @@
       </p:grpSpPr>
       <p:sp>
         <p:nvSpPr>
-          <p:cNvPr id="225" name="Google Shape;225;g3bc8b057dd2_0_106:notes"/>
+          <p:cNvPr id="200" name="Google Shape;200;g3bc8b057dd2_0_62:notes"/>
           <p:cNvSpPr txBox="1">
             <a:spLocks noGrp="1"/>
           </p:cNvSpPr>
@@ -896,7 +900,7 @@
       </p:sp>
       <p:sp>
         <p:nvSpPr>
-          <p:cNvPr id="226" name="Google Shape;226;g3bc8b057dd2_0_106:notes"/>
+          <p:cNvPr id="201" name="Google Shape;201;g3bc8b057dd2_0_62:notes"/>
           <p:cNvSpPr>
             <a:spLocks noGrp="1" noRot="1" noChangeAspect="1"/>
           </p:cNvSpPr>
@@ -944,6 +948,572 @@
 </file>
 
 <file path=ppt/notesSlides/notesSlide11.xml><?xml version="1.0" encoding="utf-8"?>
+<p:notes xmlns:a="http://schemas.openxmlformats.org/drawingml/2006/main" xmlns:r="http://schemas.openxmlformats.org/officeDocument/2006/relationships" xmlns:p="http://schemas.openxmlformats.org/presentationml/2006/main" showMasterSp="0" showMasterPhAnim="0">
+  <p:cSld>
+    <p:spTree>
+      <p:nvGrpSpPr>
+        <p:cNvPr id="1" name="Shape 199">
+          <a:extLst>
+            <a:ext uri="{FF2B5EF4-FFF2-40B4-BE49-F238E27FC236}">
+              <a16:creationId xmlns:a16="http://schemas.microsoft.com/office/drawing/2014/main" id="{D63F3233-BE43-FBD2-CB8B-A2F7CCEE4594}"/>
+            </a:ext>
+          </a:extLst>
+        </p:cNvPr>
+        <p:cNvGrpSpPr/>
+        <p:nvPr/>
+      </p:nvGrpSpPr>
+      <p:grpSpPr>
+        <a:xfrm>
+          <a:off x="0" y="0"/>
+          <a:ext cx="0" cy="0"/>
+          <a:chOff x="0" y="0"/>
+          <a:chExt cx="0" cy="0"/>
+        </a:xfrm>
+      </p:grpSpPr>
+      <p:sp>
+        <p:nvSpPr>
+          <p:cNvPr id="200" name="Google Shape;200;g3bc8b057dd2_0_62:notes">
+            <a:extLst>
+              <a:ext uri="{FF2B5EF4-FFF2-40B4-BE49-F238E27FC236}">
+                <a16:creationId xmlns:a16="http://schemas.microsoft.com/office/drawing/2014/main" id="{0BE06316-C030-8D83-96A8-DFA5C19A37BA}"/>
+              </a:ext>
+            </a:extLst>
+          </p:cNvPr>
+          <p:cNvSpPr txBox="1">
+            <a:spLocks noGrp="1"/>
+          </p:cNvSpPr>
+          <p:nvPr>
+            <p:ph type="body" idx="1"/>
+          </p:nvPr>
+        </p:nvSpPr>
+        <p:spPr>
+          <a:xfrm>
+            <a:off x="685800" y="4343400"/>
+            <a:ext cx="5486400" cy="4114800"/>
+          </a:xfrm>
+          <a:prstGeom prst="rect">
+            <a:avLst/>
+          </a:prstGeom>
+        </p:spPr>
+        <p:txBody>
+          <a:bodyPr spcFirstLastPara="1" wrap="square" lIns="91425" tIns="91425" rIns="91425" bIns="91425" anchor="t" anchorCtr="0">
+            <a:noAutofit/>
+          </a:bodyPr>
+          <a:lstStyle/>
+          <a:p>
+            <a:pPr marL="0" lvl="0" indent="0" algn="l" rtl="0">
+              <a:spcBef>
+                <a:spcPts val="0"/>
+              </a:spcBef>
+              <a:spcAft>
+                <a:spcPts val="0"/>
+              </a:spcAft>
+              <a:buNone/>
+            </a:pPr>
+            <a:endParaRPr/>
+          </a:p>
+        </p:txBody>
+      </p:sp>
+      <p:sp>
+        <p:nvSpPr>
+          <p:cNvPr id="201" name="Google Shape;201;g3bc8b057dd2_0_62:notes">
+            <a:extLst>
+              <a:ext uri="{FF2B5EF4-FFF2-40B4-BE49-F238E27FC236}">
+                <a16:creationId xmlns:a16="http://schemas.microsoft.com/office/drawing/2014/main" id="{2A2F1CB8-DB61-696F-D67A-5603F39E2C97}"/>
+              </a:ext>
+            </a:extLst>
+          </p:cNvPr>
+          <p:cNvSpPr>
+            <a:spLocks noGrp="1" noRot="1" noChangeAspect="1"/>
+          </p:cNvSpPr>
+          <p:nvPr>
+            <p:ph type="sldImg" idx="2"/>
+          </p:nvPr>
+        </p:nvSpPr>
+        <p:spPr>
+          <a:xfrm>
+            <a:off x="381000" y="685800"/>
+            <a:ext cx="6096000" cy="3429000"/>
+          </a:xfrm>
+          <a:custGeom>
+            <a:avLst/>
+            <a:gdLst/>
+            <a:ahLst/>
+            <a:cxnLst/>
+            <a:rect l="l" t="t" r="r" b="b"/>
+            <a:pathLst>
+              <a:path w="120000" h="120000" extrusionOk="0">
+                <a:moveTo>
+                  <a:pt x="0" y="0"/>
+                </a:moveTo>
+                <a:lnTo>
+                  <a:pt x="120000" y="0"/>
+                </a:lnTo>
+                <a:lnTo>
+                  <a:pt x="120000" y="120000"/>
+                </a:lnTo>
+                <a:lnTo>
+                  <a:pt x="0" y="120000"/>
+                </a:lnTo>
+                <a:close/>
+              </a:path>
+            </a:pathLst>
+          </a:custGeom>
+        </p:spPr>
+      </p:sp>
+    </p:spTree>
+    <p:extLst>
+      <p:ext uri="{BB962C8B-B14F-4D97-AF65-F5344CB8AC3E}">
+        <p14:creationId xmlns:p14="http://schemas.microsoft.com/office/powerpoint/2010/main" val="2819380779"/>
+      </p:ext>
+    </p:extLst>
+  </p:cSld>
+  <p:clrMapOvr>
+    <a:masterClrMapping/>
+  </p:clrMapOvr>
+</p:notes>
+</file>
+
+<file path=ppt/notesSlides/notesSlide12.xml><?xml version="1.0" encoding="utf-8"?>
+<p:notes xmlns:a="http://schemas.openxmlformats.org/drawingml/2006/main" xmlns:r="http://schemas.openxmlformats.org/officeDocument/2006/relationships" xmlns:p="http://schemas.openxmlformats.org/presentationml/2006/main" showMasterSp="0" showMasterPhAnim="0">
+  <p:cSld>
+    <p:spTree>
+      <p:nvGrpSpPr>
+        <p:cNvPr id="1" name="Shape 199">
+          <a:extLst>
+            <a:ext uri="{FF2B5EF4-FFF2-40B4-BE49-F238E27FC236}">
+              <a16:creationId xmlns:a16="http://schemas.microsoft.com/office/drawing/2014/main" id="{B2BED9F9-7120-C7BE-3DD0-CCC107F8175F}"/>
+            </a:ext>
+          </a:extLst>
+        </p:cNvPr>
+        <p:cNvGrpSpPr/>
+        <p:nvPr/>
+      </p:nvGrpSpPr>
+      <p:grpSpPr>
+        <a:xfrm>
+          <a:off x="0" y="0"/>
+          <a:ext cx="0" cy="0"/>
+          <a:chOff x="0" y="0"/>
+          <a:chExt cx="0" cy="0"/>
+        </a:xfrm>
+      </p:grpSpPr>
+      <p:sp>
+        <p:nvSpPr>
+          <p:cNvPr id="200" name="Google Shape;200;g3bc8b057dd2_0_62:notes">
+            <a:extLst>
+              <a:ext uri="{FF2B5EF4-FFF2-40B4-BE49-F238E27FC236}">
+                <a16:creationId xmlns:a16="http://schemas.microsoft.com/office/drawing/2014/main" id="{EDF4F471-7EC6-B324-E092-E576939CD0C8}"/>
+              </a:ext>
+            </a:extLst>
+          </p:cNvPr>
+          <p:cNvSpPr txBox="1">
+            <a:spLocks noGrp="1"/>
+          </p:cNvSpPr>
+          <p:nvPr>
+            <p:ph type="body" idx="1"/>
+          </p:nvPr>
+        </p:nvSpPr>
+        <p:spPr>
+          <a:xfrm>
+            <a:off x="685800" y="4343400"/>
+            <a:ext cx="5486400" cy="4114800"/>
+          </a:xfrm>
+          <a:prstGeom prst="rect">
+            <a:avLst/>
+          </a:prstGeom>
+        </p:spPr>
+        <p:txBody>
+          <a:bodyPr spcFirstLastPara="1" wrap="square" lIns="91425" tIns="91425" rIns="91425" bIns="91425" anchor="t" anchorCtr="0">
+            <a:noAutofit/>
+          </a:bodyPr>
+          <a:lstStyle/>
+          <a:p>
+            <a:pPr marL="0" lvl="0" indent="0" algn="l" rtl="0">
+              <a:spcBef>
+                <a:spcPts val="0"/>
+              </a:spcBef>
+              <a:spcAft>
+                <a:spcPts val="0"/>
+              </a:spcAft>
+              <a:buNone/>
+            </a:pPr>
+            <a:endParaRPr/>
+          </a:p>
+        </p:txBody>
+      </p:sp>
+      <p:sp>
+        <p:nvSpPr>
+          <p:cNvPr id="201" name="Google Shape;201;g3bc8b057dd2_0_62:notes">
+            <a:extLst>
+              <a:ext uri="{FF2B5EF4-FFF2-40B4-BE49-F238E27FC236}">
+                <a16:creationId xmlns:a16="http://schemas.microsoft.com/office/drawing/2014/main" id="{BE82FB1D-DB1D-CFEF-4AF6-C938CD538357}"/>
+              </a:ext>
+            </a:extLst>
+          </p:cNvPr>
+          <p:cNvSpPr>
+            <a:spLocks noGrp="1" noRot="1" noChangeAspect="1"/>
+          </p:cNvSpPr>
+          <p:nvPr>
+            <p:ph type="sldImg" idx="2"/>
+          </p:nvPr>
+        </p:nvSpPr>
+        <p:spPr>
+          <a:xfrm>
+            <a:off x="381000" y="685800"/>
+            <a:ext cx="6096000" cy="3429000"/>
+          </a:xfrm>
+          <a:custGeom>
+            <a:avLst/>
+            <a:gdLst/>
+            <a:ahLst/>
+            <a:cxnLst/>
+            <a:rect l="l" t="t" r="r" b="b"/>
+            <a:pathLst>
+              <a:path w="120000" h="120000" extrusionOk="0">
+                <a:moveTo>
+                  <a:pt x="0" y="0"/>
+                </a:moveTo>
+                <a:lnTo>
+                  <a:pt x="120000" y="0"/>
+                </a:lnTo>
+                <a:lnTo>
+                  <a:pt x="120000" y="120000"/>
+                </a:lnTo>
+                <a:lnTo>
+                  <a:pt x="0" y="120000"/>
+                </a:lnTo>
+                <a:close/>
+              </a:path>
+            </a:pathLst>
+          </a:custGeom>
+        </p:spPr>
+      </p:sp>
+    </p:spTree>
+    <p:extLst>
+      <p:ext uri="{BB962C8B-B14F-4D97-AF65-F5344CB8AC3E}">
+        <p14:creationId xmlns:p14="http://schemas.microsoft.com/office/powerpoint/2010/main" val="452139427"/>
+      </p:ext>
+    </p:extLst>
+  </p:cSld>
+  <p:clrMapOvr>
+    <a:masterClrMapping/>
+  </p:clrMapOvr>
+</p:notes>
+</file>
+
+<file path=ppt/notesSlides/notesSlide13.xml><?xml version="1.0" encoding="utf-8"?>
+<p:notes xmlns:a="http://schemas.openxmlformats.org/drawingml/2006/main" xmlns:r="http://schemas.openxmlformats.org/officeDocument/2006/relationships" xmlns:p="http://schemas.openxmlformats.org/presentationml/2006/main" showMasterSp="0" showMasterPhAnim="0">
+  <p:cSld>
+    <p:spTree>
+      <p:nvGrpSpPr>
+        <p:cNvPr id="1" name="Shape 248"/>
+        <p:cNvGrpSpPr/>
+        <p:nvPr/>
+      </p:nvGrpSpPr>
+      <p:grpSpPr>
+        <a:xfrm>
+          <a:off x="0" y="0"/>
+          <a:ext cx="0" cy="0"/>
+          <a:chOff x="0" y="0"/>
+          <a:chExt cx="0" cy="0"/>
+        </a:xfrm>
+      </p:grpSpPr>
+      <p:sp>
+        <p:nvSpPr>
+          <p:cNvPr id="249" name="Google Shape;249;g3bc8b057dd2_0_126:notes"/>
+          <p:cNvSpPr txBox="1">
+            <a:spLocks noGrp="1"/>
+          </p:cNvSpPr>
+          <p:nvPr>
+            <p:ph type="body" idx="1"/>
+          </p:nvPr>
+        </p:nvSpPr>
+        <p:spPr>
+          <a:xfrm>
+            <a:off x="685800" y="4343400"/>
+            <a:ext cx="5486400" cy="4114800"/>
+          </a:xfrm>
+          <a:prstGeom prst="rect">
+            <a:avLst/>
+          </a:prstGeom>
+        </p:spPr>
+        <p:txBody>
+          <a:bodyPr spcFirstLastPara="1" wrap="square" lIns="91425" tIns="91425" rIns="91425" bIns="91425" anchor="t" anchorCtr="0">
+            <a:noAutofit/>
+          </a:bodyPr>
+          <a:lstStyle/>
+          <a:p>
+            <a:pPr marL="0" lvl="0" indent="0" algn="l" rtl="0">
+              <a:spcBef>
+                <a:spcPts val="0"/>
+              </a:spcBef>
+              <a:spcAft>
+                <a:spcPts val="0"/>
+              </a:spcAft>
+              <a:buNone/>
+            </a:pPr>
+            <a:endParaRPr/>
+          </a:p>
+        </p:txBody>
+      </p:sp>
+      <p:sp>
+        <p:nvSpPr>
+          <p:cNvPr id="250" name="Google Shape;250;g3bc8b057dd2_0_126:notes"/>
+          <p:cNvSpPr>
+            <a:spLocks noGrp="1" noRot="1" noChangeAspect="1"/>
+          </p:cNvSpPr>
+          <p:nvPr>
+            <p:ph type="sldImg" idx="2"/>
+          </p:nvPr>
+        </p:nvSpPr>
+        <p:spPr>
+          <a:xfrm>
+            <a:off x="381000" y="685800"/>
+            <a:ext cx="6096000" cy="3429000"/>
+          </a:xfrm>
+          <a:custGeom>
+            <a:avLst/>
+            <a:gdLst/>
+            <a:ahLst/>
+            <a:cxnLst/>
+            <a:rect l="l" t="t" r="r" b="b"/>
+            <a:pathLst>
+              <a:path w="120000" h="120000" extrusionOk="0">
+                <a:moveTo>
+                  <a:pt x="0" y="0"/>
+                </a:moveTo>
+                <a:lnTo>
+                  <a:pt x="120000" y="0"/>
+                </a:lnTo>
+                <a:lnTo>
+                  <a:pt x="120000" y="120000"/>
+                </a:lnTo>
+                <a:lnTo>
+                  <a:pt x="0" y="120000"/>
+                </a:lnTo>
+                <a:close/>
+              </a:path>
+            </a:pathLst>
+          </a:custGeom>
+        </p:spPr>
+      </p:sp>
+    </p:spTree>
+  </p:cSld>
+  <p:clrMapOvr>
+    <a:masterClrMapping/>
+  </p:clrMapOvr>
+</p:notes>
+</file>
+
+<file path=ppt/notesSlides/notesSlide14.xml><?xml version="1.0" encoding="utf-8"?>
+<p:notes xmlns:a="http://schemas.openxmlformats.org/drawingml/2006/main" xmlns:r="http://schemas.openxmlformats.org/officeDocument/2006/relationships" xmlns:p="http://schemas.openxmlformats.org/presentationml/2006/main" showMasterSp="0" showMasterPhAnim="0">
+  <p:cSld>
+    <p:spTree>
+      <p:nvGrpSpPr>
+        <p:cNvPr id="1" name="Shape 212"/>
+        <p:cNvGrpSpPr/>
+        <p:nvPr/>
+      </p:nvGrpSpPr>
+      <p:grpSpPr>
+        <a:xfrm>
+          <a:off x="0" y="0"/>
+          <a:ext cx="0" cy="0"/>
+          <a:chOff x="0" y="0"/>
+          <a:chExt cx="0" cy="0"/>
+        </a:xfrm>
+      </p:grpSpPr>
+      <p:sp>
+        <p:nvSpPr>
+          <p:cNvPr id="213" name="Google Shape;213;g3bc8b057dd2_0_96:notes"/>
+          <p:cNvSpPr txBox="1">
+            <a:spLocks noGrp="1"/>
+          </p:cNvSpPr>
+          <p:nvPr>
+            <p:ph type="body" idx="1"/>
+          </p:nvPr>
+        </p:nvSpPr>
+        <p:spPr>
+          <a:xfrm>
+            <a:off x="685800" y="4343400"/>
+            <a:ext cx="5486400" cy="4114800"/>
+          </a:xfrm>
+          <a:prstGeom prst="rect">
+            <a:avLst/>
+          </a:prstGeom>
+        </p:spPr>
+        <p:txBody>
+          <a:bodyPr spcFirstLastPara="1" wrap="square" lIns="91425" tIns="91425" rIns="91425" bIns="91425" anchor="t" anchorCtr="0">
+            <a:noAutofit/>
+          </a:bodyPr>
+          <a:lstStyle/>
+          <a:p>
+            <a:pPr marL="0" lvl="0" indent="0" algn="l" rtl="0">
+              <a:spcBef>
+                <a:spcPts val="0"/>
+              </a:spcBef>
+              <a:spcAft>
+                <a:spcPts val="0"/>
+              </a:spcAft>
+              <a:buNone/>
+            </a:pPr>
+            <a:endParaRPr/>
+          </a:p>
+        </p:txBody>
+      </p:sp>
+      <p:sp>
+        <p:nvSpPr>
+          <p:cNvPr id="214" name="Google Shape;214;g3bc8b057dd2_0_96:notes"/>
+          <p:cNvSpPr>
+            <a:spLocks noGrp="1" noRot="1" noChangeAspect="1"/>
+          </p:cNvSpPr>
+          <p:nvPr>
+            <p:ph type="sldImg" idx="2"/>
+          </p:nvPr>
+        </p:nvSpPr>
+        <p:spPr>
+          <a:xfrm>
+            <a:off x="381000" y="685800"/>
+            <a:ext cx="6096000" cy="3429000"/>
+          </a:xfrm>
+          <a:custGeom>
+            <a:avLst/>
+            <a:gdLst/>
+            <a:ahLst/>
+            <a:cxnLst/>
+            <a:rect l="l" t="t" r="r" b="b"/>
+            <a:pathLst>
+              <a:path w="120000" h="120000" extrusionOk="0">
+                <a:moveTo>
+                  <a:pt x="0" y="0"/>
+                </a:moveTo>
+                <a:lnTo>
+                  <a:pt x="120000" y="0"/>
+                </a:lnTo>
+                <a:lnTo>
+                  <a:pt x="120000" y="120000"/>
+                </a:lnTo>
+                <a:lnTo>
+                  <a:pt x="0" y="120000"/>
+                </a:lnTo>
+                <a:close/>
+              </a:path>
+            </a:pathLst>
+          </a:custGeom>
+        </p:spPr>
+      </p:sp>
+    </p:spTree>
+  </p:cSld>
+  <p:clrMapOvr>
+    <a:masterClrMapping/>
+  </p:clrMapOvr>
+</p:notes>
+</file>
+
+<file path=ppt/notesSlides/notesSlide15.xml><?xml version="1.0" encoding="utf-8"?>
+<p:notes xmlns:a="http://schemas.openxmlformats.org/drawingml/2006/main" xmlns:r="http://schemas.openxmlformats.org/officeDocument/2006/relationships" xmlns:p="http://schemas.openxmlformats.org/presentationml/2006/main" showMasterSp="0" showMasterPhAnim="0">
+  <p:cSld>
+    <p:spTree>
+      <p:nvGrpSpPr>
+        <p:cNvPr id="1" name="Shape 187"/>
+        <p:cNvGrpSpPr/>
+        <p:nvPr/>
+      </p:nvGrpSpPr>
+      <p:grpSpPr>
+        <a:xfrm>
+          <a:off x="0" y="0"/>
+          <a:ext cx="0" cy="0"/>
+          <a:chOff x="0" y="0"/>
+          <a:chExt cx="0" cy="0"/>
+        </a:xfrm>
+      </p:grpSpPr>
+      <p:sp>
+        <p:nvSpPr>
+          <p:cNvPr id="188" name="Google Shape;188;g3bc8b057dd2_0_48:notes"/>
+          <p:cNvSpPr txBox="1">
+            <a:spLocks noGrp="1"/>
+          </p:cNvSpPr>
+          <p:nvPr>
+            <p:ph type="body" idx="1"/>
+          </p:nvPr>
+        </p:nvSpPr>
+        <p:spPr>
+          <a:xfrm>
+            <a:off x="685800" y="4343400"/>
+            <a:ext cx="5486400" cy="4114800"/>
+          </a:xfrm>
+          <a:prstGeom prst="rect">
+            <a:avLst/>
+          </a:prstGeom>
+        </p:spPr>
+        <p:txBody>
+          <a:bodyPr spcFirstLastPara="1" wrap="square" lIns="91425" tIns="91425" rIns="91425" bIns="91425" anchor="t" anchorCtr="0">
+            <a:noAutofit/>
+          </a:bodyPr>
+          <a:lstStyle/>
+          <a:p>
+            <a:pPr marL="0" lvl="0" indent="0" algn="l" rtl="0">
+              <a:spcBef>
+                <a:spcPts val="0"/>
+              </a:spcBef>
+              <a:spcAft>
+                <a:spcPts val="0"/>
+              </a:spcAft>
+              <a:buNone/>
+            </a:pPr>
+            <a:endParaRPr/>
+          </a:p>
+        </p:txBody>
+      </p:sp>
+      <p:sp>
+        <p:nvSpPr>
+          <p:cNvPr id="189" name="Google Shape;189;g3bc8b057dd2_0_48:notes"/>
+          <p:cNvSpPr>
+            <a:spLocks noGrp="1" noRot="1" noChangeAspect="1"/>
+          </p:cNvSpPr>
+          <p:nvPr>
+            <p:ph type="sldImg" idx="2"/>
+          </p:nvPr>
+        </p:nvSpPr>
+        <p:spPr>
+          <a:xfrm>
+            <a:off x="381000" y="685800"/>
+            <a:ext cx="6096000" cy="3429000"/>
+          </a:xfrm>
+          <a:custGeom>
+            <a:avLst/>
+            <a:gdLst/>
+            <a:ahLst/>
+            <a:cxnLst/>
+            <a:rect l="l" t="t" r="r" b="b"/>
+            <a:pathLst>
+              <a:path w="120000" h="120000" extrusionOk="0">
+                <a:moveTo>
+                  <a:pt x="0" y="0"/>
+                </a:moveTo>
+                <a:lnTo>
+                  <a:pt x="120000" y="0"/>
+                </a:lnTo>
+                <a:lnTo>
+                  <a:pt x="120000" y="120000"/>
+                </a:lnTo>
+                <a:lnTo>
+                  <a:pt x="0" y="120000"/>
+                </a:lnTo>
+                <a:close/>
+              </a:path>
+            </a:pathLst>
+          </a:custGeom>
+        </p:spPr>
+      </p:sp>
+    </p:spTree>
+  </p:cSld>
+  <p:clrMapOvr>
+    <a:masterClrMapping/>
+  </p:clrMapOvr>
+</p:notes>
+</file>
+
+<file path=ppt/notesSlides/notesSlide16.xml><?xml version="1.0" encoding="utf-8"?>
 <p:notes xmlns:a="http://schemas.openxmlformats.org/drawingml/2006/main" xmlns:r="http://schemas.openxmlformats.org/officeDocument/2006/relationships" xmlns:p="http://schemas.openxmlformats.org/presentationml/2006/main" showMasterSp="0" showMasterPhAnim="0">
   <p:cSld>
     <p:spTree>
@@ -1047,111 +1617,7 @@
 </p:notes>
 </file>
 
-<file path=ppt/notesSlides/notesSlide12.xml><?xml version="1.0" encoding="utf-8"?>
-<p:notes xmlns:a="http://schemas.openxmlformats.org/drawingml/2006/main" xmlns:r="http://schemas.openxmlformats.org/officeDocument/2006/relationships" xmlns:p="http://schemas.openxmlformats.org/presentationml/2006/main" showMasterSp="0" showMasterPhAnim="0">
-  <p:cSld>
-    <p:spTree>
-      <p:nvGrpSpPr>
-        <p:cNvPr id="1" name="Shape 248"/>
-        <p:cNvGrpSpPr/>
-        <p:nvPr/>
-      </p:nvGrpSpPr>
-      <p:grpSpPr>
-        <a:xfrm>
-          <a:off x="0" y="0"/>
-          <a:ext cx="0" cy="0"/>
-          <a:chOff x="0" y="0"/>
-          <a:chExt cx="0" cy="0"/>
-        </a:xfrm>
-      </p:grpSpPr>
-      <p:sp>
-        <p:nvSpPr>
-          <p:cNvPr id="249" name="Google Shape;249;g3bc8b057dd2_0_126:notes"/>
-          <p:cNvSpPr txBox="1">
-            <a:spLocks noGrp="1"/>
-          </p:cNvSpPr>
-          <p:nvPr>
-            <p:ph type="body" idx="1"/>
-          </p:nvPr>
-        </p:nvSpPr>
-        <p:spPr>
-          <a:xfrm>
-            <a:off x="685800" y="4343400"/>
-            <a:ext cx="5486400" cy="4114800"/>
-          </a:xfrm>
-          <a:prstGeom prst="rect">
-            <a:avLst/>
-          </a:prstGeom>
-        </p:spPr>
-        <p:txBody>
-          <a:bodyPr spcFirstLastPara="1" wrap="square" lIns="91425" tIns="91425" rIns="91425" bIns="91425" anchor="t" anchorCtr="0">
-            <a:noAutofit/>
-          </a:bodyPr>
-          <a:lstStyle/>
-          <a:p>
-            <a:pPr marL="0" lvl="0" indent="0" algn="l" rtl="0">
-              <a:spcBef>
-                <a:spcPts val="0"/>
-              </a:spcBef>
-              <a:spcAft>
-                <a:spcPts val="0"/>
-              </a:spcAft>
-              <a:buNone/>
-            </a:pPr>
-            <a:endParaRPr/>
-          </a:p>
-        </p:txBody>
-      </p:sp>
-      <p:sp>
-        <p:nvSpPr>
-          <p:cNvPr id="250" name="Google Shape;250;g3bc8b057dd2_0_126:notes"/>
-          <p:cNvSpPr>
-            <a:spLocks noGrp="1" noRot="1" noChangeAspect="1"/>
-          </p:cNvSpPr>
-          <p:nvPr>
-            <p:ph type="sldImg" idx="2"/>
-          </p:nvPr>
-        </p:nvSpPr>
-        <p:spPr>
-          <a:xfrm>
-            <a:off x="381000" y="685800"/>
-            <a:ext cx="6096000" cy="3429000"/>
-          </a:xfrm>
-          <a:custGeom>
-            <a:avLst/>
-            <a:gdLst/>
-            <a:ahLst/>
-            <a:cxnLst/>
-            <a:rect l="l" t="t" r="r" b="b"/>
-            <a:pathLst>
-              <a:path w="120000" h="120000" extrusionOk="0">
-                <a:moveTo>
-                  <a:pt x="0" y="0"/>
-                </a:moveTo>
-                <a:lnTo>
-                  <a:pt x="120000" y="0"/>
-                </a:lnTo>
-                <a:lnTo>
-                  <a:pt x="120000" y="120000"/>
-                </a:lnTo>
-                <a:lnTo>
-                  <a:pt x="0" y="120000"/>
-                </a:lnTo>
-                <a:close/>
-              </a:path>
-            </a:pathLst>
-          </a:custGeom>
-        </p:spPr>
-      </p:sp>
-    </p:spTree>
-  </p:cSld>
-  <p:clrMapOvr>
-    <a:masterClrMapping/>
-  </p:clrMapOvr>
-</p:notes>
-</file>
-
-<file path=ppt/notesSlides/notesSlide13.xml><?xml version="1.0" encoding="utf-8"?>
+<file path=ppt/notesSlides/notesSlide17.xml><?xml version="1.0" encoding="utf-8"?>
 <p:notes xmlns:a="http://schemas.openxmlformats.org/drawingml/2006/main" xmlns:r="http://schemas.openxmlformats.org/officeDocument/2006/relationships" xmlns:p="http://schemas.openxmlformats.org/presentationml/2006/main" showMasterSp="0" showMasterPhAnim="0">
   <p:cSld>
     <p:spTree>
@@ -1803,7 +2269,13 @@
   <p:cSld>
     <p:spTree>
       <p:nvGrpSpPr>
-        <p:cNvPr id="1" name="Shape 187"/>
+        <p:cNvPr id="1" name="Shape 224">
+          <a:extLst>
+            <a:ext uri="{FF2B5EF4-FFF2-40B4-BE49-F238E27FC236}">
+              <a16:creationId xmlns:a16="http://schemas.microsoft.com/office/drawing/2014/main" id="{622DA171-FA86-8E68-C19C-7FEE037FC8D5}"/>
+            </a:ext>
+          </a:extLst>
+        </p:cNvPr>
         <p:cNvGrpSpPr/>
         <p:nvPr/>
       </p:nvGrpSpPr>
@@ -1817,7 +2289,13 @@
       </p:grpSpPr>
       <p:sp>
         <p:nvSpPr>
-          <p:cNvPr id="188" name="Google Shape;188;g3bc8b057dd2_0_48:notes"/>
+          <p:cNvPr id="225" name="Google Shape;225;g3bc8b057dd2_0_106:notes">
+            <a:extLst>
+              <a:ext uri="{FF2B5EF4-FFF2-40B4-BE49-F238E27FC236}">
+                <a16:creationId xmlns:a16="http://schemas.microsoft.com/office/drawing/2014/main" id="{385579CB-661D-C2B6-519F-E51CE3E009BE}"/>
+              </a:ext>
+            </a:extLst>
+          </p:cNvPr>
           <p:cNvSpPr txBox="1">
             <a:spLocks noGrp="1"/>
           </p:cNvSpPr>
@@ -1855,7 +2333,13 @@
       </p:sp>
       <p:sp>
         <p:nvSpPr>
-          <p:cNvPr id="189" name="Google Shape;189;g3bc8b057dd2_0_48:notes"/>
+          <p:cNvPr id="226" name="Google Shape;226;g3bc8b057dd2_0_106:notes">
+            <a:extLst>
+              <a:ext uri="{FF2B5EF4-FFF2-40B4-BE49-F238E27FC236}">
+                <a16:creationId xmlns:a16="http://schemas.microsoft.com/office/drawing/2014/main" id="{65A400BC-5D63-6961-B715-48F6B09442CB}"/>
+              </a:ext>
+            </a:extLst>
+          </p:cNvPr>
           <p:cNvSpPr>
             <a:spLocks noGrp="1" noRot="1" noChangeAspect="1"/>
           </p:cNvSpPr>
@@ -1895,6 +2379,11 @@
         </p:spPr>
       </p:sp>
     </p:spTree>
+    <p:extLst>
+      <p:ext uri="{BB962C8B-B14F-4D97-AF65-F5344CB8AC3E}">
+        <p14:creationId xmlns:p14="http://schemas.microsoft.com/office/powerpoint/2010/main" val="3196034108"/>
+      </p:ext>
+    </p:extLst>
   </p:cSld>
   <p:clrMapOvr>
     <a:masterClrMapping/>
@@ -1907,7 +2396,13 @@
   <p:cSld>
     <p:spTree>
       <p:nvGrpSpPr>
-        <p:cNvPr id="1" name="Shape 199"/>
+        <p:cNvPr id="1" name="Shape 224">
+          <a:extLst>
+            <a:ext uri="{FF2B5EF4-FFF2-40B4-BE49-F238E27FC236}">
+              <a16:creationId xmlns:a16="http://schemas.microsoft.com/office/drawing/2014/main" id="{E5686FC1-CF75-0195-BF78-2B0A61B68E46}"/>
+            </a:ext>
+          </a:extLst>
+        </p:cNvPr>
         <p:cNvGrpSpPr/>
         <p:nvPr/>
       </p:nvGrpSpPr>
@@ -1921,7 +2416,13 @@
       </p:grpSpPr>
       <p:sp>
         <p:nvSpPr>
-          <p:cNvPr id="200" name="Google Shape;200;g3bc8b057dd2_0_62:notes"/>
+          <p:cNvPr id="225" name="Google Shape;225;g3bc8b057dd2_0_106:notes">
+            <a:extLst>
+              <a:ext uri="{FF2B5EF4-FFF2-40B4-BE49-F238E27FC236}">
+                <a16:creationId xmlns:a16="http://schemas.microsoft.com/office/drawing/2014/main" id="{C611CF26-50E2-C08A-F9B6-398A893DE101}"/>
+              </a:ext>
+            </a:extLst>
+          </p:cNvPr>
           <p:cNvSpPr txBox="1">
             <a:spLocks noGrp="1"/>
           </p:cNvSpPr>
@@ -1959,7 +2460,13 @@
       </p:sp>
       <p:sp>
         <p:nvSpPr>
-          <p:cNvPr id="201" name="Google Shape;201;g3bc8b057dd2_0_62:notes"/>
+          <p:cNvPr id="226" name="Google Shape;226;g3bc8b057dd2_0_106:notes">
+            <a:extLst>
+              <a:ext uri="{FF2B5EF4-FFF2-40B4-BE49-F238E27FC236}">
+                <a16:creationId xmlns:a16="http://schemas.microsoft.com/office/drawing/2014/main" id="{C198EA35-25D3-AF8A-BFAA-F3DAEA5CDF45}"/>
+              </a:ext>
+            </a:extLst>
+          </p:cNvPr>
           <p:cNvSpPr>
             <a:spLocks noGrp="1" noRot="1" noChangeAspect="1"/>
           </p:cNvSpPr>
@@ -1999,6 +2506,11 @@
         </p:spPr>
       </p:sp>
     </p:spTree>
+    <p:extLst>
+      <p:ext uri="{BB962C8B-B14F-4D97-AF65-F5344CB8AC3E}">
+        <p14:creationId xmlns:p14="http://schemas.microsoft.com/office/powerpoint/2010/main" val="2159622010"/>
+      </p:ext>
+    </p:extLst>
   </p:cSld>
   <p:clrMapOvr>
     <a:masterClrMapping/>
@@ -2011,7 +2523,7 @@
   <p:cSld>
     <p:spTree>
       <p:nvGrpSpPr>
-        <p:cNvPr id="1" name="Shape 212"/>
+        <p:cNvPr id="1" name="Shape 224"/>
         <p:cNvGrpSpPr/>
         <p:nvPr/>
       </p:nvGrpSpPr>
@@ -2025,7 +2537,7 @@
       </p:grpSpPr>
       <p:sp>
         <p:nvSpPr>
-          <p:cNvPr id="213" name="Google Shape;213;g3bc8b057dd2_0_96:notes"/>
+          <p:cNvPr id="225" name="Google Shape;225;g3bc8b057dd2_0_106:notes"/>
           <p:cNvSpPr txBox="1">
             <a:spLocks noGrp="1"/>
           </p:cNvSpPr>
@@ -2063,7 +2575,7 @@
       </p:sp>
       <p:sp>
         <p:nvSpPr>
-          <p:cNvPr id="214" name="Google Shape;214;g3bc8b057dd2_0_96:notes"/>
+          <p:cNvPr id="226" name="Google Shape;226;g3bc8b057dd2_0_106:notes"/>
           <p:cNvSpPr>
             <a:spLocks noGrp="1" noRot="1" noChangeAspect="1"/>
           </p:cNvSpPr>
@@ -11529,6 +12041,42 @@
               </a:spcAft>
               <a:buNone/>
             </a:pPr>
+            <a:r>
+              <a:rPr lang="en-IN" sz="2400" b="1" dirty="0">
+                <a:solidFill>
+                  <a:schemeClr val="dk1"/>
+                </a:solidFill>
+                <a:latin typeface="Nunito Sans"/>
+                <a:ea typeface="Nunito Sans"/>
+                <a:cs typeface="Nunito Sans"/>
+                <a:sym typeface="Nunito Sans"/>
+              </a:rPr>
+              <a:t>Team Name </a:t>
+            </a:r>
+            <a:r>
+              <a:rPr lang="en-IN" sz="2400" dirty="0">
+                <a:solidFill>
+                  <a:schemeClr val="dk1"/>
+                </a:solidFill>
+                <a:latin typeface="Nunito Sans"/>
+                <a:ea typeface="Nunito Sans"/>
+                <a:cs typeface="Nunito Sans"/>
+                <a:sym typeface="Nunito Sans"/>
+              </a:rPr>
+              <a:t>– </a:t>
+            </a:r>
+            <a:r>
+              <a:rPr lang="en-IN" sz="2400" dirty="0" err="1">
+                <a:solidFill>
+                  <a:schemeClr val="dk1"/>
+                </a:solidFill>
+                <a:latin typeface="Nunito Sans"/>
+                <a:ea typeface="Nunito Sans"/>
+                <a:cs typeface="Nunito Sans"/>
+                <a:sym typeface="Nunito Sans"/>
+              </a:rPr>
+              <a:t>Error_Runtime</a:t>
+            </a:r>
             <a:endParaRPr sz="2400" dirty="0">
               <a:solidFill>
                 <a:schemeClr val="dk1"/>
@@ -11902,7 +12450,7 @@
   <p:cSld>
     <p:spTree>
       <p:nvGrpSpPr>
-        <p:cNvPr id="1" name="Shape 227"/>
+        <p:cNvPr id="1" name="Shape 202"/>
         <p:cNvGrpSpPr/>
         <p:nvPr/>
       </p:nvGrpSpPr>
@@ -11916,7 +12464,7 @@
       </p:grpSpPr>
       <p:sp>
         <p:nvSpPr>
-          <p:cNvPr id="228" name="Google Shape;228;p33"/>
+          <p:cNvPr id="203" name="Google Shape;203;p31"/>
           <p:cNvSpPr/>
           <p:nvPr/>
         </p:nvSpPr>
@@ -11964,7 +12512,7 @@
       </p:sp>
       <p:sp>
         <p:nvSpPr>
-          <p:cNvPr id="229" name="Google Shape;229;p33"/>
+          <p:cNvPr id="204" name="Google Shape;204;p31"/>
           <p:cNvSpPr/>
           <p:nvPr/>
         </p:nvSpPr>
@@ -12012,7 +12560,7 @@
       </p:sp>
       <p:sp>
         <p:nvSpPr>
-          <p:cNvPr id="230" name="Google Shape;230;p33"/>
+          <p:cNvPr id="205" name="Google Shape;205;p31"/>
           <p:cNvSpPr/>
           <p:nvPr/>
         </p:nvSpPr>
@@ -12060,7 +12608,7 @@
       </p:sp>
       <p:sp>
         <p:nvSpPr>
-          <p:cNvPr id="231" name="Google Shape;231;p33"/>
+          <p:cNvPr id="206" name="Google Shape;206;p31"/>
           <p:cNvSpPr/>
           <p:nvPr/>
         </p:nvSpPr>
@@ -12108,7 +12656,7 @@
       </p:sp>
       <p:sp>
         <p:nvSpPr>
-          <p:cNvPr id="232" name="Google Shape;232;p33"/>
+          <p:cNvPr id="207" name="Google Shape;207;p31"/>
           <p:cNvSpPr/>
           <p:nvPr/>
         </p:nvSpPr>
@@ -12156,7 +12704,7 @@
       </p:sp>
       <p:sp>
         <p:nvSpPr>
-          <p:cNvPr id="233" name="Google Shape;233;p33"/>
+          <p:cNvPr id="208" name="Google Shape;208;p31"/>
           <p:cNvSpPr txBox="1"/>
           <p:nvPr/>
         </p:nvSpPr>
@@ -12198,7 +12746,7 @@
                 <a:cs typeface="Times New Roman"/>
                 <a:sym typeface="Times New Roman"/>
               </a:rPr>
-              <a:t>Methodology</a:t>
+              <a:t>Project Flow diagram/Architecture</a:t>
             </a:r>
             <a:endParaRPr sz="3000" b="1">
               <a:solidFill>
@@ -12214,7 +12762,7 @@
       </p:sp>
       <p:sp>
         <p:nvSpPr>
-          <p:cNvPr id="234" name="Google Shape;234;p33"/>
+          <p:cNvPr id="209" name="Google Shape;209;p31"/>
           <p:cNvSpPr txBox="1"/>
           <p:nvPr/>
         </p:nvSpPr>
@@ -12252,7 +12800,7 @@
                   <a:schemeClr val="lt1"/>
                 </a:solidFill>
               </a:rPr>
-              <a:t>8</a:t>
+              <a:t>6</a:t>
             </a:r>
             <a:endParaRPr sz="1400">
               <a:solidFill>
@@ -12266,678 +12814,12 @@
           </a:p>
         </p:txBody>
       </p:sp>
-      <p:sp>
-        <p:nvSpPr>
-          <p:cNvPr id="3" name="Rectangle 1">
+      <p:pic>
+        <p:nvPicPr>
+          <p:cNvPr id="8" name="Picture 7">
             <a:extLst>
               <a:ext uri="{FF2B5EF4-FFF2-40B4-BE49-F238E27FC236}">
-                <a16:creationId xmlns:a16="http://schemas.microsoft.com/office/drawing/2014/main" id="{C1937573-DF9F-FF56-D613-AC1B37C9818C}"/>
-              </a:ext>
-            </a:extLst>
-          </p:cNvPr>
-          <p:cNvSpPr txBox="1">
-            <a:spLocks noChangeArrowheads="1"/>
-          </p:cNvSpPr>
-          <p:nvPr/>
-        </p:nvSpPr>
-        <p:spPr bwMode="auto">
-          <a:xfrm>
-            <a:off x="365385" y="1053155"/>
-            <a:ext cx="8515350" cy="3462486"/>
-          </a:xfrm>
-          <a:prstGeom prst="rect">
-            <a:avLst/>
-          </a:prstGeom>
-          <a:noFill/>
-          <a:ln>
-            <a:noFill/>
-          </a:ln>
-          <a:effectLst/>
-          <a:extLst>
-            <a:ext uri="{909E8E84-426E-40DD-AFC4-6F175D3DCCD1}">
-              <a14:hiddenFill xmlns:a14="http://schemas.microsoft.com/office/drawing/2010/main">
-                <a:solidFill>
-                  <a:schemeClr val="accent1"/>
-                </a:solidFill>
-              </a14:hiddenFill>
-            </a:ext>
-            <a:ext uri="{91240B29-F687-4F45-9708-019B960494DF}">
-              <a14:hiddenLine xmlns:a14="http://schemas.microsoft.com/office/drawing/2010/main" w="9525">
-                <a:solidFill>
-                  <a:schemeClr val="tx1"/>
-                </a:solidFill>
-                <a:miter lim="800000"/>
-                <a:headEnd/>
-                <a:tailEnd/>
-              </a14:hiddenLine>
-            </a:ext>
-            <a:ext uri="{AF507438-7753-43E0-B8FC-AC1667EBCBE1}">
-              <a14:hiddenEffects xmlns:a14="http://schemas.microsoft.com/office/drawing/2010/main">
-                <a:effectLst>
-                  <a:outerShdw dist="35921" dir="2700000" algn="ctr" rotWithShape="0">
-                    <a:schemeClr val="bg2"/>
-                  </a:outerShdw>
-                </a:effectLst>
-              </a14:hiddenEffects>
-            </a:ext>
-          </a:extLst>
-        </p:spPr>
-        <p:txBody>
-          <a:bodyPr vert="horz" wrap="square" lIns="91440" tIns="0" rIns="91440" bIns="45720" numCol="1" anchor="ctr" anchorCtr="0" compatLnSpc="1">
-            <a:prstTxWarp prst="textNoShape">
-              <a:avLst/>
-            </a:prstTxWarp>
-            <a:spAutoFit/>
-          </a:bodyPr>
-          <a:lstStyle>
-            <a:defPPr marR="0" lvl="0" algn="l" rtl="0">
-              <a:lnSpc>
-                <a:spcPct val="100000"/>
-              </a:lnSpc>
-              <a:spcBef>
-                <a:spcPts val="0"/>
-              </a:spcBef>
-              <a:spcAft>
-                <a:spcPts val="0"/>
-              </a:spcAft>
-            </a:defPPr>
-            <a:lvl1pPr marR="0" lvl="0" algn="l" rtl="0">
-              <a:lnSpc>
-                <a:spcPct val="100000"/>
-              </a:lnSpc>
-              <a:spcBef>
-                <a:spcPts val="0"/>
-              </a:spcBef>
-              <a:spcAft>
-                <a:spcPts val="0"/>
-              </a:spcAft>
-              <a:buClr>
-                <a:srgbClr val="000000"/>
-              </a:buClr>
-              <a:buFont typeface="Arial"/>
-              <a:defRPr sz="1400" b="0" i="0" u="none" strike="noStrike" cap="none">
-                <a:solidFill>
-                  <a:srgbClr val="000000"/>
-                </a:solidFill>
-                <a:latin typeface="Arial"/>
-                <a:ea typeface="Arial"/>
-                <a:cs typeface="Arial"/>
-                <a:sym typeface="Arial"/>
-              </a:defRPr>
-            </a:lvl1pPr>
-            <a:lvl2pPr marR="0" lvl="1" algn="l" rtl="0">
-              <a:lnSpc>
-                <a:spcPct val="100000"/>
-              </a:lnSpc>
-              <a:spcBef>
-                <a:spcPts val="0"/>
-              </a:spcBef>
-              <a:spcAft>
-                <a:spcPts val="0"/>
-              </a:spcAft>
-              <a:buClr>
-                <a:srgbClr val="000000"/>
-              </a:buClr>
-              <a:buFont typeface="Arial"/>
-              <a:defRPr sz="1400" b="0" i="0" u="none" strike="noStrike" cap="none">
-                <a:solidFill>
-                  <a:srgbClr val="000000"/>
-                </a:solidFill>
-                <a:latin typeface="Arial"/>
-                <a:ea typeface="Arial"/>
-                <a:cs typeface="Arial"/>
-                <a:sym typeface="Arial"/>
-              </a:defRPr>
-            </a:lvl2pPr>
-            <a:lvl3pPr marR="0" lvl="2" algn="l" rtl="0">
-              <a:lnSpc>
-                <a:spcPct val="100000"/>
-              </a:lnSpc>
-              <a:spcBef>
-                <a:spcPts val="0"/>
-              </a:spcBef>
-              <a:spcAft>
-                <a:spcPts val="0"/>
-              </a:spcAft>
-              <a:buClr>
-                <a:srgbClr val="000000"/>
-              </a:buClr>
-              <a:buFont typeface="Arial"/>
-              <a:defRPr sz="1400" b="0" i="0" u="none" strike="noStrike" cap="none">
-                <a:solidFill>
-                  <a:srgbClr val="000000"/>
-                </a:solidFill>
-                <a:latin typeface="Arial"/>
-                <a:ea typeface="Arial"/>
-                <a:cs typeface="Arial"/>
-                <a:sym typeface="Arial"/>
-              </a:defRPr>
-            </a:lvl3pPr>
-            <a:lvl4pPr marR="0" lvl="3" algn="l" rtl="0">
-              <a:lnSpc>
-                <a:spcPct val="100000"/>
-              </a:lnSpc>
-              <a:spcBef>
-                <a:spcPts val="0"/>
-              </a:spcBef>
-              <a:spcAft>
-                <a:spcPts val="0"/>
-              </a:spcAft>
-              <a:buClr>
-                <a:srgbClr val="000000"/>
-              </a:buClr>
-              <a:buFont typeface="Arial"/>
-              <a:defRPr sz="1400" b="0" i="0" u="none" strike="noStrike" cap="none">
-                <a:solidFill>
-                  <a:srgbClr val="000000"/>
-                </a:solidFill>
-                <a:latin typeface="Arial"/>
-                <a:ea typeface="Arial"/>
-                <a:cs typeface="Arial"/>
-                <a:sym typeface="Arial"/>
-              </a:defRPr>
-            </a:lvl4pPr>
-            <a:lvl5pPr marR="0" lvl="4" algn="l" rtl="0">
-              <a:lnSpc>
-                <a:spcPct val="100000"/>
-              </a:lnSpc>
-              <a:spcBef>
-                <a:spcPts val="0"/>
-              </a:spcBef>
-              <a:spcAft>
-                <a:spcPts val="0"/>
-              </a:spcAft>
-              <a:buClr>
-                <a:srgbClr val="000000"/>
-              </a:buClr>
-              <a:buFont typeface="Arial"/>
-              <a:defRPr sz="1400" b="0" i="0" u="none" strike="noStrike" cap="none">
-                <a:solidFill>
-                  <a:srgbClr val="000000"/>
-                </a:solidFill>
-                <a:latin typeface="Arial"/>
-                <a:ea typeface="Arial"/>
-                <a:cs typeface="Arial"/>
-                <a:sym typeface="Arial"/>
-              </a:defRPr>
-            </a:lvl5pPr>
-            <a:lvl6pPr marR="0" lvl="5" algn="l" rtl="0">
-              <a:lnSpc>
-                <a:spcPct val="100000"/>
-              </a:lnSpc>
-              <a:spcBef>
-                <a:spcPts val="0"/>
-              </a:spcBef>
-              <a:spcAft>
-                <a:spcPts val="0"/>
-              </a:spcAft>
-              <a:buClr>
-                <a:srgbClr val="000000"/>
-              </a:buClr>
-              <a:buFont typeface="Arial"/>
-              <a:defRPr sz="1400" b="0" i="0" u="none" strike="noStrike" cap="none">
-                <a:solidFill>
-                  <a:srgbClr val="000000"/>
-                </a:solidFill>
-                <a:latin typeface="Arial"/>
-                <a:ea typeface="Arial"/>
-                <a:cs typeface="Arial"/>
-                <a:sym typeface="Arial"/>
-              </a:defRPr>
-            </a:lvl6pPr>
-            <a:lvl7pPr marR="0" lvl="6" algn="l" rtl="0">
-              <a:lnSpc>
-                <a:spcPct val="100000"/>
-              </a:lnSpc>
-              <a:spcBef>
-                <a:spcPts val="0"/>
-              </a:spcBef>
-              <a:spcAft>
-                <a:spcPts val="0"/>
-              </a:spcAft>
-              <a:buClr>
-                <a:srgbClr val="000000"/>
-              </a:buClr>
-              <a:buFont typeface="Arial"/>
-              <a:defRPr sz="1400" b="0" i="0" u="none" strike="noStrike" cap="none">
-                <a:solidFill>
-                  <a:srgbClr val="000000"/>
-                </a:solidFill>
-                <a:latin typeface="Arial"/>
-                <a:ea typeface="Arial"/>
-                <a:cs typeface="Arial"/>
-                <a:sym typeface="Arial"/>
-              </a:defRPr>
-            </a:lvl7pPr>
-            <a:lvl8pPr marR="0" lvl="7" algn="l" rtl="0">
-              <a:lnSpc>
-                <a:spcPct val="100000"/>
-              </a:lnSpc>
-              <a:spcBef>
-                <a:spcPts val="0"/>
-              </a:spcBef>
-              <a:spcAft>
-                <a:spcPts val="0"/>
-              </a:spcAft>
-              <a:buClr>
-                <a:srgbClr val="000000"/>
-              </a:buClr>
-              <a:buFont typeface="Arial"/>
-              <a:defRPr sz="1400" b="0" i="0" u="none" strike="noStrike" cap="none">
-                <a:solidFill>
-                  <a:srgbClr val="000000"/>
-                </a:solidFill>
-                <a:latin typeface="Arial"/>
-                <a:ea typeface="Arial"/>
-                <a:cs typeface="Arial"/>
-                <a:sym typeface="Arial"/>
-              </a:defRPr>
-            </a:lvl8pPr>
-            <a:lvl9pPr marR="0" lvl="8" algn="l" rtl="0">
-              <a:lnSpc>
-                <a:spcPct val="100000"/>
-              </a:lnSpc>
-              <a:spcBef>
-                <a:spcPts val="0"/>
-              </a:spcBef>
-              <a:spcAft>
-                <a:spcPts val="0"/>
-              </a:spcAft>
-              <a:buClr>
-                <a:srgbClr val="000000"/>
-              </a:buClr>
-              <a:buFont typeface="Arial"/>
-              <a:defRPr sz="1400" b="0" i="0" u="none" strike="noStrike" cap="none">
-                <a:solidFill>
-                  <a:srgbClr val="000000"/>
-                </a:solidFill>
-                <a:latin typeface="Arial"/>
-                <a:ea typeface="Arial"/>
-                <a:cs typeface="Arial"/>
-                <a:sym typeface="Arial"/>
-              </a:defRPr>
-            </a:lvl9pPr>
-          </a:lstStyle>
-          <a:p>
-            <a:pPr eaLnBrk="0" fontAlgn="base" hangingPunct="0">
-              <a:spcBef>
-                <a:spcPct val="0"/>
-              </a:spcBef>
-              <a:spcAft>
-                <a:spcPct val="0"/>
-              </a:spcAft>
-              <a:buClrTx/>
-              <a:buFontTx/>
-              <a:buChar char="•"/>
-            </a:pPr>
-            <a:r>
-              <a:rPr lang="en-US" altLang="en-US" sz="1800" b="1" dirty="0">
-                <a:solidFill>
-                  <a:schemeClr val="tx1"/>
-                </a:solidFill>
-                <a:latin typeface="Times New Roman" panose="02020603050405020304" pitchFamily="18" charset="0"/>
-                <a:cs typeface="Times New Roman" panose="02020603050405020304" pitchFamily="18" charset="0"/>
-              </a:rPr>
-              <a:t>Tech Stack:</a:t>
-            </a:r>
-            <a:endParaRPr lang="en-US" altLang="en-US" sz="1800" dirty="0">
-              <a:solidFill>
-                <a:schemeClr val="tx1"/>
-              </a:solidFill>
-              <a:latin typeface="Times New Roman" panose="02020603050405020304" pitchFamily="18" charset="0"/>
-              <a:cs typeface="Times New Roman" panose="02020603050405020304" pitchFamily="18" charset="0"/>
-            </a:endParaRPr>
-          </a:p>
-          <a:p>
-            <a:pPr eaLnBrk="0" fontAlgn="base" hangingPunct="0">
-              <a:spcBef>
-                <a:spcPct val="0"/>
-              </a:spcBef>
-              <a:spcAft>
-                <a:spcPct val="0"/>
-              </a:spcAft>
-              <a:buClrTx/>
-              <a:buFontTx/>
-              <a:buChar char="•"/>
-            </a:pPr>
-            <a:r>
-              <a:rPr lang="en-US" altLang="en-US" sz="1800" b="1" dirty="0">
-                <a:solidFill>
-                  <a:schemeClr val="tx1"/>
-                </a:solidFill>
-                <a:latin typeface="Times New Roman" panose="02020603050405020304" pitchFamily="18" charset="0"/>
-                <a:cs typeface="Times New Roman" panose="02020603050405020304" pitchFamily="18" charset="0"/>
-              </a:rPr>
-              <a:t>Backend:</a:t>
-            </a:r>
-            <a:r>
-              <a:rPr lang="en-US" altLang="en-US" sz="1800" dirty="0">
-                <a:solidFill>
-                  <a:schemeClr val="tx1"/>
-                </a:solidFill>
-                <a:latin typeface="Times New Roman" panose="02020603050405020304" pitchFamily="18" charset="0"/>
-                <a:cs typeface="Times New Roman" panose="02020603050405020304" pitchFamily="18" charset="0"/>
-              </a:rPr>
-              <a:t> Flask (Python) - </a:t>
-            </a:r>
-            <a:r>
-              <a:rPr lang="en-US" altLang="en-US" sz="1800" i="1" dirty="0">
-                <a:solidFill>
-                  <a:schemeClr val="tx1"/>
-                </a:solidFill>
-                <a:latin typeface="Times New Roman" panose="02020603050405020304" pitchFamily="18" charset="0"/>
-                <a:cs typeface="Times New Roman" panose="02020603050405020304" pitchFamily="18" charset="0"/>
-              </a:rPr>
-              <a:t>Chosen for lightweight routing.</a:t>
-            </a:r>
-            <a:endParaRPr lang="en-US" altLang="en-US" sz="1800" dirty="0">
-              <a:solidFill>
-                <a:schemeClr val="tx1"/>
-              </a:solidFill>
-              <a:latin typeface="Times New Roman" panose="02020603050405020304" pitchFamily="18" charset="0"/>
-              <a:cs typeface="Times New Roman" panose="02020603050405020304" pitchFamily="18" charset="0"/>
-            </a:endParaRPr>
-          </a:p>
-          <a:p>
-            <a:pPr eaLnBrk="0" fontAlgn="base" hangingPunct="0">
-              <a:spcBef>
-                <a:spcPct val="0"/>
-              </a:spcBef>
-              <a:spcAft>
-                <a:spcPct val="0"/>
-              </a:spcAft>
-              <a:buClrTx/>
-              <a:buFontTx/>
-              <a:buChar char="•"/>
-            </a:pPr>
-            <a:r>
-              <a:rPr lang="en-US" altLang="en-US" sz="1800" b="1" dirty="0">
-                <a:solidFill>
-                  <a:schemeClr val="tx1"/>
-                </a:solidFill>
-                <a:latin typeface="Times New Roman" panose="02020603050405020304" pitchFamily="18" charset="0"/>
-                <a:cs typeface="Times New Roman" panose="02020603050405020304" pitchFamily="18" charset="0"/>
-              </a:rPr>
-              <a:t>Analytics:</a:t>
-            </a:r>
-            <a:r>
-              <a:rPr lang="en-US" altLang="en-US" sz="1800" dirty="0">
-                <a:solidFill>
-                  <a:schemeClr val="tx1"/>
-                </a:solidFill>
-                <a:latin typeface="Times New Roman" panose="02020603050405020304" pitchFamily="18" charset="0"/>
-                <a:cs typeface="Times New Roman" panose="02020603050405020304" pitchFamily="18" charset="0"/>
-              </a:rPr>
-              <a:t> Pandas &amp; NumPy - </a:t>
-            </a:r>
-            <a:r>
-              <a:rPr lang="en-US" altLang="en-US" sz="1800" i="1" dirty="0">
-                <a:solidFill>
-                  <a:schemeClr val="tx1"/>
-                </a:solidFill>
-                <a:latin typeface="Times New Roman" panose="02020603050405020304" pitchFamily="18" charset="0"/>
-                <a:cs typeface="Times New Roman" panose="02020603050405020304" pitchFamily="18" charset="0"/>
-              </a:rPr>
-              <a:t>Chosen for vectorized data cleaning.</a:t>
-            </a:r>
-            <a:endParaRPr lang="en-US" altLang="en-US" sz="1800" dirty="0">
-              <a:solidFill>
-                <a:schemeClr val="tx1"/>
-              </a:solidFill>
-              <a:latin typeface="Times New Roman" panose="02020603050405020304" pitchFamily="18" charset="0"/>
-              <a:cs typeface="Times New Roman" panose="02020603050405020304" pitchFamily="18" charset="0"/>
-            </a:endParaRPr>
-          </a:p>
-          <a:p>
-            <a:pPr eaLnBrk="0" fontAlgn="base" hangingPunct="0">
-              <a:spcBef>
-                <a:spcPct val="0"/>
-              </a:spcBef>
-              <a:spcAft>
-                <a:spcPct val="0"/>
-              </a:spcAft>
-              <a:buClrTx/>
-              <a:buFontTx/>
-              <a:buChar char="•"/>
-            </a:pPr>
-            <a:r>
-              <a:rPr lang="en-US" altLang="en-US" sz="1800" b="1" dirty="0">
-                <a:solidFill>
-                  <a:schemeClr val="tx1"/>
-                </a:solidFill>
-                <a:latin typeface="Times New Roman" panose="02020603050405020304" pitchFamily="18" charset="0"/>
-                <a:cs typeface="Times New Roman" panose="02020603050405020304" pitchFamily="18" charset="0"/>
-              </a:rPr>
-              <a:t>NLP:</a:t>
-            </a:r>
-            <a:r>
-              <a:rPr lang="en-US" altLang="en-US" sz="1800" dirty="0">
-                <a:solidFill>
-                  <a:schemeClr val="tx1"/>
-                </a:solidFill>
-                <a:latin typeface="Times New Roman" panose="02020603050405020304" pitchFamily="18" charset="0"/>
-                <a:cs typeface="Times New Roman" panose="02020603050405020304" pitchFamily="18" charset="0"/>
-              </a:rPr>
-              <a:t> NLTK - Natural Language Tool Kit (VADER – Valence Aware Dictionary and </a:t>
-            </a:r>
-            <a:r>
-              <a:rPr lang="en-US" altLang="en-US" sz="1800" dirty="0" err="1">
-                <a:solidFill>
-                  <a:schemeClr val="tx1"/>
-                </a:solidFill>
-                <a:latin typeface="Times New Roman" panose="02020603050405020304" pitchFamily="18" charset="0"/>
-                <a:cs typeface="Times New Roman" panose="02020603050405020304" pitchFamily="18" charset="0"/>
-              </a:rPr>
-              <a:t>sEntiment</a:t>
-            </a:r>
-            <a:r>
-              <a:rPr lang="en-US" altLang="en-US" sz="1800" dirty="0">
-                <a:solidFill>
-                  <a:schemeClr val="tx1"/>
-                </a:solidFill>
-                <a:latin typeface="Times New Roman" panose="02020603050405020304" pitchFamily="18" charset="0"/>
-                <a:cs typeface="Times New Roman" panose="02020603050405020304" pitchFamily="18" charset="0"/>
-              </a:rPr>
-              <a:t> Reasoner) - </a:t>
-            </a:r>
-            <a:r>
-              <a:rPr lang="en-US" altLang="en-US" sz="1800" i="1" dirty="0">
-                <a:solidFill>
-                  <a:schemeClr val="tx1"/>
-                </a:solidFill>
-                <a:latin typeface="Times New Roman" panose="02020603050405020304" pitchFamily="18" charset="0"/>
-                <a:cs typeface="Times New Roman" panose="02020603050405020304" pitchFamily="18" charset="0"/>
-              </a:rPr>
-              <a:t>Chosen for efficient, rule-based sentiment scoring.</a:t>
-            </a:r>
-            <a:endParaRPr lang="en-US" altLang="en-US" sz="1800" dirty="0">
-              <a:solidFill>
-                <a:schemeClr val="tx1"/>
-              </a:solidFill>
-              <a:latin typeface="Times New Roman" panose="02020603050405020304" pitchFamily="18" charset="0"/>
-              <a:cs typeface="Times New Roman" panose="02020603050405020304" pitchFamily="18" charset="0"/>
-            </a:endParaRPr>
-          </a:p>
-          <a:p>
-            <a:pPr eaLnBrk="0" fontAlgn="base" hangingPunct="0">
-              <a:spcBef>
-                <a:spcPct val="0"/>
-              </a:spcBef>
-              <a:spcAft>
-                <a:spcPct val="0"/>
-              </a:spcAft>
-              <a:buClrTx/>
-              <a:buFontTx/>
-              <a:buChar char="•"/>
-            </a:pPr>
-            <a:r>
-              <a:rPr lang="en-US" altLang="en-US" sz="1800" b="1" dirty="0">
-                <a:solidFill>
-                  <a:schemeClr val="tx1"/>
-                </a:solidFill>
-                <a:latin typeface="Times New Roman" panose="02020603050405020304" pitchFamily="18" charset="0"/>
-                <a:cs typeface="Times New Roman" panose="02020603050405020304" pitchFamily="18" charset="0"/>
-              </a:rPr>
-              <a:t>Frontend:</a:t>
-            </a:r>
-            <a:r>
-              <a:rPr lang="en-US" altLang="en-US" sz="1800" dirty="0">
-                <a:solidFill>
-                  <a:schemeClr val="tx1"/>
-                </a:solidFill>
-                <a:latin typeface="Times New Roman" panose="02020603050405020304" pitchFamily="18" charset="0"/>
-                <a:cs typeface="Times New Roman" panose="02020603050405020304" pitchFamily="18" charset="0"/>
-              </a:rPr>
-              <a:t> HTML5, CSS3.</a:t>
-            </a:r>
-          </a:p>
-          <a:p>
-            <a:pPr eaLnBrk="0" fontAlgn="base" hangingPunct="0">
-              <a:spcBef>
-                <a:spcPct val="0"/>
-              </a:spcBef>
-              <a:spcAft>
-                <a:spcPct val="0"/>
-              </a:spcAft>
-              <a:buClrTx/>
-              <a:buFontTx/>
-              <a:buChar char="•"/>
-            </a:pPr>
-            <a:r>
-              <a:rPr lang="en-US" altLang="en-US" sz="1800" b="1" dirty="0">
-                <a:solidFill>
-                  <a:schemeClr val="tx1"/>
-                </a:solidFill>
-                <a:latin typeface="Times New Roman" panose="02020603050405020304" pitchFamily="18" charset="0"/>
-                <a:cs typeface="Times New Roman" panose="02020603050405020304" pitchFamily="18" charset="0"/>
-              </a:rPr>
-              <a:t>The Algorithm:</a:t>
-            </a:r>
-            <a:endParaRPr lang="en-US" altLang="en-US" sz="1800" dirty="0">
-              <a:solidFill>
-                <a:schemeClr val="tx1"/>
-              </a:solidFill>
-              <a:latin typeface="Times New Roman" panose="02020603050405020304" pitchFamily="18" charset="0"/>
-              <a:cs typeface="Times New Roman" panose="02020603050405020304" pitchFamily="18" charset="0"/>
-            </a:endParaRPr>
-          </a:p>
-          <a:p>
-            <a:pPr eaLnBrk="0" fontAlgn="base" hangingPunct="0">
-              <a:spcBef>
-                <a:spcPct val="0"/>
-              </a:spcBef>
-              <a:spcAft>
-                <a:spcPct val="0"/>
-              </a:spcAft>
-              <a:buClrTx/>
-              <a:buFontTx/>
-              <a:buChar char="•"/>
-            </a:pPr>
-            <a:r>
-              <a:rPr lang="en-US" altLang="en-US" sz="2000" dirty="0">
-                <a:solidFill>
-                  <a:schemeClr val="tx1"/>
-                </a:solidFill>
-                <a:latin typeface="Times New Roman" panose="02020603050405020304" pitchFamily="18" charset="0"/>
-                <a:cs typeface="Times New Roman" panose="02020603050405020304" pitchFamily="18" charset="0"/>
-              </a:rPr>
-              <a:t>Formula: </a:t>
-            </a:r>
-          </a:p>
-          <a:p>
-            <a:pPr eaLnBrk="0" fontAlgn="base" hangingPunct="0">
-              <a:spcBef>
-                <a:spcPct val="0"/>
-              </a:spcBef>
-              <a:spcAft>
-                <a:spcPct val="0"/>
-              </a:spcAft>
-              <a:buClrTx/>
-              <a:buFontTx/>
-              <a:buChar char="•"/>
-            </a:pPr>
-            <a:endParaRPr lang="en-US" altLang="en-US" sz="2000" dirty="0">
-              <a:solidFill>
-                <a:schemeClr val="tx1"/>
-              </a:solidFill>
-              <a:latin typeface="Times New Roman" panose="02020603050405020304" pitchFamily="18" charset="0"/>
-              <a:cs typeface="Times New Roman" panose="02020603050405020304" pitchFamily="18" charset="0"/>
-            </a:endParaRPr>
-          </a:p>
-          <a:p>
-            <a:pPr eaLnBrk="0" fontAlgn="base" hangingPunct="0">
-              <a:spcBef>
-                <a:spcPct val="0"/>
-              </a:spcBef>
-              <a:spcAft>
-                <a:spcPct val="0"/>
-              </a:spcAft>
-              <a:buClrTx/>
-              <a:buFontTx/>
-              <a:buChar char="•"/>
-            </a:pPr>
-            <a:r>
-              <a:rPr lang="en-US" altLang="en-US" sz="2000" dirty="0">
-                <a:solidFill>
-                  <a:schemeClr val="tx1"/>
-                </a:solidFill>
-                <a:latin typeface="Times New Roman" panose="02020603050405020304" pitchFamily="18" charset="0"/>
-                <a:cs typeface="Times New Roman" panose="02020603050405020304" pitchFamily="18" charset="0"/>
-              </a:rPr>
-              <a:t>Burnout Score = ((Study / Sleep) * Stress) * 10$</a:t>
-            </a:r>
-          </a:p>
-          <a:p>
-            <a:pPr eaLnBrk="0" fontAlgn="base" hangingPunct="0">
-              <a:spcBef>
-                <a:spcPct val="0"/>
-              </a:spcBef>
-              <a:spcAft>
-                <a:spcPct val="0"/>
-              </a:spcAft>
-              <a:buClrTx/>
-              <a:buFontTx/>
-              <a:buChar char="•"/>
-            </a:pPr>
-            <a:r>
-              <a:rPr lang="en-US" altLang="en-US" sz="1800" dirty="0">
-                <a:solidFill>
-                  <a:schemeClr val="tx1"/>
-                </a:solidFill>
-                <a:latin typeface="Times New Roman" panose="02020603050405020304" pitchFamily="18" charset="0"/>
-                <a:cs typeface="Times New Roman" panose="02020603050405020304" pitchFamily="18" charset="0"/>
-              </a:rPr>
-              <a:t>Sentiment: Compound Polarity Score (-1 to +1).</a:t>
-            </a:r>
-          </a:p>
-          <a:p>
-            <a:pPr eaLnBrk="0" fontAlgn="base" hangingPunct="0">
-              <a:spcBef>
-                <a:spcPct val="0"/>
-              </a:spcBef>
-              <a:spcAft>
-                <a:spcPct val="0"/>
-              </a:spcAft>
-              <a:buClrTx/>
-              <a:buFontTx/>
-              <a:buNone/>
-            </a:pPr>
-            <a:endParaRPr lang="en-US" altLang="en-US" sz="1800" dirty="0">
-              <a:solidFill>
-                <a:schemeClr val="tx1"/>
-              </a:solidFill>
-              <a:latin typeface="Times New Roman" panose="02020603050405020304" pitchFamily="18" charset="0"/>
-              <a:cs typeface="Times New Roman" panose="02020603050405020304" pitchFamily="18" charset="0"/>
-            </a:endParaRPr>
-          </a:p>
-        </p:txBody>
-      </p:sp>
-      <p:pic>
-        <p:nvPicPr>
-          <p:cNvPr id="2" name="Picture 1">
-            <a:extLst>
-              <a:ext uri="{FF2B5EF4-FFF2-40B4-BE49-F238E27FC236}">
-                <a16:creationId xmlns:a16="http://schemas.microsoft.com/office/drawing/2014/main" id="{CE2A0253-6351-4460-B17F-66890980FA7A}"/>
+                <a16:creationId xmlns:a16="http://schemas.microsoft.com/office/drawing/2014/main" id="{60B90F7C-80DB-13A7-D8EF-8C0091144EC3}"/>
               </a:ext>
             </a:extLst>
           </p:cNvPr>
@@ -12948,14 +12830,15 @@
         </p:nvPicPr>
         <p:blipFill>
           <a:blip r:embed="rId3"/>
+          <a:srcRect t="1" b="69873"/>
           <a:stretch>
             <a:fillRect/>
           </a:stretch>
         </p:blipFill>
         <p:spPr>
           <a:xfrm>
-            <a:off x="1571318" y="2971801"/>
-            <a:ext cx="4622245" cy="647700"/>
+            <a:off x="844294" y="695450"/>
+            <a:ext cx="7937414" cy="4238431"/>
           </a:xfrm>
           <a:prstGeom prst="rect">
             <a:avLst/>
@@ -12975,7 +12858,13 @@
   <p:cSld>
     <p:spTree>
       <p:nvGrpSpPr>
-        <p:cNvPr id="1" name="Shape 239"/>
+        <p:cNvPr id="1" name="Shape 202">
+          <a:extLst>
+            <a:ext uri="{FF2B5EF4-FFF2-40B4-BE49-F238E27FC236}">
+              <a16:creationId xmlns:a16="http://schemas.microsoft.com/office/drawing/2014/main" id="{050A209B-A08E-4A35-E8F5-26CB42D1A1ED}"/>
+            </a:ext>
+          </a:extLst>
+        </p:cNvPr>
         <p:cNvGrpSpPr/>
         <p:nvPr/>
       </p:nvGrpSpPr>
@@ -12989,7 +12878,13 @@
       </p:grpSpPr>
       <p:sp>
         <p:nvSpPr>
-          <p:cNvPr id="240" name="Google Shape;240;p34"/>
+          <p:cNvPr id="203" name="Google Shape;203;p31">
+            <a:extLst>
+              <a:ext uri="{FF2B5EF4-FFF2-40B4-BE49-F238E27FC236}">
+                <a16:creationId xmlns:a16="http://schemas.microsoft.com/office/drawing/2014/main" id="{48254229-251E-85F5-C00E-1E0DEE066183}"/>
+              </a:ext>
+            </a:extLst>
+          </p:cNvPr>
           <p:cNvSpPr/>
           <p:nvPr/>
         </p:nvSpPr>
@@ -13037,7 +12932,13 @@
       </p:sp>
       <p:sp>
         <p:nvSpPr>
-          <p:cNvPr id="241" name="Google Shape;241;p34"/>
+          <p:cNvPr id="204" name="Google Shape;204;p31">
+            <a:extLst>
+              <a:ext uri="{FF2B5EF4-FFF2-40B4-BE49-F238E27FC236}">
+                <a16:creationId xmlns:a16="http://schemas.microsoft.com/office/drawing/2014/main" id="{4EB1A23A-E2D1-DAF3-71B8-C70817033242}"/>
+              </a:ext>
+            </a:extLst>
+          </p:cNvPr>
           <p:cNvSpPr/>
           <p:nvPr/>
         </p:nvSpPr>
@@ -13085,7 +12986,13 @@
       </p:sp>
       <p:sp>
         <p:nvSpPr>
-          <p:cNvPr id="242" name="Google Shape;242;p34"/>
+          <p:cNvPr id="205" name="Google Shape;205;p31">
+            <a:extLst>
+              <a:ext uri="{FF2B5EF4-FFF2-40B4-BE49-F238E27FC236}">
+                <a16:creationId xmlns:a16="http://schemas.microsoft.com/office/drawing/2014/main" id="{7238386E-5061-88BA-6545-9B3AF1B6698D}"/>
+              </a:ext>
+            </a:extLst>
+          </p:cNvPr>
           <p:cNvSpPr/>
           <p:nvPr/>
         </p:nvSpPr>
@@ -13133,7 +13040,13 @@
       </p:sp>
       <p:sp>
         <p:nvSpPr>
-          <p:cNvPr id="243" name="Google Shape;243;p34"/>
+          <p:cNvPr id="206" name="Google Shape;206;p31">
+            <a:extLst>
+              <a:ext uri="{FF2B5EF4-FFF2-40B4-BE49-F238E27FC236}">
+                <a16:creationId xmlns:a16="http://schemas.microsoft.com/office/drawing/2014/main" id="{754DE9C1-4448-3449-8C8C-37C4A6FDF6DC}"/>
+              </a:ext>
+            </a:extLst>
+          </p:cNvPr>
           <p:cNvSpPr/>
           <p:nvPr/>
         </p:nvSpPr>
@@ -13181,7 +13094,13 @@
       </p:sp>
       <p:sp>
         <p:nvSpPr>
-          <p:cNvPr id="244" name="Google Shape;244;p34"/>
+          <p:cNvPr id="207" name="Google Shape;207;p31">
+            <a:extLst>
+              <a:ext uri="{FF2B5EF4-FFF2-40B4-BE49-F238E27FC236}">
+                <a16:creationId xmlns:a16="http://schemas.microsoft.com/office/drawing/2014/main" id="{1C935955-8905-EBCE-B9CE-C42D45DF2747}"/>
+              </a:ext>
+            </a:extLst>
+          </p:cNvPr>
           <p:cNvSpPr/>
           <p:nvPr/>
         </p:nvSpPr>
@@ -13229,7 +13148,13 @@
       </p:sp>
       <p:sp>
         <p:nvSpPr>
-          <p:cNvPr id="245" name="Google Shape;245;p34"/>
+          <p:cNvPr id="208" name="Google Shape;208;p31">
+            <a:extLst>
+              <a:ext uri="{FF2B5EF4-FFF2-40B4-BE49-F238E27FC236}">
+                <a16:creationId xmlns:a16="http://schemas.microsoft.com/office/drawing/2014/main" id="{485144A8-683A-BD4C-471C-DBB1661C47A4}"/>
+              </a:ext>
+            </a:extLst>
+          </p:cNvPr>
           <p:cNvSpPr txBox="1"/>
           <p:nvPr/>
         </p:nvSpPr>
@@ -13271,7 +13196,7 @@
                 <a:cs typeface="Times New Roman"/>
                 <a:sym typeface="Times New Roman"/>
               </a:rPr>
-              <a:t>Expected Results &amp; Impact</a:t>
+              <a:t>Project Flow diagram/Architecture</a:t>
             </a:r>
             <a:endParaRPr sz="3000" b="1">
               <a:solidFill>
@@ -13287,7 +13212,13 @@
       </p:sp>
       <p:sp>
         <p:nvSpPr>
-          <p:cNvPr id="246" name="Google Shape;246;p34"/>
+          <p:cNvPr id="209" name="Google Shape;209;p31">
+            <a:extLst>
+              <a:ext uri="{FF2B5EF4-FFF2-40B4-BE49-F238E27FC236}">
+                <a16:creationId xmlns:a16="http://schemas.microsoft.com/office/drawing/2014/main" id="{70CBA60D-51E1-1D5D-D492-7D2896BBED77}"/>
+              </a:ext>
+            </a:extLst>
+          </p:cNvPr>
           <p:cNvSpPr txBox="1"/>
           <p:nvPr/>
         </p:nvSpPr>
@@ -13325,8 +13256,129 @@
                   <a:schemeClr val="lt1"/>
                 </a:solidFill>
               </a:rPr>
-              <a:t>9</a:t>
+              <a:t>6</a:t>
             </a:r>
+            <a:endParaRPr sz="1400">
+              <a:solidFill>
+                <a:schemeClr val="lt1"/>
+              </a:solidFill>
+              <a:latin typeface="Arial"/>
+              <a:ea typeface="Arial"/>
+              <a:cs typeface="Arial"/>
+              <a:sym typeface="Arial"/>
+            </a:endParaRPr>
+          </a:p>
+        </p:txBody>
+      </p:sp>
+      <p:pic>
+        <p:nvPicPr>
+          <p:cNvPr id="4" name="Picture 3">
+            <a:extLst>
+              <a:ext uri="{FF2B5EF4-FFF2-40B4-BE49-F238E27FC236}">
+                <a16:creationId xmlns:a16="http://schemas.microsoft.com/office/drawing/2014/main" id="{B12E7696-2EDD-2328-DE27-84DA3C4FC08C}"/>
+              </a:ext>
+            </a:extLst>
+          </p:cNvPr>
+          <p:cNvPicPr>
+            <a:picLocks noChangeAspect="1"/>
+          </p:cNvPicPr>
+          <p:nvPr/>
+        </p:nvPicPr>
+        <p:blipFill>
+          <a:blip r:embed="rId3"/>
+          <a:srcRect t="29630" b="31924"/>
+          <a:stretch>
+            <a:fillRect/>
+          </a:stretch>
+        </p:blipFill>
+        <p:spPr>
+          <a:xfrm>
+            <a:off x="1519496" y="843281"/>
+            <a:ext cx="6105007" cy="4138219"/>
+          </a:xfrm>
+          <a:prstGeom prst="rect">
+            <a:avLst/>
+          </a:prstGeom>
+        </p:spPr>
+      </p:pic>
+    </p:spTree>
+    <p:extLst>
+      <p:ext uri="{BB962C8B-B14F-4D97-AF65-F5344CB8AC3E}">
+        <p14:creationId xmlns:p14="http://schemas.microsoft.com/office/powerpoint/2010/main" val="721730951"/>
+      </p:ext>
+    </p:extLst>
+  </p:cSld>
+  <p:clrMapOvr>
+    <a:masterClrMapping/>
+  </p:clrMapOvr>
+</p:sld>
+</file>
+
+<file path=ppt/slides/slide12.xml><?xml version="1.0" encoding="utf-8"?>
+<p:sld xmlns:a="http://schemas.openxmlformats.org/drawingml/2006/main" xmlns:r="http://schemas.openxmlformats.org/officeDocument/2006/relationships" xmlns:p="http://schemas.openxmlformats.org/presentationml/2006/main">
+  <p:cSld>
+    <p:spTree>
+      <p:nvGrpSpPr>
+        <p:cNvPr id="1" name="Shape 202">
+          <a:extLst>
+            <a:ext uri="{FF2B5EF4-FFF2-40B4-BE49-F238E27FC236}">
+              <a16:creationId xmlns:a16="http://schemas.microsoft.com/office/drawing/2014/main" id="{B873BA96-AB32-D779-97D0-8D50F86A0FCB}"/>
+            </a:ext>
+          </a:extLst>
+        </p:cNvPr>
+        <p:cNvGrpSpPr/>
+        <p:nvPr/>
+      </p:nvGrpSpPr>
+      <p:grpSpPr>
+        <a:xfrm>
+          <a:off x="0" y="0"/>
+          <a:ext cx="0" cy="0"/>
+          <a:chOff x="0" y="0"/>
+          <a:chExt cx="0" cy="0"/>
+        </a:xfrm>
+      </p:grpSpPr>
+      <p:sp>
+        <p:nvSpPr>
+          <p:cNvPr id="203" name="Google Shape;203;p31">
+            <a:extLst>
+              <a:ext uri="{FF2B5EF4-FFF2-40B4-BE49-F238E27FC236}">
+                <a16:creationId xmlns:a16="http://schemas.microsoft.com/office/drawing/2014/main" id="{79CB4F78-FCBE-FAB9-41A3-AC1F061CD544}"/>
+              </a:ext>
+            </a:extLst>
+          </p:cNvPr>
+          <p:cNvSpPr/>
+          <p:nvPr/>
+        </p:nvSpPr>
+        <p:spPr>
+          <a:xfrm>
+            <a:off x="-275" y="162000"/>
+            <a:ext cx="9153000" cy="588000"/>
+          </a:xfrm>
+          <a:prstGeom prst="rect">
+            <a:avLst/>
+          </a:prstGeom>
+          <a:solidFill>
+            <a:srgbClr val="D9E5F8"/>
+          </a:solidFill>
+          <a:ln>
+            <a:noFill/>
+          </a:ln>
+        </p:spPr>
+        <p:txBody>
+          <a:bodyPr spcFirstLastPara="1" wrap="square" lIns="68575" tIns="34275" rIns="68575" bIns="34275" anchor="ctr" anchorCtr="0">
+            <a:noAutofit/>
+          </a:bodyPr>
+          <a:lstStyle/>
+          <a:p>
+            <a:pPr marL="0" marR="0" lvl="0" indent="0" algn="ctr" rtl="0">
+              <a:spcBef>
+                <a:spcPts val="0"/>
+              </a:spcBef>
+              <a:spcAft>
+                <a:spcPts val="0"/>
+              </a:spcAft>
+              <a:buNone/>
+            </a:pPr>
             <a:endParaRPr sz="1400">
               <a:solidFill>
                 <a:schemeClr val="lt1"/>
@@ -13341,22 +13393,236 @@
       </p:sp>
       <p:sp>
         <p:nvSpPr>
-          <p:cNvPr id="5" name="Rectangle 1">
+          <p:cNvPr id="204" name="Google Shape;204;p31">
             <a:extLst>
               <a:ext uri="{FF2B5EF4-FFF2-40B4-BE49-F238E27FC236}">
-                <a16:creationId xmlns:a16="http://schemas.microsoft.com/office/drawing/2014/main" id="{02831BFC-C5EF-AFC2-2165-67C1E8B73D0D}"/>
+                <a16:creationId xmlns:a16="http://schemas.microsoft.com/office/drawing/2014/main" id="{CEA370E7-4244-2406-6D24-942CF18BEA30}"/>
               </a:ext>
             </a:extLst>
           </p:cNvPr>
-          <p:cNvSpPr txBox="1">
-            <a:spLocks noChangeArrowheads="1"/>
-          </p:cNvSpPr>
+          <p:cNvSpPr/>
           <p:nvPr/>
         </p:nvSpPr>
-        <p:spPr bwMode="auto">
+        <p:spPr>
           <a:xfrm>
-            <a:off x="236515" y="1198858"/>
-            <a:ext cx="8656886" cy="2862322"/>
+            <a:off x="4160520" y="0"/>
+            <a:ext cx="4995000" cy="162000"/>
+          </a:xfrm>
+          <a:prstGeom prst="rect">
+            <a:avLst/>
+          </a:prstGeom>
+          <a:solidFill>
+            <a:srgbClr val="341BF1"/>
+          </a:solidFill>
+          <a:ln>
+            <a:noFill/>
+          </a:ln>
+        </p:spPr>
+        <p:txBody>
+          <a:bodyPr spcFirstLastPara="1" wrap="square" lIns="68575" tIns="34275" rIns="68575" bIns="34275" anchor="ctr" anchorCtr="0">
+            <a:noAutofit/>
+          </a:bodyPr>
+          <a:lstStyle/>
+          <a:p>
+            <a:pPr marL="0" marR="0" lvl="0" indent="0" algn="ctr" rtl="0">
+              <a:spcBef>
+                <a:spcPts val="0"/>
+              </a:spcBef>
+              <a:spcAft>
+                <a:spcPts val="0"/>
+              </a:spcAft>
+              <a:buNone/>
+            </a:pPr>
+            <a:endParaRPr sz="1400">
+              <a:solidFill>
+                <a:schemeClr val="lt1"/>
+              </a:solidFill>
+              <a:latin typeface="Arial"/>
+              <a:ea typeface="Arial"/>
+              <a:cs typeface="Arial"/>
+              <a:sym typeface="Arial"/>
+            </a:endParaRPr>
+          </a:p>
+        </p:txBody>
+      </p:sp>
+      <p:sp>
+        <p:nvSpPr>
+          <p:cNvPr id="205" name="Google Shape;205;p31">
+            <a:extLst>
+              <a:ext uri="{FF2B5EF4-FFF2-40B4-BE49-F238E27FC236}">
+                <a16:creationId xmlns:a16="http://schemas.microsoft.com/office/drawing/2014/main" id="{ECA25725-E41D-54C6-CB84-52AB5EFD09E5}"/>
+              </a:ext>
+            </a:extLst>
+          </p:cNvPr>
+          <p:cNvSpPr/>
+          <p:nvPr/>
+        </p:nvSpPr>
+        <p:spPr>
+          <a:xfrm>
+            <a:off x="2858" y="0"/>
+            <a:ext cx="4158000" cy="162000"/>
+          </a:xfrm>
+          <a:prstGeom prst="rect">
+            <a:avLst/>
+          </a:prstGeom>
+          <a:solidFill>
+            <a:srgbClr val="FF0000"/>
+          </a:solidFill>
+          <a:ln>
+            <a:noFill/>
+          </a:ln>
+        </p:spPr>
+        <p:txBody>
+          <a:bodyPr spcFirstLastPara="1" wrap="square" lIns="68575" tIns="34275" rIns="68575" bIns="34275" anchor="ctr" anchorCtr="0">
+            <a:noAutofit/>
+          </a:bodyPr>
+          <a:lstStyle/>
+          <a:p>
+            <a:pPr marL="0" marR="0" lvl="0" indent="0" algn="ctr" rtl="0">
+              <a:spcBef>
+                <a:spcPts val="0"/>
+              </a:spcBef>
+              <a:spcAft>
+                <a:spcPts val="0"/>
+              </a:spcAft>
+              <a:buNone/>
+            </a:pPr>
+            <a:endParaRPr sz="1400">
+              <a:solidFill>
+                <a:schemeClr val="lt1"/>
+              </a:solidFill>
+              <a:latin typeface="Arial"/>
+              <a:ea typeface="Arial"/>
+              <a:cs typeface="Arial"/>
+              <a:sym typeface="Arial"/>
+            </a:endParaRPr>
+          </a:p>
+        </p:txBody>
+      </p:sp>
+      <p:sp>
+        <p:nvSpPr>
+          <p:cNvPr id="206" name="Google Shape;206;p31">
+            <a:extLst>
+              <a:ext uri="{FF2B5EF4-FFF2-40B4-BE49-F238E27FC236}">
+                <a16:creationId xmlns:a16="http://schemas.microsoft.com/office/drawing/2014/main" id="{BC188B31-BB77-E864-2B21-CCC8BDB934DF}"/>
+              </a:ext>
+            </a:extLst>
+          </p:cNvPr>
+          <p:cNvSpPr/>
+          <p:nvPr/>
+        </p:nvSpPr>
+        <p:spPr>
+          <a:xfrm>
+            <a:off x="4927108" y="4972928"/>
+            <a:ext cx="4239000" cy="162000"/>
+          </a:xfrm>
+          <a:prstGeom prst="rect">
+            <a:avLst/>
+          </a:prstGeom>
+          <a:solidFill>
+            <a:srgbClr val="341BF1"/>
+          </a:solidFill>
+          <a:ln>
+            <a:noFill/>
+          </a:ln>
+        </p:spPr>
+        <p:txBody>
+          <a:bodyPr spcFirstLastPara="1" wrap="square" lIns="68575" tIns="34275" rIns="68575" bIns="34275" anchor="ctr" anchorCtr="0">
+            <a:noAutofit/>
+          </a:bodyPr>
+          <a:lstStyle/>
+          <a:p>
+            <a:pPr marL="0" marR="0" lvl="0" indent="0" algn="ctr" rtl="0">
+              <a:spcBef>
+                <a:spcPts val="0"/>
+              </a:spcBef>
+              <a:spcAft>
+                <a:spcPts val="0"/>
+              </a:spcAft>
+              <a:buNone/>
+            </a:pPr>
+            <a:endParaRPr sz="1400">
+              <a:solidFill>
+                <a:schemeClr val="lt1"/>
+              </a:solidFill>
+              <a:latin typeface="Arial"/>
+              <a:ea typeface="Arial"/>
+              <a:cs typeface="Arial"/>
+              <a:sym typeface="Arial"/>
+            </a:endParaRPr>
+          </a:p>
+        </p:txBody>
+      </p:sp>
+      <p:sp>
+        <p:nvSpPr>
+          <p:cNvPr id="207" name="Google Shape;207;p31">
+            <a:extLst>
+              <a:ext uri="{FF2B5EF4-FFF2-40B4-BE49-F238E27FC236}">
+                <a16:creationId xmlns:a16="http://schemas.microsoft.com/office/drawing/2014/main" id="{847B2A74-3A74-9B5B-8E01-A92E980769E8}"/>
+              </a:ext>
+            </a:extLst>
+          </p:cNvPr>
+          <p:cNvSpPr/>
+          <p:nvPr/>
+        </p:nvSpPr>
+        <p:spPr>
+          <a:xfrm>
+            <a:off x="-8853" y="4972928"/>
+            <a:ext cx="4941000" cy="162000"/>
+          </a:xfrm>
+          <a:prstGeom prst="rect">
+            <a:avLst/>
+          </a:prstGeom>
+          <a:solidFill>
+            <a:srgbClr val="FF0000"/>
+          </a:solidFill>
+          <a:ln>
+            <a:noFill/>
+          </a:ln>
+        </p:spPr>
+        <p:txBody>
+          <a:bodyPr spcFirstLastPara="1" wrap="square" lIns="68575" tIns="34275" rIns="68575" bIns="34275" anchor="ctr" anchorCtr="0">
+            <a:noAutofit/>
+          </a:bodyPr>
+          <a:lstStyle/>
+          <a:p>
+            <a:pPr marL="0" marR="0" lvl="0" indent="0" algn="ctr" rtl="0">
+              <a:spcBef>
+                <a:spcPts val="0"/>
+              </a:spcBef>
+              <a:spcAft>
+                <a:spcPts val="0"/>
+              </a:spcAft>
+              <a:buNone/>
+            </a:pPr>
+            <a:endParaRPr sz="1400">
+              <a:solidFill>
+                <a:schemeClr val="lt1"/>
+              </a:solidFill>
+              <a:latin typeface="Arial"/>
+              <a:ea typeface="Arial"/>
+              <a:cs typeface="Arial"/>
+              <a:sym typeface="Arial"/>
+            </a:endParaRPr>
+          </a:p>
+        </p:txBody>
+      </p:sp>
+      <p:sp>
+        <p:nvSpPr>
+          <p:cNvPr id="208" name="Google Shape;208;p31">
+            <a:extLst>
+              <a:ext uri="{FF2B5EF4-FFF2-40B4-BE49-F238E27FC236}">
+                <a16:creationId xmlns:a16="http://schemas.microsoft.com/office/drawing/2014/main" id="{88718863-D4BC-D33E-43A0-0714B2BE047B}"/>
+              </a:ext>
+            </a:extLst>
+          </p:cNvPr>
+          <p:cNvSpPr txBox="1"/>
+          <p:nvPr/>
+        </p:nvSpPr>
+        <p:spPr>
+          <a:xfrm>
+            <a:off x="-8850" y="164450"/>
+            <a:ext cx="9144000" cy="531000"/>
           </a:xfrm>
           <a:prstGeom prst="rect">
             <a:avLst/>
@@ -13365,487 +13631,143 @@
           <a:ln>
             <a:noFill/>
           </a:ln>
-          <a:effectLst/>
-          <a:extLst>
-            <a:ext uri="{909E8E84-426E-40DD-AFC4-6F175D3DCCD1}">
-              <a14:hiddenFill xmlns:a14="http://schemas.microsoft.com/office/drawing/2010/main">
-                <a:solidFill>
-                  <a:schemeClr val="accent1"/>
-                </a:solidFill>
-              </a14:hiddenFill>
-            </a:ext>
-            <a:ext uri="{91240B29-F687-4F45-9708-019B960494DF}">
-              <a14:hiddenLine xmlns:a14="http://schemas.microsoft.com/office/drawing/2010/main" w="9525">
-                <a:solidFill>
-                  <a:schemeClr val="tx1"/>
-                </a:solidFill>
-                <a:miter lim="800000"/>
-                <a:headEnd/>
-                <a:tailEnd/>
-              </a14:hiddenLine>
-            </a:ext>
-            <a:ext uri="{AF507438-7753-43E0-B8FC-AC1667EBCBE1}">
-              <a14:hiddenEffects xmlns:a14="http://schemas.microsoft.com/office/drawing/2010/main">
-                <a:effectLst>
-                  <a:outerShdw dist="35921" dir="2700000" algn="ctr" rotWithShape="0">
-                    <a:schemeClr val="bg2"/>
-                  </a:outerShdw>
-                </a:effectLst>
-              </a14:hiddenEffects>
-            </a:ext>
-          </a:extLst>
         </p:spPr>
         <p:txBody>
-          <a:bodyPr vert="horz" wrap="square" lIns="91440" tIns="45720" rIns="91440" bIns="45720" numCol="1" anchor="ctr" anchorCtr="0" compatLnSpc="1">
-            <a:prstTxWarp prst="textNoShape">
-              <a:avLst/>
-            </a:prstTxWarp>
+          <a:bodyPr spcFirstLastPara="1" wrap="square" lIns="68575" tIns="34275" rIns="68575" bIns="34275" anchor="t" anchorCtr="0">
             <a:spAutoFit/>
           </a:bodyPr>
-          <a:lstStyle>
-            <a:defPPr marR="0" lvl="0" algn="l" rtl="0">
-              <a:lnSpc>
-                <a:spcPct val="100000"/>
-              </a:lnSpc>
-              <a:spcBef>
-                <a:spcPts val="0"/>
-              </a:spcBef>
-              <a:spcAft>
-                <a:spcPts val="0"/>
-              </a:spcAft>
-            </a:defPPr>
-            <a:lvl1pPr marR="0" lvl="0" algn="l" rtl="0">
-              <a:lnSpc>
-                <a:spcPct val="100000"/>
-              </a:lnSpc>
-              <a:spcBef>
-                <a:spcPts val="0"/>
-              </a:spcBef>
-              <a:spcAft>
-                <a:spcPts val="0"/>
-              </a:spcAft>
-              <a:buClr>
-                <a:srgbClr val="000000"/>
-              </a:buClr>
-              <a:buFont typeface="Arial"/>
-              <a:defRPr sz="1400" b="0" i="0" u="none" strike="noStrike" cap="none">
-                <a:solidFill>
-                  <a:srgbClr val="000000"/>
-                </a:solidFill>
-                <a:latin typeface="Arial"/>
-                <a:ea typeface="Arial"/>
-                <a:cs typeface="Arial"/>
-                <a:sym typeface="Arial"/>
-              </a:defRPr>
-            </a:lvl1pPr>
-            <a:lvl2pPr marR="0" lvl="1" algn="l" rtl="0">
-              <a:lnSpc>
-                <a:spcPct val="100000"/>
-              </a:lnSpc>
-              <a:spcBef>
-                <a:spcPts val="0"/>
-              </a:spcBef>
-              <a:spcAft>
-                <a:spcPts val="0"/>
-              </a:spcAft>
-              <a:buClr>
-                <a:srgbClr val="000000"/>
-              </a:buClr>
-              <a:buFont typeface="Arial"/>
-              <a:defRPr sz="1400" b="0" i="0" u="none" strike="noStrike" cap="none">
-                <a:solidFill>
-                  <a:srgbClr val="000000"/>
-                </a:solidFill>
-                <a:latin typeface="Arial"/>
-                <a:ea typeface="Arial"/>
-                <a:cs typeface="Arial"/>
-                <a:sym typeface="Arial"/>
-              </a:defRPr>
-            </a:lvl2pPr>
-            <a:lvl3pPr marR="0" lvl="2" algn="l" rtl="0">
-              <a:lnSpc>
-                <a:spcPct val="100000"/>
-              </a:lnSpc>
-              <a:spcBef>
-                <a:spcPts val="0"/>
-              </a:spcBef>
-              <a:spcAft>
-                <a:spcPts val="0"/>
-              </a:spcAft>
-              <a:buClr>
-                <a:srgbClr val="000000"/>
-              </a:buClr>
-              <a:buFont typeface="Arial"/>
-              <a:defRPr sz="1400" b="0" i="0" u="none" strike="noStrike" cap="none">
-                <a:solidFill>
-                  <a:srgbClr val="000000"/>
-                </a:solidFill>
-                <a:latin typeface="Arial"/>
-                <a:ea typeface="Arial"/>
-                <a:cs typeface="Arial"/>
-                <a:sym typeface="Arial"/>
-              </a:defRPr>
-            </a:lvl3pPr>
-            <a:lvl4pPr marR="0" lvl="3" algn="l" rtl="0">
-              <a:lnSpc>
-                <a:spcPct val="100000"/>
-              </a:lnSpc>
-              <a:spcBef>
-                <a:spcPts val="0"/>
-              </a:spcBef>
-              <a:spcAft>
-                <a:spcPts val="0"/>
-              </a:spcAft>
-              <a:buClr>
-                <a:srgbClr val="000000"/>
-              </a:buClr>
-              <a:buFont typeface="Arial"/>
-              <a:defRPr sz="1400" b="0" i="0" u="none" strike="noStrike" cap="none">
-                <a:solidFill>
-                  <a:srgbClr val="000000"/>
-                </a:solidFill>
-                <a:latin typeface="Arial"/>
-                <a:ea typeface="Arial"/>
-                <a:cs typeface="Arial"/>
-                <a:sym typeface="Arial"/>
-              </a:defRPr>
-            </a:lvl4pPr>
-            <a:lvl5pPr marR="0" lvl="4" algn="l" rtl="0">
-              <a:lnSpc>
-                <a:spcPct val="100000"/>
-              </a:lnSpc>
-              <a:spcBef>
-                <a:spcPts val="0"/>
-              </a:spcBef>
-              <a:spcAft>
-                <a:spcPts val="0"/>
-              </a:spcAft>
-              <a:buClr>
-                <a:srgbClr val="000000"/>
-              </a:buClr>
-              <a:buFont typeface="Arial"/>
-              <a:defRPr sz="1400" b="0" i="0" u="none" strike="noStrike" cap="none">
-                <a:solidFill>
-                  <a:srgbClr val="000000"/>
-                </a:solidFill>
-                <a:latin typeface="Arial"/>
-                <a:ea typeface="Arial"/>
-                <a:cs typeface="Arial"/>
-                <a:sym typeface="Arial"/>
-              </a:defRPr>
-            </a:lvl5pPr>
-            <a:lvl6pPr marR="0" lvl="5" algn="l" rtl="0">
-              <a:lnSpc>
-                <a:spcPct val="100000"/>
-              </a:lnSpc>
-              <a:spcBef>
-                <a:spcPts val="0"/>
-              </a:spcBef>
-              <a:spcAft>
-                <a:spcPts val="0"/>
-              </a:spcAft>
-              <a:buClr>
-                <a:srgbClr val="000000"/>
-              </a:buClr>
-              <a:buFont typeface="Arial"/>
-              <a:defRPr sz="1400" b="0" i="0" u="none" strike="noStrike" cap="none">
-                <a:solidFill>
-                  <a:srgbClr val="000000"/>
-                </a:solidFill>
-                <a:latin typeface="Arial"/>
-                <a:ea typeface="Arial"/>
-                <a:cs typeface="Arial"/>
-                <a:sym typeface="Arial"/>
-              </a:defRPr>
-            </a:lvl6pPr>
-            <a:lvl7pPr marR="0" lvl="6" algn="l" rtl="0">
-              <a:lnSpc>
-                <a:spcPct val="100000"/>
-              </a:lnSpc>
-              <a:spcBef>
-                <a:spcPts val="0"/>
-              </a:spcBef>
-              <a:spcAft>
-                <a:spcPts val="0"/>
-              </a:spcAft>
-              <a:buClr>
-                <a:srgbClr val="000000"/>
-              </a:buClr>
-              <a:buFont typeface="Arial"/>
-              <a:defRPr sz="1400" b="0" i="0" u="none" strike="noStrike" cap="none">
-                <a:solidFill>
-                  <a:srgbClr val="000000"/>
-                </a:solidFill>
-                <a:latin typeface="Arial"/>
-                <a:ea typeface="Arial"/>
-                <a:cs typeface="Arial"/>
-                <a:sym typeface="Arial"/>
-              </a:defRPr>
-            </a:lvl7pPr>
-            <a:lvl8pPr marR="0" lvl="7" algn="l" rtl="0">
-              <a:lnSpc>
-                <a:spcPct val="100000"/>
-              </a:lnSpc>
-              <a:spcBef>
-                <a:spcPts val="0"/>
-              </a:spcBef>
-              <a:spcAft>
-                <a:spcPts val="0"/>
-              </a:spcAft>
-              <a:buClr>
-                <a:srgbClr val="000000"/>
-              </a:buClr>
-              <a:buFont typeface="Arial"/>
-              <a:defRPr sz="1400" b="0" i="0" u="none" strike="noStrike" cap="none">
-                <a:solidFill>
-                  <a:srgbClr val="000000"/>
-                </a:solidFill>
-                <a:latin typeface="Arial"/>
-                <a:ea typeface="Arial"/>
-                <a:cs typeface="Arial"/>
-                <a:sym typeface="Arial"/>
-              </a:defRPr>
-            </a:lvl8pPr>
-            <a:lvl9pPr marR="0" lvl="8" algn="l" rtl="0">
-              <a:lnSpc>
-                <a:spcPct val="100000"/>
-              </a:lnSpc>
-              <a:spcBef>
-                <a:spcPts val="0"/>
-              </a:spcBef>
-              <a:spcAft>
-                <a:spcPts val="0"/>
-              </a:spcAft>
-              <a:buClr>
-                <a:srgbClr val="000000"/>
-              </a:buClr>
-              <a:buFont typeface="Arial"/>
-              <a:defRPr sz="1400" b="0" i="0" u="none" strike="noStrike" cap="none">
-                <a:solidFill>
-                  <a:srgbClr val="000000"/>
-                </a:solidFill>
-                <a:latin typeface="Arial"/>
-                <a:ea typeface="Arial"/>
-                <a:cs typeface="Arial"/>
-                <a:sym typeface="Arial"/>
-              </a:defRPr>
-            </a:lvl9pPr>
-          </a:lstStyle>
+          <a:lstStyle/>
           <a:p>
-            <a:pPr eaLnBrk="0" fontAlgn="base" hangingPunct="0">
-              <a:spcBef>
-                <a:spcPct val="0"/>
-              </a:spcBef>
-              <a:spcAft>
-                <a:spcPct val="0"/>
-              </a:spcAft>
-              <a:buClrTx/>
-              <a:buFontTx/>
-              <a:buChar char="•"/>
+            <a:pPr marL="0" marR="0" lvl="0" indent="0" algn="l" rtl="0">
+              <a:spcBef>
+                <a:spcPts val="0"/>
+              </a:spcBef>
+              <a:spcAft>
+                <a:spcPts val="0"/>
+              </a:spcAft>
+              <a:buNone/>
             </a:pPr>
             <a:r>
-              <a:rPr lang="en-US" altLang="en-US" sz="1800" b="1" dirty="0">
-                <a:solidFill>
-                  <a:schemeClr val="tx1"/>
-                </a:solidFill>
-                <a:latin typeface="Arial" panose="020B0604020202020204" pitchFamily="34" charset="0"/>
+              <a:rPr lang="en" sz="3000" b="1">
+                <a:solidFill>
+                  <a:schemeClr val="dk1"/>
+                </a:solidFill>
+                <a:latin typeface="Times New Roman"/>
+                <a:ea typeface="Times New Roman"/>
+                <a:cs typeface="Times New Roman"/>
+                <a:sym typeface="Times New Roman"/>
               </a:rPr>
-              <a:t>Deliverables:</a:t>
+              <a:t>Project Flow diagram/Architecture</a:t>
             </a:r>
-            <a:endParaRPr lang="en-US" altLang="en-US" sz="1800" dirty="0">
+            <a:endParaRPr sz="3000" b="1">
               <a:solidFill>
-                <a:schemeClr val="tx1"/>
+                <a:schemeClr val="dk1"/>
               </a:solidFill>
-              <a:latin typeface="Arial" panose="020B0604020202020204" pitchFamily="34" charset="0"/>
-            </a:endParaRPr>
-          </a:p>
-          <a:p>
-            <a:pPr eaLnBrk="0" fontAlgn="base" hangingPunct="0">
-              <a:spcBef>
-                <a:spcPct val="0"/>
-              </a:spcBef>
-              <a:spcAft>
-                <a:spcPct val="0"/>
-              </a:spcAft>
-              <a:buClrTx/>
-              <a:buFontTx/>
-              <a:buChar char="•"/>
-            </a:pPr>
-            <a:r>
-              <a:rPr lang="en-US" altLang="en-US" sz="1800" dirty="0">
-                <a:solidFill>
-                  <a:schemeClr val="tx1"/>
-                </a:solidFill>
-                <a:latin typeface="Arial" panose="020B0604020202020204" pitchFamily="34" charset="0"/>
-              </a:rPr>
-              <a:t>A fully functional web tool for real-time mental health monitoring.</a:t>
-            </a:r>
-          </a:p>
-          <a:p>
-            <a:pPr eaLnBrk="0" fontAlgn="base" hangingPunct="0">
-              <a:spcBef>
-                <a:spcPct val="0"/>
-              </a:spcBef>
-              <a:spcAft>
-                <a:spcPct val="0"/>
-              </a:spcAft>
-              <a:buClrTx/>
-              <a:buFontTx/>
-              <a:buChar char="•"/>
-            </a:pPr>
-            <a:r>
-              <a:rPr lang="en-US" altLang="en-US" sz="1800" dirty="0">
-                <a:solidFill>
-                  <a:schemeClr val="tx1"/>
-                </a:solidFill>
-                <a:latin typeface="Arial" panose="020B0604020202020204" pitchFamily="34" charset="0"/>
-              </a:rPr>
-              <a:t>Visual risk profiling (Pie Charts &amp; Histograms).</a:t>
-            </a:r>
-          </a:p>
-          <a:p>
-            <a:pPr eaLnBrk="0" fontAlgn="base" hangingPunct="0">
-              <a:spcBef>
-                <a:spcPct val="0"/>
-              </a:spcBef>
-              <a:spcAft>
-                <a:spcPct val="0"/>
-              </a:spcAft>
-              <a:buClrTx/>
-              <a:buFontTx/>
-              <a:buChar char="•"/>
-            </a:pPr>
-            <a:r>
-              <a:rPr lang="en-US" altLang="en-US" sz="1800" b="1" dirty="0">
-                <a:solidFill>
-                  <a:schemeClr val="tx1"/>
-                </a:solidFill>
-                <a:latin typeface="Arial" panose="020B0604020202020204" pitchFamily="34" charset="0"/>
-              </a:rPr>
-              <a:t>Impact:</a:t>
-            </a:r>
-            <a:endParaRPr lang="en-US" altLang="en-US" sz="1800" dirty="0">
-              <a:solidFill>
-                <a:schemeClr val="tx1"/>
-              </a:solidFill>
-              <a:latin typeface="Arial" panose="020B0604020202020204" pitchFamily="34" charset="0"/>
-            </a:endParaRPr>
-          </a:p>
-          <a:p>
-            <a:pPr eaLnBrk="0" fontAlgn="base" hangingPunct="0">
-              <a:spcBef>
-                <a:spcPct val="0"/>
-              </a:spcBef>
-              <a:spcAft>
-                <a:spcPct val="0"/>
-              </a:spcAft>
-              <a:buClrTx/>
-              <a:buFontTx/>
-              <a:buChar char="•"/>
-            </a:pPr>
-            <a:r>
-              <a:rPr lang="en-US" altLang="en-US" sz="1800" b="1" dirty="0">
-                <a:solidFill>
-                  <a:schemeClr val="tx1"/>
-                </a:solidFill>
-                <a:latin typeface="Arial" panose="020B0604020202020204" pitchFamily="34" charset="0"/>
-              </a:rPr>
-              <a:t>Early Detection:</a:t>
-            </a:r>
-            <a:r>
-              <a:rPr lang="en-US" altLang="en-US" sz="1800" dirty="0">
-                <a:solidFill>
-                  <a:schemeClr val="tx1"/>
-                </a:solidFill>
-                <a:latin typeface="Arial" panose="020B0604020202020204" pitchFamily="34" charset="0"/>
-              </a:rPr>
-              <a:t> Shifts focus from "Lagging Indicators" (Grades) to "Leading Indicators" (Sleep/Sentiment).</a:t>
-            </a:r>
-          </a:p>
-          <a:p>
-            <a:pPr eaLnBrk="0" fontAlgn="base" hangingPunct="0">
-              <a:spcBef>
-                <a:spcPct val="0"/>
-              </a:spcBef>
-              <a:spcAft>
-                <a:spcPct val="0"/>
-              </a:spcAft>
-              <a:buClrTx/>
-              <a:buFontTx/>
-              <a:buChar char="•"/>
-            </a:pPr>
-            <a:r>
-              <a:rPr lang="en-US" altLang="en-US" sz="1800" b="1" dirty="0">
-                <a:solidFill>
-                  <a:schemeClr val="tx1"/>
-                </a:solidFill>
-                <a:latin typeface="Arial" panose="020B0604020202020204" pitchFamily="34" charset="0"/>
-              </a:rPr>
-              <a:t>Data Integrity:</a:t>
-            </a:r>
-            <a:r>
-              <a:rPr lang="en-US" altLang="en-US" sz="1800" dirty="0">
-                <a:solidFill>
-                  <a:schemeClr val="tx1"/>
-                </a:solidFill>
-                <a:latin typeface="Arial" panose="020B0604020202020204" pitchFamily="34" charset="0"/>
-              </a:rPr>
-              <a:t> Empowers educators to trust their data by removing outliers before analysis.</a:t>
-            </a:r>
-          </a:p>
-          <a:p>
-            <a:pPr eaLnBrk="0" fontAlgn="base" hangingPunct="0">
-              <a:spcBef>
-                <a:spcPct val="0"/>
-              </a:spcBef>
-              <a:spcAft>
-                <a:spcPct val="0"/>
-              </a:spcAft>
-              <a:buClrTx/>
-              <a:buFontTx/>
-              <a:buChar char="•"/>
-            </a:pPr>
-            <a:r>
-              <a:rPr lang="en-US" altLang="en-US" sz="1800" b="1" dirty="0">
-                <a:solidFill>
-                  <a:schemeClr val="tx1"/>
-                </a:solidFill>
-                <a:latin typeface="Arial" panose="020B0604020202020204" pitchFamily="34" charset="0"/>
-              </a:rPr>
-              <a:t>Holistic View:</a:t>
-            </a:r>
-            <a:r>
-              <a:rPr lang="en-US" altLang="en-US" sz="1800" dirty="0">
-                <a:solidFill>
-                  <a:schemeClr val="tx1"/>
-                </a:solidFill>
-                <a:latin typeface="Arial" panose="020B0604020202020204" pitchFamily="34" charset="0"/>
-              </a:rPr>
-              <a:t> Bridges the gap between hard numbers and human feelings.</a:t>
-            </a:r>
-          </a:p>
-          <a:p>
-            <a:pPr eaLnBrk="0" fontAlgn="base" hangingPunct="0">
-              <a:spcBef>
-                <a:spcPct val="0"/>
-              </a:spcBef>
-              <a:spcAft>
-                <a:spcPct val="0"/>
-              </a:spcAft>
-              <a:buClrTx/>
-              <a:buFontTx/>
-              <a:buNone/>
-            </a:pPr>
-            <a:endParaRPr lang="en-US" altLang="en-US" sz="1800" dirty="0">
-              <a:solidFill>
-                <a:schemeClr val="tx1"/>
-              </a:solidFill>
-              <a:latin typeface="Arial" panose="020B0604020202020204" pitchFamily="34" charset="0"/>
+              <a:latin typeface="Times New Roman"/>
+              <a:ea typeface="Times New Roman"/>
+              <a:cs typeface="Times New Roman"/>
+              <a:sym typeface="Times New Roman"/>
             </a:endParaRPr>
           </a:p>
         </p:txBody>
       </p:sp>
+      <p:sp>
+        <p:nvSpPr>
+          <p:cNvPr id="209" name="Google Shape;209;p31">
+            <a:extLst>
+              <a:ext uri="{FF2B5EF4-FFF2-40B4-BE49-F238E27FC236}">
+                <a16:creationId xmlns:a16="http://schemas.microsoft.com/office/drawing/2014/main" id="{EB9DAEDB-9BDB-680B-580F-089D9552C9BE}"/>
+              </a:ext>
+            </a:extLst>
+          </p:cNvPr>
+          <p:cNvSpPr txBox="1"/>
+          <p:nvPr/>
+        </p:nvSpPr>
+        <p:spPr>
+          <a:xfrm>
+            <a:off x="8803958" y="4921958"/>
+            <a:ext cx="339900" cy="284700"/>
+          </a:xfrm>
+          <a:prstGeom prst="rect">
+            <a:avLst/>
+          </a:prstGeom>
+          <a:noFill/>
+          <a:ln>
+            <a:noFill/>
+          </a:ln>
+        </p:spPr>
+        <p:txBody>
+          <a:bodyPr spcFirstLastPara="1" wrap="square" lIns="68575" tIns="34275" rIns="68575" bIns="34275" anchor="t" anchorCtr="0">
+            <a:spAutoFit/>
+          </a:bodyPr>
+          <a:lstStyle/>
+          <a:p>
+            <a:pPr marL="0" marR="0" lvl="0" indent="0" algn="l" rtl="0">
+              <a:spcBef>
+                <a:spcPts val="0"/>
+              </a:spcBef>
+              <a:spcAft>
+                <a:spcPts val="0"/>
+              </a:spcAft>
+              <a:buNone/>
+            </a:pPr>
+            <a:r>
+              <a:rPr lang="en">
+                <a:solidFill>
+                  <a:schemeClr val="lt1"/>
+                </a:solidFill>
+              </a:rPr>
+              <a:t>6</a:t>
+            </a:r>
+            <a:endParaRPr sz="1400">
+              <a:solidFill>
+                <a:schemeClr val="lt1"/>
+              </a:solidFill>
+              <a:latin typeface="Arial"/>
+              <a:ea typeface="Arial"/>
+              <a:cs typeface="Arial"/>
+              <a:sym typeface="Arial"/>
+            </a:endParaRPr>
+          </a:p>
+        </p:txBody>
+      </p:sp>
+      <p:pic>
+        <p:nvPicPr>
+          <p:cNvPr id="5" name="Picture 4">
+            <a:extLst>
+              <a:ext uri="{FF2B5EF4-FFF2-40B4-BE49-F238E27FC236}">
+                <a16:creationId xmlns:a16="http://schemas.microsoft.com/office/drawing/2014/main" id="{90E44713-3068-54B6-E296-2116AD4ECE95}"/>
+              </a:ext>
+            </a:extLst>
+          </p:cNvPr>
+          <p:cNvPicPr>
+            <a:picLocks noChangeAspect="1"/>
+          </p:cNvPicPr>
+          <p:nvPr/>
+        </p:nvPicPr>
+        <p:blipFill>
+          <a:blip r:embed="rId3"/>
+          <a:srcRect t="66775"/>
+          <a:stretch>
+            <a:fillRect/>
+          </a:stretch>
+        </p:blipFill>
+        <p:spPr>
+          <a:xfrm>
+            <a:off x="877230" y="800970"/>
+            <a:ext cx="7107460" cy="4163435"/>
+          </a:xfrm>
+          <a:prstGeom prst="rect">
+            <a:avLst/>
+          </a:prstGeom>
+        </p:spPr>
+      </p:pic>
     </p:spTree>
+    <p:extLst>
+      <p:ext uri="{BB962C8B-B14F-4D97-AF65-F5344CB8AC3E}">
+        <p14:creationId xmlns:p14="http://schemas.microsoft.com/office/powerpoint/2010/main" val="4214254502"/>
+      </p:ext>
+    </p:extLst>
   </p:cSld>
   <p:clrMapOvr>
     <a:masterClrMapping/>
@@ -13853,7 +13775,7 @@
 </p:sld>
 </file>
 
-<file path=ppt/slides/slide12.xml><?xml version="1.0" encoding="utf-8"?>
+<file path=ppt/slides/slide13.xml><?xml version="1.0" encoding="utf-8"?>
 <p:sld xmlns:a="http://schemas.openxmlformats.org/drawingml/2006/main" xmlns:r="http://schemas.openxmlformats.org/officeDocument/2006/relationships" xmlns:p="http://schemas.openxmlformats.org/presentationml/2006/main">
   <p:cSld>
     <p:spTree>
@@ -15052,7 +14974,2723 @@
 </p:sld>
 </file>
 
-<file path=ppt/slides/slide13.xml><?xml version="1.0" encoding="utf-8"?>
+<file path=ppt/slides/slide14.xml><?xml version="1.0" encoding="utf-8"?>
+<p:sld xmlns:a="http://schemas.openxmlformats.org/drawingml/2006/main" xmlns:r="http://schemas.openxmlformats.org/officeDocument/2006/relationships" xmlns:p="http://schemas.openxmlformats.org/presentationml/2006/main">
+  <p:cSld>
+    <p:spTree>
+      <p:nvGrpSpPr>
+        <p:cNvPr id="1" name="Shape 215"/>
+        <p:cNvGrpSpPr/>
+        <p:nvPr/>
+      </p:nvGrpSpPr>
+      <p:grpSpPr>
+        <a:xfrm>
+          <a:off x="0" y="0"/>
+          <a:ext cx="0" cy="0"/>
+          <a:chOff x="0" y="0"/>
+          <a:chExt cx="0" cy="0"/>
+        </a:xfrm>
+      </p:grpSpPr>
+      <p:sp>
+        <p:nvSpPr>
+          <p:cNvPr id="216" name="Google Shape;216;p32"/>
+          <p:cNvSpPr/>
+          <p:nvPr/>
+        </p:nvSpPr>
+        <p:spPr>
+          <a:xfrm>
+            <a:off x="-275" y="162000"/>
+            <a:ext cx="9153000" cy="588000"/>
+          </a:xfrm>
+          <a:prstGeom prst="rect">
+            <a:avLst/>
+          </a:prstGeom>
+          <a:solidFill>
+            <a:srgbClr val="D9E5F8"/>
+          </a:solidFill>
+          <a:ln>
+            <a:noFill/>
+          </a:ln>
+        </p:spPr>
+        <p:txBody>
+          <a:bodyPr spcFirstLastPara="1" wrap="square" lIns="68575" tIns="34275" rIns="68575" bIns="34275" anchor="ctr" anchorCtr="0">
+            <a:noAutofit/>
+          </a:bodyPr>
+          <a:lstStyle/>
+          <a:p>
+            <a:pPr marL="0" marR="0" lvl="0" indent="0" algn="ctr" rtl="0">
+              <a:spcBef>
+                <a:spcPts val="0"/>
+              </a:spcBef>
+              <a:spcAft>
+                <a:spcPts val="0"/>
+              </a:spcAft>
+              <a:buNone/>
+            </a:pPr>
+            <a:endParaRPr sz="1400">
+              <a:solidFill>
+                <a:schemeClr val="lt1"/>
+              </a:solidFill>
+              <a:latin typeface="Arial"/>
+              <a:ea typeface="Arial"/>
+              <a:cs typeface="Arial"/>
+              <a:sym typeface="Arial"/>
+            </a:endParaRPr>
+          </a:p>
+        </p:txBody>
+      </p:sp>
+      <p:sp>
+        <p:nvSpPr>
+          <p:cNvPr id="217" name="Google Shape;217;p32"/>
+          <p:cNvSpPr/>
+          <p:nvPr/>
+        </p:nvSpPr>
+        <p:spPr>
+          <a:xfrm>
+            <a:off x="4160520" y="0"/>
+            <a:ext cx="4995000" cy="162000"/>
+          </a:xfrm>
+          <a:prstGeom prst="rect">
+            <a:avLst/>
+          </a:prstGeom>
+          <a:solidFill>
+            <a:srgbClr val="341BF1"/>
+          </a:solidFill>
+          <a:ln>
+            <a:noFill/>
+          </a:ln>
+        </p:spPr>
+        <p:txBody>
+          <a:bodyPr spcFirstLastPara="1" wrap="square" lIns="68575" tIns="34275" rIns="68575" bIns="34275" anchor="ctr" anchorCtr="0">
+            <a:noAutofit/>
+          </a:bodyPr>
+          <a:lstStyle/>
+          <a:p>
+            <a:pPr marL="0" marR="0" lvl="0" indent="0" algn="ctr" rtl="0">
+              <a:spcBef>
+                <a:spcPts val="0"/>
+              </a:spcBef>
+              <a:spcAft>
+                <a:spcPts val="0"/>
+              </a:spcAft>
+              <a:buNone/>
+            </a:pPr>
+            <a:endParaRPr sz="1400">
+              <a:solidFill>
+                <a:schemeClr val="lt1"/>
+              </a:solidFill>
+              <a:latin typeface="Arial"/>
+              <a:ea typeface="Arial"/>
+              <a:cs typeface="Arial"/>
+              <a:sym typeface="Arial"/>
+            </a:endParaRPr>
+          </a:p>
+        </p:txBody>
+      </p:sp>
+      <p:sp>
+        <p:nvSpPr>
+          <p:cNvPr id="218" name="Google Shape;218;p32"/>
+          <p:cNvSpPr/>
+          <p:nvPr/>
+        </p:nvSpPr>
+        <p:spPr>
+          <a:xfrm>
+            <a:off x="2858" y="0"/>
+            <a:ext cx="4158000" cy="162000"/>
+          </a:xfrm>
+          <a:prstGeom prst="rect">
+            <a:avLst/>
+          </a:prstGeom>
+          <a:solidFill>
+            <a:srgbClr val="FF0000"/>
+          </a:solidFill>
+          <a:ln>
+            <a:noFill/>
+          </a:ln>
+        </p:spPr>
+        <p:txBody>
+          <a:bodyPr spcFirstLastPara="1" wrap="square" lIns="68575" tIns="34275" rIns="68575" bIns="34275" anchor="ctr" anchorCtr="0">
+            <a:noAutofit/>
+          </a:bodyPr>
+          <a:lstStyle/>
+          <a:p>
+            <a:pPr marL="0" marR="0" lvl="0" indent="0" algn="ctr" rtl="0">
+              <a:spcBef>
+                <a:spcPts val="0"/>
+              </a:spcBef>
+              <a:spcAft>
+                <a:spcPts val="0"/>
+              </a:spcAft>
+              <a:buNone/>
+            </a:pPr>
+            <a:endParaRPr sz="1400">
+              <a:solidFill>
+                <a:schemeClr val="lt1"/>
+              </a:solidFill>
+              <a:latin typeface="Arial"/>
+              <a:ea typeface="Arial"/>
+              <a:cs typeface="Arial"/>
+              <a:sym typeface="Arial"/>
+            </a:endParaRPr>
+          </a:p>
+        </p:txBody>
+      </p:sp>
+      <p:sp>
+        <p:nvSpPr>
+          <p:cNvPr id="219" name="Google Shape;219;p32"/>
+          <p:cNvSpPr/>
+          <p:nvPr/>
+        </p:nvSpPr>
+        <p:spPr>
+          <a:xfrm>
+            <a:off x="4927108" y="4972928"/>
+            <a:ext cx="4239000" cy="162000"/>
+          </a:xfrm>
+          <a:prstGeom prst="rect">
+            <a:avLst/>
+          </a:prstGeom>
+          <a:solidFill>
+            <a:srgbClr val="341BF1"/>
+          </a:solidFill>
+          <a:ln>
+            <a:noFill/>
+          </a:ln>
+        </p:spPr>
+        <p:txBody>
+          <a:bodyPr spcFirstLastPara="1" wrap="square" lIns="68575" tIns="34275" rIns="68575" bIns="34275" anchor="ctr" anchorCtr="0">
+            <a:noAutofit/>
+          </a:bodyPr>
+          <a:lstStyle/>
+          <a:p>
+            <a:pPr marL="0" marR="0" lvl="0" indent="0" algn="ctr" rtl="0">
+              <a:spcBef>
+                <a:spcPts val="0"/>
+              </a:spcBef>
+              <a:spcAft>
+                <a:spcPts val="0"/>
+              </a:spcAft>
+              <a:buNone/>
+            </a:pPr>
+            <a:endParaRPr sz="1400">
+              <a:solidFill>
+                <a:schemeClr val="lt1"/>
+              </a:solidFill>
+              <a:latin typeface="Arial"/>
+              <a:ea typeface="Arial"/>
+              <a:cs typeface="Arial"/>
+              <a:sym typeface="Arial"/>
+            </a:endParaRPr>
+          </a:p>
+        </p:txBody>
+      </p:sp>
+      <p:sp>
+        <p:nvSpPr>
+          <p:cNvPr id="220" name="Google Shape;220;p32"/>
+          <p:cNvSpPr/>
+          <p:nvPr/>
+        </p:nvSpPr>
+        <p:spPr>
+          <a:xfrm>
+            <a:off x="-8853" y="4972928"/>
+            <a:ext cx="4941000" cy="162000"/>
+          </a:xfrm>
+          <a:prstGeom prst="rect">
+            <a:avLst/>
+          </a:prstGeom>
+          <a:solidFill>
+            <a:srgbClr val="FF0000"/>
+          </a:solidFill>
+          <a:ln>
+            <a:noFill/>
+          </a:ln>
+        </p:spPr>
+        <p:txBody>
+          <a:bodyPr spcFirstLastPara="1" wrap="square" lIns="68575" tIns="34275" rIns="68575" bIns="34275" anchor="ctr" anchorCtr="0">
+            <a:noAutofit/>
+          </a:bodyPr>
+          <a:lstStyle/>
+          <a:p>
+            <a:pPr marL="0" marR="0" lvl="0" indent="0" algn="ctr" rtl="0">
+              <a:spcBef>
+                <a:spcPts val="0"/>
+              </a:spcBef>
+              <a:spcAft>
+                <a:spcPts val="0"/>
+              </a:spcAft>
+              <a:buNone/>
+            </a:pPr>
+            <a:endParaRPr sz="1400">
+              <a:solidFill>
+                <a:schemeClr val="lt1"/>
+              </a:solidFill>
+              <a:latin typeface="Arial"/>
+              <a:ea typeface="Arial"/>
+              <a:cs typeface="Arial"/>
+              <a:sym typeface="Arial"/>
+            </a:endParaRPr>
+          </a:p>
+        </p:txBody>
+      </p:sp>
+      <p:sp>
+        <p:nvSpPr>
+          <p:cNvPr id="221" name="Google Shape;221;p32"/>
+          <p:cNvSpPr txBox="1"/>
+          <p:nvPr/>
+        </p:nvSpPr>
+        <p:spPr>
+          <a:xfrm>
+            <a:off x="-8850" y="164450"/>
+            <a:ext cx="9144000" cy="531000"/>
+          </a:xfrm>
+          <a:prstGeom prst="rect">
+            <a:avLst/>
+          </a:prstGeom>
+          <a:noFill/>
+          <a:ln>
+            <a:noFill/>
+          </a:ln>
+        </p:spPr>
+        <p:txBody>
+          <a:bodyPr spcFirstLastPara="1" wrap="square" lIns="68575" tIns="34275" rIns="68575" bIns="34275" anchor="t" anchorCtr="0">
+            <a:spAutoFit/>
+          </a:bodyPr>
+          <a:lstStyle/>
+          <a:p>
+            <a:pPr marL="0" marR="0" lvl="0" indent="0" algn="l" rtl="0">
+              <a:spcBef>
+                <a:spcPts val="0"/>
+              </a:spcBef>
+              <a:spcAft>
+                <a:spcPts val="0"/>
+              </a:spcAft>
+              <a:buNone/>
+            </a:pPr>
+            <a:r>
+              <a:rPr lang="en" sz="3000" b="1">
+                <a:solidFill>
+                  <a:schemeClr val="dk1"/>
+                </a:solidFill>
+                <a:latin typeface="Times New Roman"/>
+                <a:ea typeface="Times New Roman"/>
+                <a:cs typeface="Times New Roman"/>
+                <a:sym typeface="Times New Roman"/>
+              </a:rPr>
+              <a:t>Data and Resources</a:t>
+            </a:r>
+            <a:endParaRPr sz="3000" b="1">
+              <a:solidFill>
+                <a:schemeClr val="dk1"/>
+              </a:solidFill>
+              <a:latin typeface="Times New Roman"/>
+              <a:ea typeface="Times New Roman"/>
+              <a:cs typeface="Times New Roman"/>
+              <a:sym typeface="Times New Roman"/>
+            </a:endParaRPr>
+          </a:p>
+        </p:txBody>
+      </p:sp>
+      <p:sp>
+        <p:nvSpPr>
+          <p:cNvPr id="222" name="Google Shape;222;p32"/>
+          <p:cNvSpPr txBox="1"/>
+          <p:nvPr/>
+        </p:nvSpPr>
+        <p:spPr>
+          <a:xfrm>
+            <a:off x="8803958" y="4921958"/>
+            <a:ext cx="339900" cy="284700"/>
+          </a:xfrm>
+          <a:prstGeom prst="rect">
+            <a:avLst/>
+          </a:prstGeom>
+          <a:noFill/>
+          <a:ln>
+            <a:noFill/>
+          </a:ln>
+        </p:spPr>
+        <p:txBody>
+          <a:bodyPr spcFirstLastPara="1" wrap="square" lIns="68575" tIns="34275" rIns="68575" bIns="34275" anchor="t" anchorCtr="0">
+            <a:spAutoFit/>
+          </a:bodyPr>
+          <a:lstStyle/>
+          <a:p>
+            <a:pPr marL="0" marR="0" lvl="0" indent="0" algn="l" rtl="0">
+              <a:spcBef>
+                <a:spcPts val="0"/>
+              </a:spcBef>
+              <a:spcAft>
+                <a:spcPts val="0"/>
+              </a:spcAft>
+              <a:buNone/>
+            </a:pPr>
+            <a:r>
+              <a:rPr lang="en">
+                <a:solidFill>
+                  <a:schemeClr val="lt1"/>
+                </a:solidFill>
+              </a:rPr>
+              <a:t>7</a:t>
+            </a:r>
+            <a:endParaRPr sz="1400">
+              <a:solidFill>
+                <a:schemeClr val="lt1"/>
+              </a:solidFill>
+              <a:latin typeface="Arial"/>
+              <a:ea typeface="Arial"/>
+              <a:cs typeface="Arial"/>
+              <a:sym typeface="Arial"/>
+            </a:endParaRPr>
+          </a:p>
+        </p:txBody>
+      </p:sp>
+      <p:sp>
+        <p:nvSpPr>
+          <p:cNvPr id="7" name="Rectangle 1">
+            <a:extLst>
+              <a:ext uri="{FF2B5EF4-FFF2-40B4-BE49-F238E27FC236}">
+                <a16:creationId xmlns:a16="http://schemas.microsoft.com/office/drawing/2014/main" id="{FCE34896-846B-F642-4FDB-F0A56C11B6FE}"/>
+              </a:ext>
+            </a:extLst>
+          </p:cNvPr>
+          <p:cNvSpPr txBox="1">
+            <a:spLocks noChangeArrowheads="1"/>
+          </p:cNvSpPr>
+          <p:nvPr/>
+        </p:nvSpPr>
+        <p:spPr bwMode="auto">
+          <a:xfrm>
+            <a:off x="553640" y="1291803"/>
+            <a:ext cx="8125540" cy="3139321"/>
+          </a:xfrm>
+          <a:prstGeom prst="rect">
+            <a:avLst/>
+          </a:prstGeom>
+          <a:noFill/>
+          <a:ln>
+            <a:noFill/>
+          </a:ln>
+          <a:effectLst/>
+          <a:extLst>
+            <a:ext uri="{909E8E84-426E-40DD-AFC4-6F175D3DCCD1}">
+              <a14:hiddenFill xmlns:a14="http://schemas.microsoft.com/office/drawing/2010/main">
+                <a:solidFill>
+                  <a:schemeClr val="accent1"/>
+                </a:solidFill>
+              </a14:hiddenFill>
+            </a:ext>
+            <a:ext uri="{91240B29-F687-4F45-9708-019B960494DF}">
+              <a14:hiddenLine xmlns:a14="http://schemas.microsoft.com/office/drawing/2010/main" w="9525">
+                <a:solidFill>
+                  <a:schemeClr val="tx1"/>
+                </a:solidFill>
+                <a:miter lim="800000"/>
+                <a:headEnd/>
+                <a:tailEnd/>
+              </a14:hiddenLine>
+            </a:ext>
+            <a:ext uri="{AF507438-7753-43E0-B8FC-AC1667EBCBE1}">
+              <a14:hiddenEffects xmlns:a14="http://schemas.microsoft.com/office/drawing/2010/main">
+                <a:effectLst>
+                  <a:outerShdw dist="35921" dir="2700000" algn="ctr" rotWithShape="0">
+                    <a:schemeClr val="bg2"/>
+                  </a:outerShdw>
+                </a:effectLst>
+              </a14:hiddenEffects>
+            </a:ext>
+          </a:extLst>
+        </p:spPr>
+        <p:txBody>
+          <a:bodyPr vert="horz" wrap="square" lIns="91440" tIns="45720" rIns="91440" bIns="45720" numCol="1" anchor="ctr" anchorCtr="0" compatLnSpc="1">
+            <a:prstTxWarp prst="textNoShape">
+              <a:avLst/>
+            </a:prstTxWarp>
+            <a:spAutoFit/>
+          </a:bodyPr>
+          <a:lstStyle>
+            <a:defPPr marR="0" lvl="0" algn="l" rtl="0">
+              <a:lnSpc>
+                <a:spcPct val="100000"/>
+              </a:lnSpc>
+              <a:spcBef>
+                <a:spcPts val="0"/>
+              </a:spcBef>
+              <a:spcAft>
+                <a:spcPts val="0"/>
+              </a:spcAft>
+            </a:defPPr>
+            <a:lvl1pPr marR="0" lvl="0" algn="l" rtl="0">
+              <a:lnSpc>
+                <a:spcPct val="100000"/>
+              </a:lnSpc>
+              <a:spcBef>
+                <a:spcPts val="0"/>
+              </a:spcBef>
+              <a:spcAft>
+                <a:spcPts val="0"/>
+              </a:spcAft>
+              <a:buClr>
+                <a:srgbClr val="000000"/>
+              </a:buClr>
+              <a:buFont typeface="Arial"/>
+              <a:defRPr sz="1400" b="0" i="0" u="none" strike="noStrike" cap="none">
+                <a:solidFill>
+                  <a:srgbClr val="000000"/>
+                </a:solidFill>
+                <a:latin typeface="Arial"/>
+                <a:ea typeface="Arial"/>
+                <a:cs typeface="Arial"/>
+                <a:sym typeface="Arial"/>
+              </a:defRPr>
+            </a:lvl1pPr>
+            <a:lvl2pPr marR="0" lvl="1" algn="l" rtl="0">
+              <a:lnSpc>
+                <a:spcPct val="100000"/>
+              </a:lnSpc>
+              <a:spcBef>
+                <a:spcPts val="0"/>
+              </a:spcBef>
+              <a:spcAft>
+                <a:spcPts val="0"/>
+              </a:spcAft>
+              <a:buClr>
+                <a:srgbClr val="000000"/>
+              </a:buClr>
+              <a:buFont typeface="Arial"/>
+              <a:defRPr sz="1400" b="0" i="0" u="none" strike="noStrike" cap="none">
+                <a:solidFill>
+                  <a:srgbClr val="000000"/>
+                </a:solidFill>
+                <a:latin typeface="Arial"/>
+                <a:ea typeface="Arial"/>
+                <a:cs typeface="Arial"/>
+                <a:sym typeface="Arial"/>
+              </a:defRPr>
+            </a:lvl2pPr>
+            <a:lvl3pPr marR="0" lvl="2" algn="l" rtl="0">
+              <a:lnSpc>
+                <a:spcPct val="100000"/>
+              </a:lnSpc>
+              <a:spcBef>
+                <a:spcPts val="0"/>
+              </a:spcBef>
+              <a:spcAft>
+                <a:spcPts val="0"/>
+              </a:spcAft>
+              <a:buClr>
+                <a:srgbClr val="000000"/>
+              </a:buClr>
+              <a:buFont typeface="Arial"/>
+              <a:defRPr sz="1400" b="0" i="0" u="none" strike="noStrike" cap="none">
+                <a:solidFill>
+                  <a:srgbClr val="000000"/>
+                </a:solidFill>
+                <a:latin typeface="Arial"/>
+                <a:ea typeface="Arial"/>
+                <a:cs typeface="Arial"/>
+                <a:sym typeface="Arial"/>
+              </a:defRPr>
+            </a:lvl3pPr>
+            <a:lvl4pPr marR="0" lvl="3" algn="l" rtl="0">
+              <a:lnSpc>
+                <a:spcPct val="100000"/>
+              </a:lnSpc>
+              <a:spcBef>
+                <a:spcPts val="0"/>
+              </a:spcBef>
+              <a:spcAft>
+                <a:spcPts val="0"/>
+              </a:spcAft>
+              <a:buClr>
+                <a:srgbClr val="000000"/>
+              </a:buClr>
+              <a:buFont typeface="Arial"/>
+              <a:defRPr sz="1400" b="0" i="0" u="none" strike="noStrike" cap="none">
+                <a:solidFill>
+                  <a:srgbClr val="000000"/>
+                </a:solidFill>
+                <a:latin typeface="Arial"/>
+                <a:ea typeface="Arial"/>
+                <a:cs typeface="Arial"/>
+                <a:sym typeface="Arial"/>
+              </a:defRPr>
+            </a:lvl4pPr>
+            <a:lvl5pPr marR="0" lvl="4" algn="l" rtl="0">
+              <a:lnSpc>
+                <a:spcPct val="100000"/>
+              </a:lnSpc>
+              <a:spcBef>
+                <a:spcPts val="0"/>
+              </a:spcBef>
+              <a:spcAft>
+                <a:spcPts val="0"/>
+              </a:spcAft>
+              <a:buClr>
+                <a:srgbClr val="000000"/>
+              </a:buClr>
+              <a:buFont typeface="Arial"/>
+              <a:defRPr sz="1400" b="0" i="0" u="none" strike="noStrike" cap="none">
+                <a:solidFill>
+                  <a:srgbClr val="000000"/>
+                </a:solidFill>
+                <a:latin typeface="Arial"/>
+                <a:ea typeface="Arial"/>
+                <a:cs typeface="Arial"/>
+                <a:sym typeface="Arial"/>
+              </a:defRPr>
+            </a:lvl5pPr>
+            <a:lvl6pPr marR="0" lvl="5" algn="l" rtl="0">
+              <a:lnSpc>
+                <a:spcPct val="100000"/>
+              </a:lnSpc>
+              <a:spcBef>
+                <a:spcPts val="0"/>
+              </a:spcBef>
+              <a:spcAft>
+                <a:spcPts val="0"/>
+              </a:spcAft>
+              <a:buClr>
+                <a:srgbClr val="000000"/>
+              </a:buClr>
+              <a:buFont typeface="Arial"/>
+              <a:defRPr sz="1400" b="0" i="0" u="none" strike="noStrike" cap="none">
+                <a:solidFill>
+                  <a:srgbClr val="000000"/>
+                </a:solidFill>
+                <a:latin typeface="Arial"/>
+                <a:ea typeface="Arial"/>
+                <a:cs typeface="Arial"/>
+                <a:sym typeface="Arial"/>
+              </a:defRPr>
+            </a:lvl6pPr>
+            <a:lvl7pPr marR="0" lvl="6" algn="l" rtl="0">
+              <a:lnSpc>
+                <a:spcPct val="100000"/>
+              </a:lnSpc>
+              <a:spcBef>
+                <a:spcPts val="0"/>
+              </a:spcBef>
+              <a:spcAft>
+                <a:spcPts val="0"/>
+              </a:spcAft>
+              <a:buClr>
+                <a:srgbClr val="000000"/>
+              </a:buClr>
+              <a:buFont typeface="Arial"/>
+              <a:defRPr sz="1400" b="0" i="0" u="none" strike="noStrike" cap="none">
+                <a:solidFill>
+                  <a:srgbClr val="000000"/>
+                </a:solidFill>
+                <a:latin typeface="Arial"/>
+                <a:ea typeface="Arial"/>
+                <a:cs typeface="Arial"/>
+                <a:sym typeface="Arial"/>
+              </a:defRPr>
+            </a:lvl7pPr>
+            <a:lvl8pPr marR="0" lvl="7" algn="l" rtl="0">
+              <a:lnSpc>
+                <a:spcPct val="100000"/>
+              </a:lnSpc>
+              <a:spcBef>
+                <a:spcPts val="0"/>
+              </a:spcBef>
+              <a:spcAft>
+                <a:spcPts val="0"/>
+              </a:spcAft>
+              <a:buClr>
+                <a:srgbClr val="000000"/>
+              </a:buClr>
+              <a:buFont typeface="Arial"/>
+              <a:defRPr sz="1400" b="0" i="0" u="none" strike="noStrike" cap="none">
+                <a:solidFill>
+                  <a:srgbClr val="000000"/>
+                </a:solidFill>
+                <a:latin typeface="Arial"/>
+                <a:ea typeface="Arial"/>
+                <a:cs typeface="Arial"/>
+                <a:sym typeface="Arial"/>
+              </a:defRPr>
+            </a:lvl8pPr>
+            <a:lvl9pPr marR="0" lvl="8" algn="l" rtl="0">
+              <a:lnSpc>
+                <a:spcPct val="100000"/>
+              </a:lnSpc>
+              <a:spcBef>
+                <a:spcPts val="0"/>
+              </a:spcBef>
+              <a:spcAft>
+                <a:spcPts val="0"/>
+              </a:spcAft>
+              <a:buClr>
+                <a:srgbClr val="000000"/>
+              </a:buClr>
+              <a:buFont typeface="Arial"/>
+              <a:defRPr sz="1400" b="0" i="0" u="none" strike="noStrike" cap="none">
+                <a:solidFill>
+                  <a:srgbClr val="000000"/>
+                </a:solidFill>
+                <a:latin typeface="Arial"/>
+                <a:ea typeface="Arial"/>
+                <a:cs typeface="Arial"/>
+                <a:sym typeface="Arial"/>
+              </a:defRPr>
+            </a:lvl9pPr>
+          </a:lstStyle>
+          <a:p>
+            <a:pPr eaLnBrk="0" fontAlgn="base" hangingPunct="0">
+              <a:spcBef>
+                <a:spcPct val="0"/>
+              </a:spcBef>
+              <a:spcAft>
+                <a:spcPct val="0"/>
+              </a:spcAft>
+              <a:buClrTx/>
+              <a:buFontTx/>
+              <a:buChar char="•"/>
+            </a:pPr>
+            <a:r>
+              <a:rPr lang="en-US" altLang="en-US" sz="1800" b="1" dirty="0">
+                <a:solidFill>
+                  <a:schemeClr val="tx1"/>
+                </a:solidFill>
+                <a:latin typeface="Arial" panose="020B0604020202020204" pitchFamily="34" charset="0"/>
+              </a:rPr>
+              <a:t>Data Sources:</a:t>
+            </a:r>
+            <a:endParaRPr lang="en-US" altLang="en-US" sz="1800" dirty="0">
+              <a:solidFill>
+                <a:schemeClr val="tx1"/>
+              </a:solidFill>
+              <a:latin typeface="Arial" panose="020B0604020202020204" pitchFamily="34" charset="0"/>
+            </a:endParaRPr>
+          </a:p>
+          <a:p>
+            <a:pPr eaLnBrk="0" fontAlgn="base" hangingPunct="0">
+              <a:spcBef>
+                <a:spcPct val="0"/>
+              </a:spcBef>
+              <a:spcAft>
+                <a:spcPct val="0"/>
+              </a:spcAft>
+              <a:buClrTx/>
+              <a:buFontTx/>
+              <a:buChar char="•"/>
+            </a:pPr>
+            <a:r>
+              <a:rPr lang="en-US" altLang="en-US" sz="1800" b="1" dirty="0">
+                <a:solidFill>
+                  <a:schemeClr val="tx1"/>
+                </a:solidFill>
+                <a:latin typeface="Arial" panose="020B0604020202020204" pitchFamily="34" charset="0"/>
+              </a:rPr>
+              <a:t>Student Stress Dataset (Kaggle):</a:t>
+            </a:r>
+            <a:r>
+              <a:rPr lang="en-US" altLang="en-US" sz="1800" dirty="0">
+                <a:solidFill>
+                  <a:schemeClr val="tx1"/>
+                </a:solidFill>
+                <a:latin typeface="Arial" panose="020B0604020202020204" pitchFamily="34" charset="0"/>
+              </a:rPr>
+              <a:t> For calibration of lifestyle metrics (Sleep, Study, Stress).</a:t>
+            </a:r>
+          </a:p>
+          <a:p>
+            <a:pPr eaLnBrk="0" fontAlgn="base" hangingPunct="0">
+              <a:spcBef>
+                <a:spcPct val="0"/>
+              </a:spcBef>
+              <a:spcAft>
+                <a:spcPct val="0"/>
+              </a:spcAft>
+              <a:buClrTx/>
+              <a:buFontTx/>
+              <a:buChar char="•"/>
+            </a:pPr>
+            <a:r>
+              <a:rPr lang="en-US" altLang="en-US" sz="1800" b="1" dirty="0">
+                <a:solidFill>
+                  <a:schemeClr val="tx1"/>
+                </a:solidFill>
+                <a:latin typeface="Arial" panose="020B0604020202020204" pitchFamily="34" charset="0"/>
+              </a:rPr>
+              <a:t>Student Mental Health Dataset:</a:t>
+            </a:r>
+            <a:r>
+              <a:rPr lang="en-US" altLang="en-US" sz="1800" dirty="0">
+                <a:solidFill>
+                  <a:schemeClr val="tx1"/>
+                </a:solidFill>
+                <a:latin typeface="Arial" panose="020B0604020202020204" pitchFamily="34" charset="0"/>
+              </a:rPr>
+              <a:t> For validating risk factors.</a:t>
+            </a:r>
+          </a:p>
+          <a:p>
+            <a:pPr eaLnBrk="0" fontAlgn="base" hangingPunct="0">
+              <a:spcBef>
+                <a:spcPct val="0"/>
+              </a:spcBef>
+              <a:spcAft>
+                <a:spcPct val="0"/>
+              </a:spcAft>
+              <a:buClrTx/>
+              <a:buFontTx/>
+              <a:buChar char="•"/>
+            </a:pPr>
+            <a:r>
+              <a:rPr lang="en-US" altLang="en-US" sz="1800" b="1" dirty="0">
+                <a:solidFill>
+                  <a:schemeClr val="tx1"/>
+                </a:solidFill>
+                <a:latin typeface="Arial" panose="020B0604020202020204" pitchFamily="34" charset="0"/>
+              </a:rPr>
+              <a:t>Reddit Mental Health Text:</a:t>
+            </a:r>
+            <a:r>
+              <a:rPr lang="en-US" altLang="en-US" sz="1800" dirty="0">
+                <a:solidFill>
+                  <a:schemeClr val="tx1"/>
+                </a:solidFill>
+                <a:latin typeface="Arial" panose="020B0604020202020204" pitchFamily="34" charset="0"/>
+              </a:rPr>
+              <a:t> Used to test the VADER sentiment engine on informal language.</a:t>
+            </a:r>
+          </a:p>
+          <a:p>
+            <a:pPr eaLnBrk="0" fontAlgn="base" hangingPunct="0">
+              <a:spcBef>
+                <a:spcPct val="0"/>
+              </a:spcBef>
+              <a:spcAft>
+                <a:spcPct val="0"/>
+              </a:spcAft>
+              <a:buClrTx/>
+              <a:buFontTx/>
+              <a:buChar char="•"/>
+            </a:pPr>
+            <a:r>
+              <a:rPr lang="en-US" altLang="en-US" sz="1800" b="1" dirty="0">
+                <a:solidFill>
+                  <a:schemeClr val="tx1"/>
+                </a:solidFill>
+                <a:latin typeface="Arial" panose="020B0604020202020204" pitchFamily="34" charset="0"/>
+              </a:rPr>
+              <a:t>Hardware/Software:</a:t>
+            </a:r>
+            <a:endParaRPr lang="en-US" altLang="en-US" sz="1800" dirty="0">
+              <a:solidFill>
+                <a:schemeClr val="tx1"/>
+              </a:solidFill>
+              <a:latin typeface="Arial" panose="020B0604020202020204" pitchFamily="34" charset="0"/>
+            </a:endParaRPr>
+          </a:p>
+          <a:p>
+            <a:pPr eaLnBrk="0" fontAlgn="base" hangingPunct="0">
+              <a:spcBef>
+                <a:spcPct val="0"/>
+              </a:spcBef>
+              <a:spcAft>
+                <a:spcPct val="0"/>
+              </a:spcAft>
+              <a:buClrTx/>
+              <a:buFontTx/>
+              <a:buChar char="•"/>
+            </a:pPr>
+            <a:r>
+              <a:rPr lang="en-US" altLang="en-US" sz="1800" b="1" dirty="0">
+                <a:solidFill>
+                  <a:schemeClr val="tx1"/>
+                </a:solidFill>
+                <a:latin typeface="Arial" panose="020B0604020202020204" pitchFamily="34" charset="0"/>
+              </a:rPr>
+              <a:t>Language:</a:t>
+            </a:r>
+            <a:r>
+              <a:rPr lang="en-US" altLang="en-US" sz="1800" dirty="0">
+                <a:solidFill>
+                  <a:schemeClr val="tx1"/>
+                </a:solidFill>
+                <a:latin typeface="Arial" panose="020B0604020202020204" pitchFamily="34" charset="0"/>
+              </a:rPr>
+              <a:t> Python 3.x</a:t>
+            </a:r>
+          </a:p>
+          <a:p>
+            <a:pPr eaLnBrk="0" fontAlgn="base" hangingPunct="0">
+              <a:spcBef>
+                <a:spcPct val="0"/>
+              </a:spcBef>
+              <a:spcAft>
+                <a:spcPct val="0"/>
+              </a:spcAft>
+              <a:buClrTx/>
+              <a:buFontTx/>
+              <a:buChar char="•"/>
+            </a:pPr>
+            <a:r>
+              <a:rPr lang="en-US" altLang="en-US" sz="1800" b="1" dirty="0">
+                <a:solidFill>
+                  <a:schemeClr val="tx1"/>
+                </a:solidFill>
+                <a:latin typeface="Arial" panose="020B0604020202020204" pitchFamily="34" charset="0"/>
+              </a:rPr>
+              <a:t>Database:</a:t>
+            </a:r>
+            <a:r>
+              <a:rPr lang="en-US" altLang="en-US" sz="1800" dirty="0">
+                <a:solidFill>
+                  <a:schemeClr val="tx1"/>
+                </a:solidFill>
+                <a:latin typeface="Arial" panose="020B0604020202020204" pitchFamily="34" charset="0"/>
+              </a:rPr>
+              <a:t> SQLite (Session storage)</a:t>
+            </a:r>
+          </a:p>
+          <a:p>
+            <a:pPr eaLnBrk="0" fontAlgn="base" hangingPunct="0">
+              <a:spcBef>
+                <a:spcPct val="0"/>
+              </a:spcBef>
+              <a:spcAft>
+                <a:spcPct val="0"/>
+              </a:spcAft>
+              <a:buClrTx/>
+              <a:buFontTx/>
+              <a:buChar char="•"/>
+            </a:pPr>
+            <a:r>
+              <a:rPr lang="en-US" altLang="en-US" sz="1800" b="1" dirty="0">
+                <a:solidFill>
+                  <a:schemeClr val="tx1"/>
+                </a:solidFill>
+                <a:latin typeface="Arial" panose="020B0604020202020204" pitchFamily="34" charset="0"/>
+              </a:rPr>
+              <a:t>IDE:</a:t>
+            </a:r>
+            <a:r>
+              <a:rPr lang="en-US" altLang="en-US" sz="1800" dirty="0">
+                <a:solidFill>
+                  <a:schemeClr val="tx1"/>
+                </a:solidFill>
+                <a:latin typeface="Arial" panose="020B0604020202020204" pitchFamily="34" charset="0"/>
+              </a:rPr>
+              <a:t> VS Code / PyCharm</a:t>
+            </a:r>
+          </a:p>
+          <a:p>
+            <a:pPr eaLnBrk="0" fontAlgn="base" hangingPunct="0">
+              <a:spcBef>
+                <a:spcPct val="0"/>
+              </a:spcBef>
+              <a:spcAft>
+                <a:spcPct val="0"/>
+              </a:spcAft>
+              <a:buClrTx/>
+              <a:buFontTx/>
+              <a:buNone/>
+            </a:pPr>
+            <a:endParaRPr lang="en-US" altLang="en-US" sz="1800" dirty="0">
+              <a:solidFill>
+                <a:schemeClr val="tx1"/>
+              </a:solidFill>
+              <a:latin typeface="Arial" panose="020B0604020202020204" pitchFamily="34" charset="0"/>
+            </a:endParaRPr>
+          </a:p>
+        </p:txBody>
+      </p:sp>
+    </p:spTree>
+  </p:cSld>
+  <p:clrMapOvr>
+    <a:masterClrMapping/>
+  </p:clrMapOvr>
+</p:sld>
+</file>
+
+<file path=ppt/slides/slide15.xml><?xml version="1.0" encoding="utf-8"?>
+<p:sld xmlns:a="http://schemas.openxmlformats.org/drawingml/2006/main" xmlns:r="http://schemas.openxmlformats.org/officeDocument/2006/relationships" xmlns:p="http://schemas.openxmlformats.org/presentationml/2006/main">
+  <p:cSld>
+    <p:spTree>
+      <p:nvGrpSpPr>
+        <p:cNvPr id="1" name="Shape 190"/>
+        <p:cNvGrpSpPr/>
+        <p:nvPr/>
+      </p:nvGrpSpPr>
+      <p:grpSpPr>
+        <a:xfrm>
+          <a:off x="0" y="0"/>
+          <a:ext cx="0" cy="0"/>
+          <a:chOff x="0" y="0"/>
+          <a:chExt cx="0" cy="0"/>
+        </a:xfrm>
+      </p:grpSpPr>
+      <p:sp>
+        <p:nvSpPr>
+          <p:cNvPr id="191" name="Google Shape;191;p30"/>
+          <p:cNvSpPr/>
+          <p:nvPr/>
+        </p:nvSpPr>
+        <p:spPr>
+          <a:xfrm>
+            <a:off x="-275" y="169620"/>
+            <a:ext cx="9153000" cy="588000"/>
+          </a:xfrm>
+          <a:prstGeom prst="rect">
+            <a:avLst/>
+          </a:prstGeom>
+          <a:solidFill>
+            <a:srgbClr val="D9E5F8"/>
+          </a:solidFill>
+          <a:ln>
+            <a:noFill/>
+          </a:ln>
+        </p:spPr>
+        <p:txBody>
+          <a:bodyPr spcFirstLastPara="1" wrap="square" lIns="68575" tIns="34275" rIns="68575" bIns="34275" anchor="ctr" anchorCtr="0">
+            <a:noAutofit/>
+          </a:bodyPr>
+          <a:lstStyle/>
+          <a:p>
+            <a:pPr marL="0" marR="0" lvl="0" indent="0" algn="ctr" rtl="0">
+              <a:spcBef>
+                <a:spcPts val="0"/>
+              </a:spcBef>
+              <a:spcAft>
+                <a:spcPts val="0"/>
+              </a:spcAft>
+              <a:buNone/>
+            </a:pPr>
+            <a:endParaRPr sz="1400">
+              <a:solidFill>
+                <a:schemeClr val="lt1"/>
+              </a:solidFill>
+              <a:latin typeface="Arial"/>
+              <a:ea typeface="Arial"/>
+              <a:cs typeface="Arial"/>
+              <a:sym typeface="Arial"/>
+            </a:endParaRPr>
+          </a:p>
+        </p:txBody>
+      </p:sp>
+      <p:sp>
+        <p:nvSpPr>
+          <p:cNvPr id="192" name="Google Shape;192;p30"/>
+          <p:cNvSpPr/>
+          <p:nvPr/>
+        </p:nvSpPr>
+        <p:spPr>
+          <a:xfrm>
+            <a:off x="4160520" y="0"/>
+            <a:ext cx="4995000" cy="162000"/>
+          </a:xfrm>
+          <a:prstGeom prst="rect">
+            <a:avLst/>
+          </a:prstGeom>
+          <a:solidFill>
+            <a:srgbClr val="341BF1"/>
+          </a:solidFill>
+          <a:ln>
+            <a:noFill/>
+          </a:ln>
+        </p:spPr>
+        <p:txBody>
+          <a:bodyPr spcFirstLastPara="1" wrap="square" lIns="68575" tIns="34275" rIns="68575" bIns="34275" anchor="ctr" anchorCtr="0">
+            <a:noAutofit/>
+          </a:bodyPr>
+          <a:lstStyle/>
+          <a:p>
+            <a:pPr marL="0" marR="0" lvl="0" indent="0" algn="ctr" rtl="0">
+              <a:spcBef>
+                <a:spcPts val="0"/>
+              </a:spcBef>
+              <a:spcAft>
+                <a:spcPts val="0"/>
+              </a:spcAft>
+              <a:buNone/>
+            </a:pPr>
+            <a:endParaRPr sz="1400">
+              <a:solidFill>
+                <a:schemeClr val="lt1"/>
+              </a:solidFill>
+              <a:latin typeface="Arial"/>
+              <a:ea typeface="Arial"/>
+              <a:cs typeface="Arial"/>
+              <a:sym typeface="Arial"/>
+            </a:endParaRPr>
+          </a:p>
+        </p:txBody>
+      </p:sp>
+      <p:sp>
+        <p:nvSpPr>
+          <p:cNvPr id="193" name="Google Shape;193;p30"/>
+          <p:cNvSpPr/>
+          <p:nvPr/>
+        </p:nvSpPr>
+        <p:spPr>
+          <a:xfrm>
+            <a:off x="2858" y="0"/>
+            <a:ext cx="4158000" cy="162000"/>
+          </a:xfrm>
+          <a:prstGeom prst="rect">
+            <a:avLst/>
+          </a:prstGeom>
+          <a:solidFill>
+            <a:srgbClr val="FF0000"/>
+          </a:solidFill>
+          <a:ln>
+            <a:noFill/>
+          </a:ln>
+        </p:spPr>
+        <p:txBody>
+          <a:bodyPr spcFirstLastPara="1" wrap="square" lIns="68575" tIns="34275" rIns="68575" bIns="34275" anchor="ctr" anchorCtr="0">
+            <a:noAutofit/>
+          </a:bodyPr>
+          <a:lstStyle/>
+          <a:p>
+            <a:pPr marL="0" marR="0" lvl="0" indent="0" algn="ctr" rtl="0">
+              <a:spcBef>
+                <a:spcPts val="0"/>
+              </a:spcBef>
+              <a:spcAft>
+                <a:spcPts val="0"/>
+              </a:spcAft>
+              <a:buNone/>
+            </a:pPr>
+            <a:endParaRPr sz="1400">
+              <a:solidFill>
+                <a:schemeClr val="lt1"/>
+              </a:solidFill>
+              <a:latin typeface="Arial"/>
+              <a:ea typeface="Arial"/>
+              <a:cs typeface="Arial"/>
+              <a:sym typeface="Arial"/>
+            </a:endParaRPr>
+          </a:p>
+        </p:txBody>
+      </p:sp>
+      <p:sp>
+        <p:nvSpPr>
+          <p:cNvPr id="194" name="Google Shape;194;p30"/>
+          <p:cNvSpPr/>
+          <p:nvPr/>
+        </p:nvSpPr>
+        <p:spPr>
+          <a:xfrm>
+            <a:off x="4927108" y="4972928"/>
+            <a:ext cx="4239000" cy="162000"/>
+          </a:xfrm>
+          <a:prstGeom prst="rect">
+            <a:avLst/>
+          </a:prstGeom>
+          <a:solidFill>
+            <a:srgbClr val="341BF1"/>
+          </a:solidFill>
+          <a:ln>
+            <a:noFill/>
+          </a:ln>
+        </p:spPr>
+        <p:txBody>
+          <a:bodyPr spcFirstLastPara="1" wrap="square" lIns="68575" tIns="34275" rIns="68575" bIns="34275" anchor="ctr" anchorCtr="0">
+            <a:noAutofit/>
+          </a:bodyPr>
+          <a:lstStyle/>
+          <a:p>
+            <a:pPr marL="0" marR="0" lvl="0" indent="0" algn="ctr" rtl="0">
+              <a:spcBef>
+                <a:spcPts val="0"/>
+              </a:spcBef>
+              <a:spcAft>
+                <a:spcPts val="0"/>
+              </a:spcAft>
+              <a:buNone/>
+            </a:pPr>
+            <a:endParaRPr sz="1400">
+              <a:solidFill>
+                <a:schemeClr val="lt1"/>
+              </a:solidFill>
+              <a:latin typeface="Arial"/>
+              <a:ea typeface="Arial"/>
+              <a:cs typeface="Arial"/>
+              <a:sym typeface="Arial"/>
+            </a:endParaRPr>
+          </a:p>
+        </p:txBody>
+      </p:sp>
+      <p:sp>
+        <p:nvSpPr>
+          <p:cNvPr id="195" name="Google Shape;195;p30"/>
+          <p:cNvSpPr/>
+          <p:nvPr/>
+        </p:nvSpPr>
+        <p:spPr>
+          <a:xfrm>
+            <a:off x="-8853" y="4972928"/>
+            <a:ext cx="4941000" cy="162000"/>
+          </a:xfrm>
+          <a:prstGeom prst="rect">
+            <a:avLst/>
+          </a:prstGeom>
+          <a:solidFill>
+            <a:srgbClr val="FF0000"/>
+          </a:solidFill>
+          <a:ln>
+            <a:noFill/>
+          </a:ln>
+        </p:spPr>
+        <p:txBody>
+          <a:bodyPr spcFirstLastPara="1" wrap="square" lIns="68575" tIns="34275" rIns="68575" bIns="34275" anchor="ctr" anchorCtr="0">
+            <a:noAutofit/>
+          </a:bodyPr>
+          <a:lstStyle/>
+          <a:p>
+            <a:pPr marL="0" marR="0" lvl="0" indent="0" algn="ctr" rtl="0">
+              <a:spcBef>
+                <a:spcPts val="0"/>
+              </a:spcBef>
+              <a:spcAft>
+                <a:spcPts val="0"/>
+              </a:spcAft>
+              <a:buNone/>
+            </a:pPr>
+            <a:endParaRPr sz="1400">
+              <a:solidFill>
+                <a:schemeClr val="lt1"/>
+              </a:solidFill>
+              <a:latin typeface="Arial"/>
+              <a:ea typeface="Arial"/>
+              <a:cs typeface="Arial"/>
+              <a:sym typeface="Arial"/>
+            </a:endParaRPr>
+          </a:p>
+        </p:txBody>
+      </p:sp>
+      <p:sp>
+        <p:nvSpPr>
+          <p:cNvPr id="196" name="Google Shape;196;p30"/>
+          <p:cNvSpPr txBox="1"/>
+          <p:nvPr/>
+        </p:nvSpPr>
+        <p:spPr>
+          <a:xfrm>
+            <a:off x="-8850" y="164450"/>
+            <a:ext cx="5580900" cy="531000"/>
+          </a:xfrm>
+          <a:prstGeom prst="rect">
+            <a:avLst/>
+          </a:prstGeom>
+          <a:noFill/>
+          <a:ln>
+            <a:noFill/>
+          </a:ln>
+        </p:spPr>
+        <p:txBody>
+          <a:bodyPr spcFirstLastPara="1" wrap="square" lIns="68575" tIns="34275" rIns="68575" bIns="34275" anchor="t" anchorCtr="0">
+            <a:spAutoFit/>
+          </a:bodyPr>
+          <a:lstStyle/>
+          <a:p>
+            <a:pPr marL="0" marR="0" lvl="0" indent="0" algn="l" rtl="0">
+              <a:spcBef>
+                <a:spcPts val="0"/>
+              </a:spcBef>
+              <a:spcAft>
+                <a:spcPts val="0"/>
+              </a:spcAft>
+              <a:buNone/>
+            </a:pPr>
+            <a:r>
+              <a:rPr lang="en" sz="3000" b="1">
+                <a:solidFill>
+                  <a:schemeClr val="dk1"/>
+                </a:solidFill>
+                <a:latin typeface="Times New Roman"/>
+                <a:ea typeface="Times New Roman"/>
+                <a:cs typeface="Times New Roman"/>
+                <a:sym typeface="Times New Roman"/>
+              </a:rPr>
+              <a:t>Project Usecases &amp; Scope</a:t>
+            </a:r>
+            <a:endParaRPr sz="3000" b="1">
+              <a:solidFill>
+                <a:schemeClr val="dk1"/>
+              </a:solidFill>
+              <a:latin typeface="Times New Roman"/>
+              <a:ea typeface="Times New Roman"/>
+              <a:cs typeface="Times New Roman"/>
+              <a:sym typeface="Times New Roman"/>
+            </a:endParaRPr>
+          </a:p>
+        </p:txBody>
+      </p:sp>
+      <p:sp>
+        <p:nvSpPr>
+          <p:cNvPr id="197" name="Google Shape;197;p30"/>
+          <p:cNvSpPr txBox="1"/>
+          <p:nvPr/>
+        </p:nvSpPr>
+        <p:spPr>
+          <a:xfrm>
+            <a:off x="8803958" y="4921958"/>
+            <a:ext cx="339900" cy="284700"/>
+          </a:xfrm>
+          <a:prstGeom prst="rect">
+            <a:avLst/>
+          </a:prstGeom>
+          <a:noFill/>
+          <a:ln>
+            <a:noFill/>
+          </a:ln>
+        </p:spPr>
+        <p:txBody>
+          <a:bodyPr spcFirstLastPara="1" wrap="square" lIns="68575" tIns="34275" rIns="68575" bIns="34275" anchor="t" anchorCtr="0">
+            <a:spAutoFit/>
+          </a:bodyPr>
+          <a:lstStyle/>
+          <a:p>
+            <a:pPr marL="0" marR="0" lvl="0" indent="0" algn="l" rtl="0">
+              <a:spcBef>
+                <a:spcPts val="0"/>
+              </a:spcBef>
+              <a:spcAft>
+                <a:spcPts val="0"/>
+              </a:spcAft>
+              <a:buNone/>
+            </a:pPr>
+            <a:r>
+              <a:rPr lang="en">
+                <a:solidFill>
+                  <a:schemeClr val="lt1"/>
+                </a:solidFill>
+              </a:rPr>
+              <a:t>5</a:t>
+            </a:r>
+            <a:endParaRPr sz="1400">
+              <a:solidFill>
+                <a:schemeClr val="lt1"/>
+              </a:solidFill>
+              <a:latin typeface="Arial"/>
+              <a:ea typeface="Arial"/>
+              <a:cs typeface="Arial"/>
+              <a:sym typeface="Arial"/>
+            </a:endParaRPr>
+          </a:p>
+        </p:txBody>
+      </p:sp>
+      <p:sp>
+        <p:nvSpPr>
+          <p:cNvPr id="5" name="Rectangle 1">
+            <a:extLst>
+              <a:ext uri="{FF2B5EF4-FFF2-40B4-BE49-F238E27FC236}">
+                <a16:creationId xmlns:a16="http://schemas.microsoft.com/office/drawing/2014/main" id="{1F7DD073-9124-4D25-8DB4-5770E4D6DD83}"/>
+              </a:ext>
+            </a:extLst>
+          </p:cNvPr>
+          <p:cNvSpPr txBox="1">
+            <a:spLocks noChangeArrowheads="1"/>
+          </p:cNvSpPr>
+          <p:nvPr/>
+        </p:nvSpPr>
+        <p:spPr bwMode="auto">
+          <a:xfrm>
+            <a:off x="628650" y="1060252"/>
+            <a:ext cx="7791450" cy="3693319"/>
+          </a:xfrm>
+          <a:prstGeom prst="rect">
+            <a:avLst/>
+          </a:prstGeom>
+          <a:noFill/>
+          <a:ln>
+            <a:noFill/>
+          </a:ln>
+          <a:effectLst/>
+          <a:extLst>
+            <a:ext uri="{909E8E84-426E-40DD-AFC4-6F175D3DCCD1}">
+              <a14:hiddenFill xmlns:a14="http://schemas.microsoft.com/office/drawing/2010/main">
+                <a:solidFill>
+                  <a:schemeClr val="accent1"/>
+                </a:solidFill>
+              </a14:hiddenFill>
+            </a:ext>
+            <a:ext uri="{91240B29-F687-4F45-9708-019B960494DF}">
+              <a14:hiddenLine xmlns:a14="http://schemas.microsoft.com/office/drawing/2010/main" w="9525">
+                <a:solidFill>
+                  <a:schemeClr val="tx1"/>
+                </a:solidFill>
+                <a:miter lim="800000"/>
+                <a:headEnd/>
+                <a:tailEnd/>
+              </a14:hiddenLine>
+            </a:ext>
+            <a:ext uri="{AF507438-7753-43E0-B8FC-AC1667EBCBE1}">
+              <a14:hiddenEffects xmlns:a14="http://schemas.microsoft.com/office/drawing/2010/main">
+                <a:effectLst>
+                  <a:outerShdw dist="35921" dir="2700000" algn="ctr" rotWithShape="0">
+                    <a:schemeClr val="bg2"/>
+                  </a:outerShdw>
+                </a:effectLst>
+              </a14:hiddenEffects>
+            </a:ext>
+          </a:extLst>
+        </p:spPr>
+        <p:txBody>
+          <a:bodyPr vert="horz" wrap="square" lIns="91440" tIns="45720" rIns="91440" bIns="45720" numCol="1" anchor="ctr" anchorCtr="0" compatLnSpc="1">
+            <a:prstTxWarp prst="textNoShape">
+              <a:avLst/>
+            </a:prstTxWarp>
+            <a:spAutoFit/>
+          </a:bodyPr>
+          <a:lstStyle>
+            <a:defPPr marR="0" lvl="0" algn="l" rtl="0">
+              <a:lnSpc>
+                <a:spcPct val="100000"/>
+              </a:lnSpc>
+              <a:spcBef>
+                <a:spcPts val="0"/>
+              </a:spcBef>
+              <a:spcAft>
+                <a:spcPts val="0"/>
+              </a:spcAft>
+            </a:defPPr>
+            <a:lvl1pPr marR="0" lvl="0" algn="l" rtl="0">
+              <a:lnSpc>
+                <a:spcPct val="100000"/>
+              </a:lnSpc>
+              <a:spcBef>
+                <a:spcPts val="0"/>
+              </a:spcBef>
+              <a:spcAft>
+                <a:spcPts val="0"/>
+              </a:spcAft>
+              <a:buClr>
+                <a:srgbClr val="000000"/>
+              </a:buClr>
+              <a:buFont typeface="Arial"/>
+              <a:defRPr sz="1400" b="0" i="0" u="none" strike="noStrike" cap="none">
+                <a:solidFill>
+                  <a:srgbClr val="000000"/>
+                </a:solidFill>
+                <a:latin typeface="Arial"/>
+                <a:ea typeface="Arial"/>
+                <a:cs typeface="Arial"/>
+                <a:sym typeface="Arial"/>
+              </a:defRPr>
+            </a:lvl1pPr>
+            <a:lvl2pPr marR="0" lvl="1" algn="l" rtl="0">
+              <a:lnSpc>
+                <a:spcPct val="100000"/>
+              </a:lnSpc>
+              <a:spcBef>
+                <a:spcPts val="0"/>
+              </a:spcBef>
+              <a:spcAft>
+                <a:spcPts val="0"/>
+              </a:spcAft>
+              <a:buClr>
+                <a:srgbClr val="000000"/>
+              </a:buClr>
+              <a:buFont typeface="Arial"/>
+              <a:defRPr sz="1400" b="0" i="0" u="none" strike="noStrike" cap="none">
+                <a:solidFill>
+                  <a:srgbClr val="000000"/>
+                </a:solidFill>
+                <a:latin typeface="Arial"/>
+                <a:ea typeface="Arial"/>
+                <a:cs typeface="Arial"/>
+                <a:sym typeface="Arial"/>
+              </a:defRPr>
+            </a:lvl2pPr>
+            <a:lvl3pPr marR="0" lvl="2" algn="l" rtl="0">
+              <a:lnSpc>
+                <a:spcPct val="100000"/>
+              </a:lnSpc>
+              <a:spcBef>
+                <a:spcPts val="0"/>
+              </a:spcBef>
+              <a:spcAft>
+                <a:spcPts val="0"/>
+              </a:spcAft>
+              <a:buClr>
+                <a:srgbClr val="000000"/>
+              </a:buClr>
+              <a:buFont typeface="Arial"/>
+              <a:defRPr sz="1400" b="0" i="0" u="none" strike="noStrike" cap="none">
+                <a:solidFill>
+                  <a:srgbClr val="000000"/>
+                </a:solidFill>
+                <a:latin typeface="Arial"/>
+                <a:ea typeface="Arial"/>
+                <a:cs typeface="Arial"/>
+                <a:sym typeface="Arial"/>
+              </a:defRPr>
+            </a:lvl3pPr>
+            <a:lvl4pPr marR="0" lvl="3" algn="l" rtl="0">
+              <a:lnSpc>
+                <a:spcPct val="100000"/>
+              </a:lnSpc>
+              <a:spcBef>
+                <a:spcPts val="0"/>
+              </a:spcBef>
+              <a:spcAft>
+                <a:spcPts val="0"/>
+              </a:spcAft>
+              <a:buClr>
+                <a:srgbClr val="000000"/>
+              </a:buClr>
+              <a:buFont typeface="Arial"/>
+              <a:defRPr sz="1400" b="0" i="0" u="none" strike="noStrike" cap="none">
+                <a:solidFill>
+                  <a:srgbClr val="000000"/>
+                </a:solidFill>
+                <a:latin typeface="Arial"/>
+                <a:ea typeface="Arial"/>
+                <a:cs typeface="Arial"/>
+                <a:sym typeface="Arial"/>
+              </a:defRPr>
+            </a:lvl4pPr>
+            <a:lvl5pPr marR="0" lvl="4" algn="l" rtl="0">
+              <a:lnSpc>
+                <a:spcPct val="100000"/>
+              </a:lnSpc>
+              <a:spcBef>
+                <a:spcPts val="0"/>
+              </a:spcBef>
+              <a:spcAft>
+                <a:spcPts val="0"/>
+              </a:spcAft>
+              <a:buClr>
+                <a:srgbClr val="000000"/>
+              </a:buClr>
+              <a:buFont typeface="Arial"/>
+              <a:defRPr sz="1400" b="0" i="0" u="none" strike="noStrike" cap="none">
+                <a:solidFill>
+                  <a:srgbClr val="000000"/>
+                </a:solidFill>
+                <a:latin typeface="Arial"/>
+                <a:ea typeface="Arial"/>
+                <a:cs typeface="Arial"/>
+                <a:sym typeface="Arial"/>
+              </a:defRPr>
+            </a:lvl5pPr>
+            <a:lvl6pPr marR="0" lvl="5" algn="l" rtl="0">
+              <a:lnSpc>
+                <a:spcPct val="100000"/>
+              </a:lnSpc>
+              <a:spcBef>
+                <a:spcPts val="0"/>
+              </a:spcBef>
+              <a:spcAft>
+                <a:spcPts val="0"/>
+              </a:spcAft>
+              <a:buClr>
+                <a:srgbClr val="000000"/>
+              </a:buClr>
+              <a:buFont typeface="Arial"/>
+              <a:defRPr sz="1400" b="0" i="0" u="none" strike="noStrike" cap="none">
+                <a:solidFill>
+                  <a:srgbClr val="000000"/>
+                </a:solidFill>
+                <a:latin typeface="Arial"/>
+                <a:ea typeface="Arial"/>
+                <a:cs typeface="Arial"/>
+                <a:sym typeface="Arial"/>
+              </a:defRPr>
+            </a:lvl6pPr>
+            <a:lvl7pPr marR="0" lvl="6" algn="l" rtl="0">
+              <a:lnSpc>
+                <a:spcPct val="100000"/>
+              </a:lnSpc>
+              <a:spcBef>
+                <a:spcPts val="0"/>
+              </a:spcBef>
+              <a:spcAft>
+                <a:spcPts val="0"/>
+              </a:spcAft>
+              <a:buClr>
+                <a:srgbClr val="000000"/>
+              </a:buClr>
+              <a:buFont typeface="Arial"/>
+              <a:defRPr sz="1400" b="0" i="0" u="none" strike="noStrike" cap="none">
+                <a:solidFill>
+                  <a:srgbClr val="000000"/>
+                </a:solidFill>
+                <a:latin typeface="Arial"/>
+                <a:ea typeface="Arial"/>
+                <a:cs typeface="Arial"/>
+                <a:sym typeface="Arial"/>
+              </a:defRPr>
+            </a:lvl7pPr>
+            <a:lvl8pPr marR="0" lvl="7" algn="l" rtl="0">
+              <a:lnSpc>
+                <a:spcPct val="100000"/>
+              </a:lnSpc>
+              <a:spcBef>
+                <a:spcPts val="0"/>
+              </a:spcBef>
+              <a:spcAft>
+                <a:spcPts val="0"/>
+              </a:spcAft>
+              <a:buClr>
+                <a:srgbClr val="000000"/>
+              </a:buClr>
+              <a:buFont typeface="Arial"/>
+              <a:defRPr sz="1400" b="0" i="0" u="none" strike="noStrike" cap="none">
+                <a:solidFill>
+                  <a:srgbClr val="000000"/>
+                </a:solidFill>
+                <a:latin typeface="Arial"/>
+                <a:ea typeface="Arial"/>
+                <a:cs typeface="Arial"/>
+                <a:sym typeface="Arial"/>
+              </a:defRPr>
+            </a:lvl8pPr>
+            <a:lvl9pPr marR="0" lvl="8" algn="l" rtl="0">
+              <a:lnSpc>
+                <a:spcPct val="100000"/>
+              </a:lnSpc>
+              <a:spcBef>
+                <a:spcPts val="0"/>
+              </a:spcBef>
+              <a:spcAft>
+                <a:spcPts val="0"/>
+              </a:spcAft>
+              <a:buClr>
+                <a:srgbClr val="000000"/>
+              </a:buClr>
+              <a:buFont typeface="Arial"/>
+              <a:defRPr sz="1400" b="0" i="0" u="none" strike="noStrike" cap="none">
+                <a:solidFill>
+                  <a:srgbClr val="000000"/>
+                </a:solidFill>
+                <a:latin typeface="Arial"/>
+                <a:ea typeface="Arial"/>
+                <a:cs typeface="Arial"/>
+                <a:sym typeface="Arial"/>
+              </a:defRPr>
+            </a:lvl9pPr>
+          </a:lstStyle>
+          <a:p>
+            <a:pPr eaLnBrk="0" fontAlgn="base" hangingPunct="0">
+              <a:spcBef>
+                <a:spcPct val="0"/>
+              </a:spcBef>
+              <a:spcAft>
+                <a:spcPct val="0"/>
+              </a:spcAft>
+              <a:buClrTx/>
+              <a:buFontTx/>
+              <a:buChar char="•"/>
+            </a:pPr>
+            <a:r>
+              <a:rPr lang="en-US" altLang="en-US" sz="1800" b="1" dirty="0">
+                <a:solidFill>
+                  <a:schemeClr val="tx1"/>
+                </a:solidFill>
+                <a:latin typeface="Arial" panose="020B0604020202020204" pitchFamily="34" charset="0"/>
+              </a:rPr>
+              <a:t>Target Audience / Use-cases:</a:t>
+            </a:r>
+            <a:endParaRPr lang="en-US" altLang="en-US" sz="1800" dirty="0">
+              <a:solidFill>
+                <a:schemeClr val="tx1"/>
+              </a:solidFill>
+              <a:latin typeface="Arial" panose="020B0604020202020204" pitchFamily="34" charset="0"/>
+            </a:endParaRPr>
+          </a:p>
+          <a:p>
+            <a:pPr eaLnBrk="0" fontAlgn="base" hangingPunct="0">
+              <a:spcBef>
+                <a:spcPct val="0"/>
+              </a:spcBef>
+              <a:spcAft>
+                <a:spcPct val="0"/>
+              </a:spcAft>
+              <a:buClrTx/>
+              <a:buFontTx/>
+              <a:buChar char="•"/>
+            </a:pPr>
+            <a:r>
+              <a:rPr lang="en-US" altLang="en-US" sz="1800" b="1" dirty="0">
+                <a:solidFill>
+                  <a:schemeClr val="tx1"/>
+                </a:solidFill>
+                <a:latin typeface="Arial" panose="020B0604020202020204" pitchFamily="34" charset="0"/>
+              </a:rPr>
+              <a:t>University Counselors:</a:t>
+            </a:r>
+            <a:r>
+              <a:rPr lang="en-US" altLang="en-US" sz="1800" dirty="0">
+                <a:solidFill>
+                  <a:schemeClr val="tx1"/>
+                </a:solidFill>
+                <a:latin typeface="Arial" panose="020B0604020202020204" pitchFamily="34" charset="0"/>
+              </a:rPr>
+              <a:t> To identify "High Risk" students who need immediate intervention.</a:t>
+            </a:r>
+          </a:p>
+          <a:p>
+            <a:pPr eaLnBrk="0" fontAlgn="base" hangingPunct="0">
+              <a:spcBef>
+                <a:spcPct val="0"/>
+              </a:spcBef>
+              <a:spcAft>
+                <a:spcPct val="0"/>
+              </a:spcAft>
+              <a:buClrTx/>
+              <a:buFontTx/>
+              <a:buChar char="•"/>
+            </a:pPr>
+            <a:r>
+              <a:rPr lang="en-US" altLang="en-US" sz="1800" b="1" dirty="0">
+                <a:solidFill>
+                  <a:schemeClr val="tx1"/>
+                </a:solidFill>
+                <a:latin typeface="Arial" panose="020B0604020202020204" pitchFamily="34" charset="0"/>
+              </a:rPr>
+              <a:t>Administrators:</a:t>
+            </a:r>
+            <a:r>
+              <a:rPr lang="en-US" altLang="en-US" sz="1800" dirty="0">
+                <a:solidFill>
+                  <a:schemeClr val="tx1"/>
+                </a:solidFill>
+                <a:latin typeface="Arial" panose="020B0604020202020204" pitchFamily="34" charset="0"/>
+              </a:rPr>
+              <a:t> To track semester-wide stress trends against exam schedules.</a:t>
+            </a:r>
+          </a:p>
+          <a:p>
+            <a:pPr eaLnBrk="0" fontAlgn="base" hangingPunct="0">
+              <a:spcBef>
+                <a:spcPct val="0"/>
+              </a:spcBef>
+              <a:spcAft>
+                <a:spcPct val="0"/>
+              </a:spcAft>
+              <a:buClrTx/>
+              <a:buFontTx/>
+              <a:buChar char="•"/>
+            </a:pPr>
+            <a:r>
+              <a:rPr lang="en-US" altLang="en-US" sz="1800" b="1" dirty="0">
+                <a:solidFill>
+                  <a:schemeClr val="tx1"/>
+                </a:solidFill>
+                <a:latin typeface="Arial" panose="020B0604020202020204" pitchFamily="34" charset="0"/>
+              </a:rPr>
+              <a:t>Researchers:</a:t>
+            </a:r>
+            <a:r>
+              <a:rPr lang="en-US" altLang="en-US" sz="1800" dirty="0">
+                <a:solidFill>
+                  <a:schemeClr val="tx1"/>
+                </a:solidFill>
+                <a:latin typeface="Arial" panose="020B0604020202020204" pitchFamily="34" charset="0"/>
+              </a:rPr>
+              <a:t> To correlate lifestyle habits (sleep vs. study) with mental health outcomes.</a:t>
+            </a:r>
+          </a:p>
+          <a:p>
+            <a:pPr eaLnBrk="0" fontAlgn="base" hangingPunct="0">
+              <a:spcBef>
+                <a:spcPct val="0"/>
+              </a:spcBef>
+              <a:spcAft>
+                <a:spcPct val="0"/>
+              </a:spcAft>
+              <a:buClrTx/>
+              <a:buFontTx/>
+              <a:buChar char="•"/>
+            </a:pPr>
+            <a:r>
+              <a:rPr lang="en-US" altLang="en-US" sz="1800" b="1" dirty="0">
+                <a:solidFill>
+                  <a:schemeClr val="tx1"/>
+                </a:solidFill>
+                <a:latin typeface="Arial" panose="020B0604020202020204" pitchFamily="34" charset="0"/>
+              </a:rPr>
+              <a:t>Project Scope:</a:t>
+            </a:r>
+            <a:endParaRPr lang="en-US" altLang="en-US" sz="1800" dirty="0">
+              <a:solidFill>
+                <a:schemeClr val="tx1"/>
+              </a:solidFill>
+              <a:latin typeface="Arial" panose="020B0604020202020204" pitchFamily="34" charset="0"/>
+            </a:endParaRPr>
+          </a:p>
+          <a:p>
+            <a:pPr eaLnBrk="0" fontAlgn="base" hangingPunct="0">
+              <a:spcBef>
+                <a:spcPct val="0"/>
+              </a:spcBef>
+              <a:spcAft>
+                <a:spcPct val="0"/>
+              </a:spcAft>
+              <a:buClrTx/>
+              <a:buFontTx/>
+              <a:buChar char="•"/>
+            </a:pPr>
+            <a:r>
+              <a:rPr lang="en-US" altLang="en-US" sz="1800" b="1" dirty="0">
+                <a:solidFill>
+                  <a:schemeClr val="tx1"/>
+                </a:solidFill>
+                <a:latin typeface="Arial" panose="020B0604020202020204" pitchFamily="34" charset="0"/>
+              </a:rPr>
+              <a:t>In-Scope:</a:t>
+            </a:r>
+            <a:r>
+              <a:rPr lang="en-US" altLang="en-US" sz="1800" dirty="0">
+                <a:solidFill>
+                  <a:schemeClr val="tx1"/>
+                </a:solidFill>
+                <a:latin typeface="Arial" panose="020B0604020202020204" pitchFamily="34" charset="0"/>
+              </a:rPr>
+              <a:t> Web interface, Data cleaning, Burnout Algorithm, Sentiment Analysis, Visualization.</a:t>
+            </a:r>
+          </a:p>
+          <a:p>
+            <a:pPr eaLnBrk="0" fontAlgn="base" hangingPunct="0">
+              <a:spcBef>
+                <a:spcPct val="0"/>
+              </a:spcBef>
+              <a:spcAft>
+                <a:spcPct val="0"/>
+              </a:spcAft>
+              <a:buClrTx/>
+              <a:buFontTx/>
+              <a:buChar char="•"/>
+            </a:pPr>
+            <a:r>
+              <a:rPr lang="en-US" altLang="en-US" sz="1800" b="1" dirty="0">
+                <a:solidFill>
+                  <a:schemeClr val="tx1"/>
+                </a:solidFill>
+                <a:latin typeface="Arial" panose="020B0604020202020204" pitchFamily="34" charset="0"/>
+              </a:rPr>
+              <a:t>Out-of-Scope:</a:t>
+            </a:r>
+            <a:r>
+              <a:rPr lang="en-US" altLang="en-US" sz="1800" dirty="0">
+                <a:solidFill>
+                  <a:schemeClr val="tx1"/>
+                </a:solidFill>
+                <a:latin typeface="Arial" panose="020B0604020202020204" pitchFamily="34" charset="0"/>
+              </a:rPr>
+              <a:t> Medical diagnosis, mobile app version, integration with live biometric sensors.</a:t>
+            </a:r>
+          </a:p>
+          <a:p>
+            <a:pPr eaLnBrk="0" fontAlgn="base" hangingPunct="0">
+              <a:spcBef>
+                <a:spcPct val="0"/>
+              </a:spcBef>
+              <a:spcAft>
+                <a:spcPct val="0"/>
+              </a:spcAft>
+              <a:buClrTx/>
+              <a:buFontTx/>
+              <a:buNone/>
+            </a:pPr>
+            <a:endParaRPr lang="en-US" altLang="en-US" sz="1800" dirty="0">
+              <a:solidFill>
+                <a:schemeClr val="tx1"/>
+              </a:solidFill>
+              <a:latin typeface="Arial" panose="020B0604020202020204" pitchFamily="34" charset="0"/>
+            </a:endParaRPr>
+          </a:p>
+        </p:txBody>
+      </p:sp>
+    </p:spTree>
+  </p:cSld>
+  <p:clrMapOvr>
+    <a:masterClrMapping/>
+  </p:clrMapOvr>
+</p:sld>
+</file>
+
+<file path=ppt/slides/slide16.xml><?xml version="1.0" encoding="utf-8"?>
+<p:sld xmlns:a="http://schemas.openxmlformats.org/drawingml/2006/main" xmlns:r="http://schemas.openxmlformats.org/officeDocument/2006/relationships" xmlns:p="http://schemas.openxmlformats.org/presentationml/2006/main">
+  <p:cSld>
+    <p:spTree>
+      <p:nvGrpSpPr>
+        <p:cNvPr id="1" name="Shape 239"/>
+        <p:cNvGrpSpPr/>
+        <p:nvPr/>
+      </p:nvGrpSpPr>
+      <p:grpSpPr>
+        <a:xfrm>
+          <a:off x="0" y="0"/>
+          <a:ext cx="0" cy="0"/>
+          <a:chOff x="0" y="0"/>
+          <a:chExt cx="0" cy="0"/>
+        </a:xfrm>
+      </p:grpSpPr>
+      <p:sp>
+        <p:nvSpPr>
+          <p:cNvPr id="240" name="Google Shape;240;p34"/>
+          <p:cNvSpPr/>
+          <p:nvPr/>
+        </p:nvSpPr>
+        <p:spPr>
+          <a:xfrm>
+            <a:off x="-275" y="162000"/>
+            <a:ext cx="9153000" cy="588000"/>
+          </a:xfrm>
+          <a:prstGeom prst="rect">
+            <a:avLst/>
+          </a:prstGeom>
+          <a:solidFill>
+            <a:srgbClr val="D9E5F8"/>
+          </a:solidFill>
+          <a:ln>
+            <a:noFill/>
+          </a:ln>
+        </p:spPr>
+        <p:txBody>
+          <a:bodyPr spcFirstLastPara="1" wrap="square" lIns="68575" tIns="34275" rIns="68575" bIns="34275" anchor="ctr" anchorCtr="0">
+            <a:noAutofit/>
+          </a:bodyPr>
+          <a:lstStyle/>
+          <a:p>
+            <a:pPr marL="0" marR="0" lvl="0" indent="0" algn="ctr" rtl="0">
+              <a:spcBef>
+                <a:spcPts val="0"/>
+              </a:spcBef>
+              <a:spcAft>
+                <a:spcPts val="0"/>
+              </a:spcAft>
+              <a:buNone/>
+            </a:pPr>
+            <a:endParaRPr sz="1400">
+              <a:solidFill>
+                <a:schemeClr val="lt1"/>
+              </a:solidFill>
+              <a:latin typeface="Arial"/>
+              <a:ea typeface="Arial"/>
+              <a:cs typeface="Arial"/>
+              <a:sym typeface="Arial"/>
+            </a:endParaRPr>
+          </a:p>
+        </p:txBody>
+      </p:sp>
+      <p:sp>
+        <p:nvSpPr>
+          <p:cNvPr id="241" name="Google Shape;241;p34"/>
+          <p:cNvSpPr/>
+          <p:nvPr/>
+        </p:nvSpPr>
+        <p:spPr>
+          <a:xfrm>
+            <a:off x="4160520" y="0"/>
+            <a:ext cx="4995000" cy="162000"/>
+          </a:xfrm>
+          <a:prstGeom prst="rect">
+            <a:avLst/>
+          </a:prstGeom>
+          <a:solidFill>
+            <a:srgbClr val="341BF1"/>
+          </a:solidFill>
+          <a:ln>
+            <a:noFill/>
+          </a:ln>
+        </p:spPr>
+        <p:txBody>
+          <a:bodyPr spcFirstLastPara="1" wrap="square" lIns="68575" tIns="34275" rIns="68575" bIns="34275" anchor="ctr" anchorCtr="0">
+            <a:noAutofit/>
+          </a:bodyPr>
+          <a:lstStyle/>
+          <a:p>
+            <a:pPr marL="0" marR="0" lvl="0" indent="0" algn="ctr" rtl="0">
+              <a:spcBef>
+                <a:spcPts val="0"/>
+              </a:spcBef>
+              <a:spcAft>
+                <a:spcPts val="0"/>
+              </a:spcAft>
+              <a:buNone/>
+            </a:pPr>
+            <a:endParaRPr sz="1400">
+              <a:solidFill>
+                <a:schemeClr val="lt1"/>
+              </a:solidFill>
+              <a:latin typeface="Arial"/>
+              <a:ea typeface="Arial"/>
+              <a:cs typeface="Arial"/>
+              <a:sym typeface="Arial"/>
+            </a:endParaRPr>
+          </a:p>
+        </p:txBody>
+      </p:sp>
+      <p:sp>
+        <p:nvSpPr>
+          <p:cNvPr id="242" name="Google Shape;242;p34"/>
+          <p:cNvSpPr/>
+          <p:nvPr/>
+        </p:nvSpPr>
+        <p:spPr>
+          <a:xfrm>
+            <a:off x="2858" y="0"/>
+            <a:ext cx="4158000" cy="162000"/>
+          </a:xfrm>
+          <a:prstGeom prst="rect">
+            <a:avLst/>
+          </a:prstGeom>
+          <a:solidFill>
+            <a:srgbClr val="FF0000"/>
+          </a:solidFill>
+          <a:ln>
+            <a:noFill/>
+          </a:ln>
+        </p:spPr>
+        <p:txBody>
+          <a:bodyPr spcFirstLastPara="1" wrap="square" lIns="68575" tIns="34275" rIns="68575" bIns="34275" anchor="ctr" anchorCtr="0">
+            <a:noAutofit/>
+          </a:bodyPr>
+          <a:lstStyle/>
+          <a:p>
+            <a:pPr marL="0" marR="0" lvl="0" indent="0" algn="ctr" rtl="0">
+              <a:spcBef>
+                <a:spcPts val="0"/>
+              </a:spcBef>
+              <a:spcAft>
+                <a:spcPts val="0"/>
+              </a:spcAft>
+              <a:buNone/>
+            </a:pPr>
+            <a:endParaRPr sz="1400">
+              <a:solidFill>
+                <a:schemeClr val="lt1"/>
+              </a:solidFill>
+              <a:latin typeface="Arial"/>
+              <a:ea typeface="Arial"/>
+              <a:cs typeface="Arial"/>
+              <a:sym typeface="Arial"/>
+            </a:endParaRPr>
+          </a:p>
+        </p:txBody>
+      </p:sp>
+      <p:sp>
+        <p:nvSpPr>
+          <p:cNvPr id="243" name="Google Shape;243;p34"/>
+          <p:cNvSpPr/>
+          <p:nvPr/>
+        </p:nvSpPr>
+        <p:spPr>
+          <a:xfrm>
+            <a:off x="4927108" y="4972928"/>
+            <a:ext cx="4239000" cy="162000"/>
+          </a:xfrm>
+          <a:prstGeom prst="rect">
+            <a:avLst/>
+          </a:prstGeom>
+          <a:solidFill>
+            <a:srgbClr val="341BF1"/>
+          </a:solidFill>
+          <a:ln>
+            <a:noFill/>
+          </a:ln>
+        </p:spPr>
+        <p:txBody>
+          <a:bodyPr spcFirstLastPara="1" wrap="square" lIns="68575" tIns="34275" rIns="68575" bIns="34275" anchor="ctr" anchorCtr="0">
+            <a:noAutofit/>
+          </a:bodyPr>
+          <a:lstStyle/>
+          <a:p>
+            <a:pPr marL="0" marR="0" lvl="0" indent="0" algn="ctr" rtl="0">
+              <a:spcBef>
+                <a:spcPts val="0"/>
+              </a:spcBef>
+              <a:spcAft>
+                <a:spcPts val="0"/>
+              </a:spcAft>
+              <a:buNone/>
+            </a:pPr>
+            <a:endParaRPr sz="1400">
+              <a:solidFill>
+                <a:schemeClr val="lt1"/>
+              </a:solidFill>
+              <a:latin typeface="Arial"/>
+              <a:ea typeface="Arial"/>
+              <a:cs typeface="Arial"/>
+              <a:sym typeface="Arial"/>
+            </a:endParaRPr>
+          </a:p>
+        </p:txBody>
+      </p:sp>
+      <p:sp>
+        <p:nvSpPr>
+          <p:cNvPr id="244" name="Google Shape;244;p34"/>
+          <p:cNvSpPr/>
+          <p:nvPr/>
+        </p:nvSpPr>
+        <p:spPr>
+          <a:xfrm>
+            <a:off x="-8853" y="4972928"/>
+            <a:ext cx="4941000" cy="162000"/>
+          </a:xfrm>
+          <a:prstGeom prst="rect">
+            <a:avLst/>
+          </a:prstGeom>
+          <a:solidFill>
+            <a:srgbClr val="FF0000"/>
+          </a:solidFill>
+          <a:ln>
+            <a:noFill/>
+          </a:ln>
+        </p:spPr>
+        <p:txBody>
+          <a:bodyPr spcFirstLastPara="1" wrap="square" lIns="68575" tIns="34275" rIns="68575" bIns="34275" anchor="ctr" anchorCtr="0">
+            <a:noAutofit/>
+          </a:bodyPr>
+          <a:lstStyle/>
+          <a:p>
+            <a:pPr marL="0" marR="0" lvl="0" indent="0" algn="ctr" rtl="0">
+              <a:spcBef>
+                <a:spcPts val="0"/>
+              </a:spcBef>
+              <a:spcAft>
+                <a:spcPts val="0"/>
+              </a:spcAft>
+              <a:buNone/>
+            </a:pPr>
+            <a:endParaRPr sz="1400">
+              <a:solidFill>
+                <a:schemeClr val="lt1"/>
+              </a:solidFill>
+              <a:latin typeface="Arial"/>
+              <a:ea typeface="Arial"/>
+              <a:cs typeface="Arial"/>
+              <a:sym typeface="Arial"/>
+            </a:endParaRPr>
+          </a:p>
+        </p:txBody>
+      </p:sp>
+      <p:sp>
+        <p:nvSpPr>
+          <p:cNvPr id="245" name="Google Shape;245;p34"/>
+          <p:cNvSpPr txBox="1"/>
+          <p:nvPr/>
+        </p:nvSpPr>
+        <p:spPr>
+          <a:xfrm>
+            <a:off x="-8850" y="164450"/>
+            <a:ext cx="9144000" cy="531000"/>
+          </a:xfrm>
+          <a:prstGeom prst="rect">
+            <a:avLst/>
+          </a:prstGeom>
+          <a:noFill/>
+          <a:ln>
+            <a:noFill/>
+          </a:ln>
+        </p:spPr>
+        <p:txBody>
+          <a:bodyPr spcFirstLastPara="1" wrap="square" lIns="68575" tIns="34275" rIns="68575" bIns="34275" anchor="t" anchorCtr="0">
+            <a:spAutoFit/>
+          </a:bodyPr>
+          <a:lstStyle/>
+          <a:p>
+            <a:pPr marL="0" marR="0" lvl="0" indent="0" algn="l" rtl="0">
+              <a:spcBef>
+                <a:spcPts val="0"/>
+              </a:spcBef>
+              <a:spcAft>
+                <a:spcPts val="0"/>
+              </a:spcAft>
+              <a:buNone/>
+            </a:pPr>
+            <a:r>
+              <a:rPr lang="en" sz="3000" b="1">
+                <a:solidFill>
+                  <a:schemeClr val="dk1"/>
+                </a:solidFill>
+                <a:latin typeface="Times New Roman"/>
+                <a:ea typeface="Times New Roman"/>
+                <a:cs typeface="Times New Roman"/>
+                <a:sym typeface="Times New Roman"/>
+              </a:rPr>
+              <a:t>Expected Results &amp; Impact</a:t>
+            </a:r>
+            <a:endParaRPr sz="3000" b="1">
+              <a:solidFill>
+                <a:schemeClr val="dk1"/>
+              </a:solidFill>
+              <a:latin typeface="Times New Roman"/>
+              <a:ea typeface="Times New Roman"/>
+              <a:cs typeface="Times New Roman"/>
+              <a:sym typeface="Times New Roman"/>
+            </a:endParaRPr>
+          </a:p>
+        </p:txBody>
+      </p:sp>
+      <p:sp>
+        <p:nvSpPr>
+          <p:cNvPr id="246" name="Google Shape;246;p34"/>
+          <p:cNvSpPr txBox="1"/>
+          <p:nvPr/>
+        </p:nvSpPr>
+        <p:spPr>
+          <a:xfrm>
+            <a:off x="8803958" y="4921958"/>
+            <a:ext cx="339900" cy="284700"/>
+          </a:xfrm>
+          <a:prstGeom prst="rect">
+            <a:avLst/>
+          </a:prstGeom>
+          <a:noFill/>
+          <a:ln>
+            <a:noFill/>
+          </a:ln>
+        </p:spPr>
+        <p:txBody>
+          <a:bodyPr spcFirstLastPara="1" wrap="square" lIns="68575" tIns="34275" rIns="68575" bIns="34275" anchor="t" anchorCtr="0">
+            <a:spAutoFit/>
+          </a:bodyPr>
+          <a:lstStyle/>
+          <a:p>
+            <a:pPr marL="0" marR="0" lvl="0" indent="0" algn="l" rtl="0">
+              <a:spcBef>
+                <a:spcPts val="0"/>
+              </a:spcBef>
+              <a:spcAft>
+                <a:spcPts val="0"/>
+              </a:spcAft>
+              <a:buNone/>
+            </a:pPr>
+            <a:r>
+              <a:rPr lang="en">
+                <a:solidFill>
+                  <a:schemeClr val="lt1"/>
+                </a:solidFill>
+              </a:rPr>
+              <a:t>9</a:t>
+            </a:r>
+            <a:endParaRPr sz="1400">
+              <a:solidFill>
+                <a:schemeClr val="lt1"/>
+              </a:solidFill>
+              <a:latin typeface="Arial"/>
+              <a:ea typeface="Arial"/>
+              <a:cs typeface="Arial"/>
+              <a:sym typeface="Arial"/>
+            </a:endParaRPr>
+          </a:p>
+        </p:txBody>
+      </p:sp>
+      <p:sp>
+        <p:nvSpPr>
+          <p:cNvPr id="5" name="Rectangle 1">
+            <a:extLst>
+              <a:ext uri="{FF2B5EF4-FFF2-40B4-BE49-F238E27FC236}">
+                <a16:creationId xmlns:a16="http://schemas.microsoft.com/office/drawing/2014/main" id="{02831BFC-C5EF-AFC2-2165-67C1E8B73D0D}"/>
+              </a:ext>
+            </a:extLst>
+          </p:cNvPr>
+          <p:cNvSpPr txBox="1">
+            <a:spLocks noChangeArrowheads="1"/>
+          </p:cNvSpPr>
+          <p:nvPr/>
+        </p:nvSpPr>
+        <p:spPr bwMode="auto">
+          <a:xfrm>
+            <a:off x="236515" y="1198858"/>
+            <a:ext cx="8656886" cy="2862322"/>
+          </a:xfrm>
+          <a:prstGeom prst="rect">
+            <a:avLst/>
+          </a:prstGeom>
+          <a:noFill/>
+          <a:ln>
+            <a:noFill/>
+          </a:ln>
+          <a:effectLst/>
+          <a:extLst>
+            <a:ext uri="{909E8E84-426E-40DD-AFC4-6F175D3DCCD1}">
+              <a14:hiddenFill xmlns:a14="http://schemas.microsoft.com/office/drawing/2010/main">
+                <a:solidFill>
+                  <a:schemeClr val="accent1"/>
+                </a:solidFill>
+              </a14:hiddenFill>
+            </a:ext>
+            <a:ext uri="{91240B29-F687-4F45-9708-019B960494DF}">
+              <a14:hiddenLine xmlns:a14="http://schemas.microsoft.com/office/drawing/2010/main" w="9525">
+                <a:solidFill>
+                  <a:schemeClr val="tx1"/>
+                </a:solidFill>
+                <a:miter lim="800000"/>
+                <a:headEnd/>
+                <a:tailEnd/>
+              </a14:hiddenLine>
+            </a:ext>
+            <a:ext uri="{AF507438-7753-43E0-B8FC-AC1667EBCBE1}">
+              <a14:hiddenEffects xmlns:a14="http://schemas.microsoft.com/office/drawing/2010/main">
+                <a:effectLst>
+                  <a:outerShdw dist="35921" dir="2700000" algn="ctr" rotWithShape="0">
+                    <a:schemeClr val="bg2"/>
+                  </a:outerShdw>
+                </a:effectLst>
+              </a14:hiddenEffects>
+            </a:ext>
+          </a:extLst>
+        </p:spPr>
+        <p:txBody>
+          <a:bodyPr vert="horz" wrap="square" lIns="91440" tIns="45720" rIns="91440" bIns="45720" numCol="1" anchor="ctr" anchorCtr="0" compatLnSpc="1">
+            <a:prstTxWarp prst="textNoShape">
+              <a:avLst/>
+            </a:prstTxWarp>
+            <a:spAutoFit/>
+          </a:bodyPr>
+          <a:lstStyle>
+            <a:defPPr marR="0" lvl="0" algn="l" rtl="0">
+              <a:lnSpc>
+                <a:spcPct val="100000"/>
+              </a:lnSpc>
+              <a:spcBef>
+                <a:spcPts val="0"/>
+              </a:spcBef>
+              <a:spcAft>
+                <a:spcPts val="0"/>
+              </a:spcAft>
+            </a:defPPr>
+            <a:lvl1pPr marR="0" lvl="0" algn="l" rtl="0">
+              <a:lnSpc>
+                <a:spcPct val="100000"/>
+              </a:lnSpc>
+              <a:spcBef>
+                <a:spcPts val="0"/>
+              </a:spcBef>
+              <a:spcAft>
+                <a:spcPts val="0"/>
+              </a:spcAft>
+              <a:buClr>
+                <a:srgbClr val="000000"/>
+              </a:buClr>
+              <a:buFont typeface="Arial"/>
+              <a:defRPr sz="1400" b="0" i="0" u="none" strike="noStrike" cap="none">
+                <a:solidFill>
+                  <a:srgbClr val="000000"/>
+                </a:solidFill>
+                <a:latin typeface="Arial"/>
+                <a:ea typeface="Arial"/>
+                <a:cs typeface="Arial"/>
+                <a:sym typeface="Arial"/>
+              </a:defRPr>
+            </a:lvl1pPr>
+            <a:lvl2pPr marR="0" lvl="1" algn="l" rtl="0">
+              <a:lnSpc>
+                <a:spcPct val="100000"/>
+              </a:lnSpc>
+              <a:spcBef>
+                <a:spcPts val="0"/>
+              </a:spcBef>
+              <a:spcAft>
+                <a:spcPts val="0"/>
+              </a:spcAft>
+              <a:buClr>
+                <a:srgbClr val="000000"/>
+              </a:buClr>
+              <a:buFont typeface="Arial"/>
+              <a:defRPr sz="1400" b="0" i="0" u="none" strike="noStrike" cap="none">
+                <a:solidFill>
+                  <a:srgbClr val="000000"/>
+                </a:solidFill>
+                <a:latin typeface="Arial"/>
+                <a:ea typeface="Arial"/>
+                <a:cs typeface="Arial"/>
+                <a:sym typeface="Arial"/>
+              </a:defRPr>
+            </a:lvl2pPr>
+            <a:lvl3pPr marR="0" lvl="2" algn="l" rtl="0">
+              <a:lnSpc>
+                <a:spcPct val="100000"/>
+              </a:lnSpc>
+              <a:spcBef>
+                <a:spcPts val="0"/>
+              </a:spcBef>
+              <a:spcAft>
+                <a:spcPts val="0"/>
+              </a:spcAft>
+              <a:buClr>
+                <a:srgbClr val="000000"/>
+              </a:buClr>
+              <a:buFont typeface="Arial"/>
+              <a:defRPr sz="1400" b="0" i="0" u="none" strike="noStrike" cap="none">
+                <a:solidFill>
+                  <a:srgbClr val="000000"/>
+                </a:solidFill>
+                <a:latin typeface="Arial"/>
+                <a:ea typeface="Arial"/>
+                <a:cs typeface="Arial"/>
+                <a:sym typeface="Arial"/>
+              </a:defRPr>
+            </a:lvl3pPr>
+            <a:lvl4pPr marR="0" lvl="3" algn="l" rtl="0">
+              <a:lnSpc>
+                <a:spcPct val="100000"/>
+              </a:lnSpc>
+              <a:spcBef>
+                <a:spcPts val="0"/>
+              </a:spcBef>
+              <a:spcAft>
+                <a:spcPts val="0"/>
+              </a:spcAft>
+              <a:buClr>
+                <a:srgbClr val="000000"/>
+              </a:buClr>
+              <a:buFont typeface="Arial"/>
+              <a:defRPr sz="1400" b="0" i="0" u="none" strike="noStrike" cap="none">
+                <a:solidFill>
+                  <a:srgbClr val="000000"/>
+                </a:solidFill>
+                <a:latin typeface="Arial"/>
+                <a:ea typeface="Arial"/>
+                <a:cs typeface="Arial"/>
+                <a:sym typeface="Arial"/>
+              </a:defRPr>
+            </a:lvl4pPr>
+            <a:lvl5pPr marR="0" lvl="4" algn="l" rtl="0">
+              <a:lnSpc>
+                <a:spcPct val="100000"/>
+              </a:lnSpc>
+              <a:spcBef>
+                <a:spcPts val="0"/>
+              </a:spcBef>
+              <a:spcAft>
+                <a:spcPts val="0"/>
+              </a:spcAft>
+              <a:buClr>
+                <a:srgbClr val="000000"/>
+              </a:buClr>
+              <a:buFont typeface="Arial"/>
+              <a:defRPr sz="1400" b="0" i="0" u="none" strike="noStrike" cap="none">
+                <a:solidFill>
+                  <a:srgbClr val="000000"/>
+                </a:solidFill>
+                <a:latin typeface="Arial"/>
+                <a:ea typeface="Arial"/>
+                <a:cs typeface="Arial"/>
+                <a:sym typeface="Arial"/>
+              </a:defRPr>
+            </a:lvl5pPr>
+            <a:lvl6pPr marR="0" lvl="5" algn="l" rtl="0">
+              <a:lnSpc>
+                <a:spcPct val="100000"/>
+              </a:lnSpc>
+              <a:spcBef>
+                <a:spcPts val="0"/>
+              </a:spcBef>
+              <a:spcAft>
+                <a:spcPts val="0"/>
+              </a:spcAft>
+              <a:buClr>
+                <a:srgbClr val="000000"/>
+              </a:buClr>
+              <a:buFont typeface="Arial"/>
+              <a:defRPr sz="1400" b="0" i="0" u="none" strike="noStrike" cap="none">
+                <a:solidFill>
+                  <a:srgbClr val="000000"/>
+                </a:solidFill>
+                <a:latin typeface="Arial"/>
+                <a:ea typeface="Arial"/>
+                <a:cs typeface="Arial"/>
+                <a:sym typeface="Arial"/>
+              </a:defRPr>
+            </a:lvl6pPr>
+            <a:lvl7pPr marR="0" lvl="6" algn="l" rtl="0">
+              <a:lnSpc>
+                <a:spcPct val="100000"/>
+              </a:lnSpc>
+              <a:spcBef>
+                <a:spcPts val="0"/>
+              </a:spcBef>
+              <a:spcAft>
+                <a:spcPts val="0"/>
+              </a:spcAft>
+              <a:buClr>
+                <a:srgbClr val="000000"/>
+              </a:buClr>
+              <a:buFont typeface="Arial"/>
+              <a:defRPr sz="1400" b="0" i="0" u="none" strike="noStrike" cap="none">
+                <a:solidFill>
+                  <a:srgbClr val="000000"/>
+                </a:solidFill>
+                <a:latin typeface="Arial"/>
+                <a:ea typeface="Arial"/>
+                <a:cs typeface="Arial"/>
+                <a:sym typeface="Arial"/>
+              </a:defRPr>
+            </a:lvl7pPr>
+            <a:lvl8pPr marR="0" lvl="7" algn="l" rtl="0">
+              <a:lnSpc>
+                <a:spcPct val="100000"/>
+              </a:lnSpc>
+              <a:spcBef>
+                <a:spcPts val="0"/>
+              </a:spcBef>
+              <a:spcAft>
+                <a:spcPts val="0"/>
+              </a:spcAft>
+              <a:buClr>
+                <a:srgbClr val="000000"/>
+              </a:buClr>
+              <a:buFont typeface="Arial"/>
+              <a:defRPr sz="1400" b="0" i="0" u="none" strike="noStrike" cap="none">
+                <a:solidFill>
+                  <a:srgbClr val="000000"/>
+                </a:solidFill>
+                <a:latin typeface="Arial"/>
+                <a:ea typeface="Arial"/>
+                <a:cs typeface="Arial"/>
+                <a:sym typeface="Arial"/>
+              </a:defRPr>
+            </a:lvl8pPr>
+            <a:lvl9pPr marR="0" lvl="8" algn="l" rtl="0">
+              <a:lnSpc>
+                <a:spcPct val="100000"/>
+              </a:lnSpc>
+              <a:spcBef>
+                <a:spcPts val="0"/>
+              </a:spcBef>
+              <a:spcAft>
+                <a:spcPts val="0"/>
+              </a:spcAft>
+              <a:buClr>
+                <a:srgbClr val="000000"/>
+              </a:buClr>
+              <a:buFont typeface="Arial"/>
+              <a:defRPr sz="1400" b="0" i="0" u="none" strike="noStrike" cap="none">
+                <a:solidFill>
+                  <a:srgbClr val="000000"/>
+                </a:solidFill>
+                <a:latin typeface="Arial"/>
+                <a:ea typeface="Arial"/>
+                <a:cs typeface="Arial"/>
+                <a:sym typeface="Arial"/>
+              </a:defRPr>
+            </a:lvl9pPr>
+          </a:lstStyle>
+          <a:p>
+            <a:pPr eaLnBrk="0" fontAlgn="base" hangingPunct="0">
+              <a:spcBef>
+                <a:spcPct val="0"/>
+              </a:spcBef>
+              <a:spcAft>
+                <a:spcPct val="0"/>
+              </a:spcAft>
+              <a:buClrTx/>
+              <a:buFontTx/>
+              <a:buChar char="•"/>
+            </a:pPr>
+            <a:r>
+              <a:rPr lang="en-US" altLang="en-US" sz="1800" b="1" dirty="0">
+                <a:solidFill>
+                  <a:schemeClr val="tx1"/>
+                </a:solidFill>
+                <a:latin typeface="Arial" panose="020B0604020202020204" pitchFamily="34" charset="0"/>
+              </a:rPr>
+              <a:t>Deliverables:</a:t>
+            </a:r>
+            <a:endParaRPr lang="en-US" altLang="en-US" sz="1800" dirty="0">
+              <a:solidFill>
+                <a:schemeClr val="tx1"/>
+              </a:solidFill>
+              <a:latin typeface="Arial" panose="020B0604020202020204" pitchFamily="34" charset="0"/>
+            </a:endParaRPr>
+          </a:p>
+          <a:p>
+            <a:pPr eaLnBrk="0" fontAlgn="base" hangingPunct="0">
+              <a:spcBef>
+                <a:spcPct val="0"/>
+              </a:spcBef>
+              <a:spcAft>
+                <a:spcPct val="0"/>
+              </a:spcAft>
+              <a:buClrTx/>
+              <a:buFontTx/>
+              <a:buChar char="•"/>
+            </a:pPr>
+            <a:r>
+              <a:rPr lang="en-US" altLang="en-US" sz="1800" dirty="0">
+                <a:solidFill>
+                  <a:schemeClr val="tx1"/>
+                </a:solidFill>
+                <a:latin typeface="Arial" panose="020B0604020202020204" pitchFamily="34" charset="0"/>
+              </a:rPr>
+              <a:t>A fully functional web tool for real-time mental health monitoring.</a:t>
+            </a:r>
+          </a:p>
+          <a:p>
+            <a:pPr eaLnBrk="0" fontAlgn="base" hangingPunct="0">
+              <a:spcBef>
+                <a:spcPct val="0"/>
+              </a:spcBef>
+              <a:spcAft>
+                <a:spcPct val="0"/>
+              </a:spcAft>
+              <a:buClrTx/>
+              <a:buFontTx/>
+              <a:buChar char="•"/>
+            </a:pPr>
+            <a:r>
+              <a:rPr lang="en-US" altLang="en-US" sz="1800" dirty="0">
+                <a:solidFill>
+                  <a:schemeClr val="tx1"/>
+                </a:solidFill>
+                <a:latin typeface="Arial" panose="020B0604020202020204" pitchFamily="34" charset="0"/>
+              </a:rPr>
+              <a:t>Visual risk profiling (Pie Charts &amp; Histograms).</a:t>
+            </a:r>
+          </a:p>
+          <a:p>
+            <a:pPr eaLnBrk="0" fontAlgn="base" hangingPunct="0">
+              <a:spcBef>
+                <a:spcPct val="0"/>
+              </a:spcBef>
+              <a:spcAft>
+                <a:spcPct val="0"/>
+              </a:spcAft>
+              <a:buClrTx/>
+              <a:buFontTx/>
+              <a:buChar char="•"/>
+            </a:pPr>
+            <a:r>
+              <a:rPr lang="en-US" altLang="en-US" sz="1800" b="1" dirty="0">
+                <a:solidFill>
+                  <a:schemeClr val="tx1"/>
+                </a:solidFill>
+                <a:latin typeface="Arial" panose="020B0604020202020204" pitchFamily="34" charset="0"/>
+              </a:rPr>
+              <a:t>Impact:</a:t>
+            </a:r>
+            <a:endParaRPr lang="en-US" altLang="en-US" sz="1800" dirty="0">
+              <a:solidFill>
+                <a:schemeClr val="tx1"/>
+              </a:solidFill>
+              <a:latin typeface="Arial" panose="020B0604020202020204" pitchFamily="34" charset="0"/>
+            </a:endParaRPr>
+          </a:p>
+          <a:p>
+            <a:pPr eaLnBrk="0" fontAlgn="base" hangingPunct="0">
+              <a:spcBef>
+                <a:spcPct val="0"/>
+              </a:spcBef>
+              <a:spcAft>
+                <a:spcPct val="0"/>
+              </a:spcAft>
+              <a:buClrTx/>
+              <a:buFontTx/>
+              <a:buChar char="•"/>
+            </a:pPr>
+            <a:r>
+              <a:rPr lang="en-US" altLang="en-US" sz="1800" b="1" dirty="0">
+                <a:solidFill>
+                  <a:schemeClr val="tx1"/>
+                </a:solidFill>
+                <a:latin typeface="Arial" panose="020B0604020202020204" pitchFamily="34" charset="0"/>
+              </a:rPr>
+              <a:t>Early Detection:</a:t>
+            </a:r>
+            <a:r>
+              <a:rPr lang="en-US" altLang="en-US" sz="1800" dirty="0">
+                <a:solidFill>
+                  <a:schemeClr val="tx1"/>
+                </a:solidFill>
+                <a:latin typeface="Arial" panose="020B0604020202020204" pitchFamily="34" charset="0"/>
+              </a:rPr>
+              <a:t> Shifts focus from "Lagging Indicators" (Grades) to "Leading Indicators" (Sleep/Sentiment).</a:t>
+            </a:r>
+          </a:p>
+          <a:p>
+            <a:pPr eaLnBrk="0" fontAlgn="base" hangingPunct="0">
+              <a:spcBef>
+                <a:spcPct val="0"/>
+              </a:spcBef>
+              <a:spcAft>
+                <a:spcPct val="0"/>
+              </a:spcAft>
+              <a:buClrTx/>
+              <a:buFontTx/>
+              <a:buChar char="•"/>
+            </a:pPr>
+            <a:r>
+              <a:rPr lang="en-US" altLang="en-US" sz="1800" b="1" dirty="0">
+                <a:solidFill>
+                  <a:schemeClr val="tx1"/>
+                </a:solidFill>
+                <a:latin typeface="Arial" panose="020B0604020202020204" pitchFamily="34" charset="0"/>
+              </a:rPr>
+              <a:t>Data Integrity:</a:t>
+            </a:r>
+            <a:r>
+              <a:rPr lang="en-US" altLang="en-US" sz="1800" dirty="0">
+                <a:solidFill>
+                  <a:schemeClr val="tx1"/>
+                </a:solidFill>
+                <a:latin typeface="Arial" panose="020B0604020202020204" pitchFamily="34" charset="0"/>
+              </a:rPr>
+              <a:t> Empowers educators to trust their data by removing outliers before analysis.</a:t>
+            </a:r>
+          </a:p>
+          <a:p>
+            <a:pPr eaLnBrk="0" fontAlgn="base" hangingPunct="0">
+              <a:spcBef>
+                <a:spcPct val="0"/>
+              </a:spcBef>
+              <a:spcAft>
+                <a:spcPct val="0"/>
+              </a:spcAft>
+              <a:buClrTx/>
+              <a:buFontTx/>
+              <a:buChar char="•"/>
+            </a:pPr>
+            <a:r>
+              <a:rPr lang="en-US" altLang="en-US" sz="1800" b="1" dirty="0">
+                <a:solidFill>
+                  <a:schemeClr val="tx1"/>
+                </a:solidFill>
+                <a:latin typeface="Arial" panose="020B0604020202020204" pitchFamily="34" charset="0"/>
+              </a:rPr>
+              <a:t>Holistic View:</a:t>
+            </a:r>
+            <a:r>
+              <a:rPr lang="en-US" altLang="en-US" sz="1800" dirty="0">
+                <a:solidFill>
+                  <a:schemeClr val="tx1"/>
+                </a:solidFill>
+                <a:latin typeface="Arial" panose="020B0604020202020204" pitchFamily="34" charset="0"/>
+              </a:rPr>
+              <a:t> Bridges the gap between hard numbers and human feelings.</a:t>
+            </a:r>
+          </a:p>
+          <a:p>
+            <a:pPr eaLnBrk="0" fontAlgn="base" hangingPunct="0">
+              <a:spcBef>
+                <a:spcPct val="0"/>
+              </a:spcBef>
+              <a:spcAft>
+                <a:spcPct val="0"/>
+              </a:spcAft>
+              <a:buClrTx/>
+              <a:buFontTx/>
+              <a:buNone/>
+            </a:pPr>
+            <a:endParaRPr lang="en-US" altLang="en-US" sz="1800" dirty="0">
+              <a:solidFill>
+                <a:schemeClr val="tx1"/>
+              </a:solidFill>
+              <a:latin typeface="Arial" panose="020B0604020202020204" pitchFamily="34" charset="0"/>
+            </a:endParaRPr>
+          </a:p>
+        </p:txBody>
+      </p:sp>
+    </p:spTree>
+  </p:cSld>
+  <p:clrMapOvr>
+    <a:masterClrMapping/>
+  </p:clrMapOvr>
+</p:sld>
+</file>
+
+<file path=ppt/slides/slide17.xml><?xml version="1.0" encoding="utf-8"?>
 <p:sld xmlns:a="http://schemas.openxmlformats.org/drawingml/2006/main" xmlns:r="http://schemas.openxmlformats.org/officeDocument/2006/relationships" xmlns:p="http://schemas.openxmlformats.org/presentationml/2006/main">
   <p:cSld>
     <p:spTree>
@@ -17739,7 +20377,7 @@
                         <a:buNone/>
                       </a:pPr>
                       <a:r>
-                        <a:rPr lang="en" sz="800" b="1">
+                        <a:rPr lang="en" sz="800" b="1" dirty="0">
                           <a:solidFill>
                             <a:schemeClr val="lt1"/>
                           </a:solidFill>
@@ -17750,7 +20388,7 @@
                         </a:rPr>
                         <a:t>Student Name</a:t>
                       </a:r>
-                      <a:endParaRPr sz="800" b="1">
+                      <a:endParaRPr sz="800" b="1" dirty="0">
                         <a:solidFill>
                           <a:schemeClr val="lt1"/>
                         </a:solidFill>
@@ -21633,7 +24271,13 @@
   <p:cSld>
     <p:spTree>
       <p:nvGrpSpPr>
-        <p:cNvPr id="1" name="Shape 190"/>
+        <p:cNvPr id="1" name="Shape 227">
+          <a:extLst>
+            <a:ext uri="{FF2B5EF4-FFF2-40B4-BE49-F238E27FC236}">
+              <a16:creationId xmlns:a16="http://schemas.microsoft.com/office/drawing/2014/main" id="{2F541FE4-7766-8FD5-7D30-93DC21F9E299}"/>
+            </a:ext>
+          </a:extLst>
+        </p:cNvPr>
         <p:cNvGrpSpPr/>
         <p:nvPr/>
       </p:nvGrpSpPr>
@@ -21647,13 +24291,19 @@
       </p:grpSpPr>
       <p:sp>
         <p:nvSpPr>
-          <p:cNvPr id="191" name="Google Shape;191;p30"/>
+          <p:cNvPr id="228" name="Google Shape;228;p33">
+            <a:extLst>
+              <a:ext uri="{FF2B5EF4-FFF2-40B4-BE49-F238E27FC236}">
+                <a16:creationId xmlns:a16="http://schemas.microsoft.com/office/drawing/2014/main" id="{E158B95B-8A94-03F3-7A6C-D27E031FA4C4}"/>
+              </a:ext>
+            </a:extLst>
+          </p:cNvPr>
           <p:cNvSpPr/>
           <p:nvPr/>
         </p:nvSpPr>
         <p:spPr>
           <a:xfrm>
-            <a:off x="-275" y="169620"/>
+            <a:off x="-275" y="162000"/>
             <a:ext cx="9153000" cy="588000"/>
           </a:xfrm>
           <a:prstGeom prst="rect">
@@ -21695,7 +24345,13 @@
       </p:sp>
       <p:sp>
         <p:nvSpPr>
-          <p:cNvPr id="192" name="Google Shape;192;p30"/>
+          <p:cNvPr id="229" name="Google Shape;229;p33">
+            <a:extLst>
+              <a:ext uri="{FF2B5EF4-FFF2-40B4-BE49-F238E27FC236}">
+                <a16:creationId xmlns:a16="http://schemas.microsoft.com/office/drawing/2014/main" id="{A00DADAB-553E-F686-0482-0D807BB77331}"/>
+              </a:ext>
+            </a:extLst>
+          </p:cNvPr>
           <p:cNvSpPr/>
           <p:nvPr/>
         </p:nvSpPr>
@@ -21743,7 +24399,13 @@
       </p:sp>
       <p:sp>
         <p:nvSpPr>
-          <p:cNvPr id="193" name="Google Shape;193;p30"/>
+          <p:cNvPr id="230" name="Google Shape;230;p33">
+            <a:extLst>
+              <a:ext uri="{FF2B5EF4-FFF2-40B4-BE49-F238E27FC236}">
+                <a16:creationId xmlns:a16="http://schemas.microsoft.com/office/drawing/2014/main" id="{2F19AB60-A38C-D2CD-4703-04EAE6F0D13C}"/>
+              </a:ext>
+            </a:extLst>
+          </p:cNvPr>
           <p:cNvSpPr/>
           <p:nvPr/>
         </p:nvSpPr>
@@ -21791,7 +24453,13 @@
       </p:sp>
       <p:sp>
         <p:nvSpPr>
-          <p:cNvPr id="194" name="Google Shape;194;p30"/>
+          <p:cNvPr id="231" name="Google Shape;231;p33">
+            <a:extLst>
+              <a:ext uri="{FF2B5EF4-FFF2-40B4-BE49-F238E27FC236}">
+                <a16:creationId xmlns:a16="http://schemas.microsoft.com/office/drawing/2014/main" id="{EE862987-F136-3257-D7D3-028F4C0E8EC3}"/>
+              </a:ext>
+            </a:extLst>
+          </p:cNvPr>
           <p:cNvSpPr/>
           <p:nvPr/>
         </p:nvSpPr>
@@ -21839,7 +24507,13 @@
       </p:sp>
       <p:sp>
         <p:nvSpPr>
-          <p:cNvPr id="195" name="Google Shape;195;p30"/>
+          <p:cNvPr id="232" name="Google Shape;232;p33">
+            <a:extLst>
+              <a:ext uri="{FF2B5EF4-FFF2-40B4-BE49-F238E27FC236}">
+                <a16:creationId xmlns:a16="http://schemas.microsoft.com/office/drawing/2014/main" id="{577D3898-8E5C-04F1-3024-3514096AA6A0}"/>
+              </a:ext>
+            </a:extLst>
+          </p:cNvPr>
           <p:cNvSpPr/>
           <p:nvPr/>
         </p:nvSpPr>
@@ -21887,14 +24561,20 @@
       </p:sp>
       <p:sp>
         <p:nvSpPr>
-          <p:cNvPr id="196" name="Google Shape;196;p30"/>
+          <p:cNvPr id="233" name="Google Shape;233;p33">
+            <a:extLst>
+              <a:ext uri="{FF2B5EF4-FFF2-40B4-BE49-F238E27FC236}">
+                <a16:creationId xmlns:a16="http://schemas.microsoft.com/office/drawing/2014/main" id="{63A176C1-1047-D27E-7971-6B977ABE4F8B}"/>
+              </a:ext>
+            </a:extLst>
+          </p:cNvPr>
           <p:cNvSpPr txBox="1"/>
           <p:nvPr/>
         </p:nvSpPr>
         <p:spPr>
           <a:xfrm>
             <a:off x="-8850" y="164450"/>
-            <a:ext cx="5580900" cy="531000"/>
+            <a:ext cx="9144000" cy="531000"/>
           </a:xfrm>
           <a:prstGeom prst="rect">
             <a:avLst/>
@@ -21920,7 +24600,7 @@
               <a:buNone/>
             </a:pPr>
             <a:r>
-              <a:rPr lang="en" sz="3000" b="1">
+              <a:rPr lang="en" sz="3000" b="1" dirty="0">
                 <a:solidFill>
                   <a:schemeClr val="dk1"/>
                 </a:solidFill>
@@ -21929,9 +24609,9 @@
                 <a:cs typeface="Times New Roman"/>
                 <a:sym typeface="Times New Roman"/>
               </a:rPr>
-              <a:t>Project Usecases &amp; Scope</a:t>
+              <a:t>Project Summary</a:t>
             </a:r>
-            <a:endParaRPr sz="3000" b="1">
+            <a:endParaRPr sz="3000" b="1" dirty="0">
               <a:solidFill>
                 <a:schemeClr val="dk1"/>
               </a:solidFill>
@@ -21945,7 +24625,13 @@
       </p:sp>
       <p:sp>
         <p:nvSpPr>
-          <p:cNvPr id="197" name="Google Shape;197;p30"/>
+          <p:cNvPr id="234" name="Google Shape;234;p33">
+            <a:extLst>
+              <a:ext uri="{FF2B5EF4-FFF2-40B4-BE49-F238E27FC236}">
+                <a16:creationId xmlns:a16="http://schemas.microsoft.com/office/drawing/2014/main" id="{EBCD2F16-1B5A-B9F4-27C7-30F31E764115}"/>
+              </a:ext>
+            </a:extLst>
+          </p:cNvPr>
           <p:cNvSpPr txBox="1"/>
           <p:nvPr/>
         </p:nvSpPr>
@@ -21983,7 +24669,7 @@
                   <a:schemeClr val="lt1"/>
                 </a:solidFill>
               </a:rPr>
-              <a:t>5</a:t>
+              <a:t>8</a:t>
             </a:r>
             <a:endParaRPr sz="1400">
               <a:solidFill>
@@ -21999,22 +24685,22 @@
       </p:sp>
       <p:sp>
         <p:nvSpPr>
-          <p:cNvPr id="5" name="Rectangle 1">
+          <p:cNvPr id="3" name="Rectangle 1">
             <a:extLst>
               <a:ext uri="{FF2B5EF4-FFF2-40B4-BE49-F238E27FC236}">
-                <a16:creationId xmlns:a16="http://schemas.microsoft.com/office/drawing/2014/main" id="{1F7DD073-9124-4D25-8DB4-5770E4D6DD83}"/>
+                <a16:creationId xmlns:a16="http://schemas.microsoft.com/office/drawing/2014/main" id="{FAE2CEC0-552A-A140-6D69-186F31A112C9}"/>
               </a:ext>
             </a:extLst>
           </p:cNvPr>
-          <p:cNvSpPr txBox="1">
+          <p:cNvSpPr>
             <a:spLocks noChangeArrowheads="1"/>
           </p:cNvSpPr>
           <p:nvPr/>
         </p:nvSpPr>
         <p:spPr bwMode="auto">
           <a:xfrm>
-            <a:off x="628650" y="1060252"/>
-            <a:ext cx="7791450" cy="3693319"/>
+            <a:off x="700482" y="1176388"/>
+            <a:ext cx="7432474" cy="3370153"/>
           </a:xfrm>
           <a:prstGeom prst="rect">
             <a:avLst/>
@@ -22054,474 +24740,289 @@
           </a:extLst>
         </p:spPr>
         <p:txBody>
-          <a:bodyPr vert="horz" wrap="square" lIns="91440" tIns="45720" rIns="91440" bIns="45720" numCol="1" anchor="ctr" anchorCtr="0" compatLnSpc="1">
+          <a:bodyPr vert="horz" wrap="square" lIns="91440" tIns="0" rIns="91440" bIns="45720" numCol="1" anchor="ctr" anchorCtr="0" compatLnSpc="1">
             <a:prstTxWarp prst="textNoShape">
               <a:avLst/>
             </a:prstTxWarp>
             <a:spAutoFit/>
           </a:bodyPr>
-          <a:lstStyle>
-            <a:defPPr marR="0" lvl="0" algn="l" rtl="0">
+          <a:lstStyle/>
+          <a:p>
+            <a:pPr marL="285750" marR="0" lvl="0" indent="-285750" algn="l" defTabSz="914400" rtl="0" eaLnBrk="0" fontAlgn="base" latinLnBrk="0" hangingPunct="0">
               <a:lnSpc>
                 <a:spcPct val="100000"/>
               </a:lnSpc>
               <a:spcBef>
-                <a:spcPts val="0"/>
-              </a:spcBef>
-              <a:spcAft>
-                <a:spcPts val="0"/>
-              </a:spcAft>
-            </a:defPPr>
-            <a:lvl1pPr marR="0" lvl="0" algn="l" rtl="0">
+                <a:spcPct val="0"/>
+              </a:spcBef>
+              <a:spcAft>
+                <a:spcPct val="0"/>
+              </a:spcAft>
+              <a:buClrTx/>
+              <a:buSzTx/>
+              <a:buFont typeface="Arial" panose="020B0604020202020204" pitchFamily="34" charset="0"/>
+              <a:buChar char="•"/>
+              <a:tabLst/>
+            </a:pPr>
+            <a:r>
+              <a:rPr kumimoji="0" lang="en-US" altLang="en-US" sz="1800" b="1" i="0" u="none" strike="noStrike" cap="none" normalizeH="0" baseline="0" dirty="0" err="1">
+                <a:ln>
+                  <a:noFill/>
+                </a:ln>
+                <a:solidFill>
+                  <a:schemeClr val="tx1"/>
+                </a:solidFill>
+                <a:effectLst/>
+                <a:latin typeface="Google Sans Text"/>
+              </a:rPr>
+              <a:t>MindSpace</a:t>
+            </a:r>
+            <a:r>
+              <a:rPr kumimoji="0" lang="en-US" altLang="en-US" sz="1800" b="0" i="0" u="none" strike="noStrike" cap="none" normalizeH="0" baseline="0" dirty="0">
+                <a:ln>
+                  <a:noFill/>
+                </a:ln>
+                <a:solidFill>
+                  <a:schemeClr val="tx1"/>
+                </a:solidFill>
+                <a:effectLst/>
+                <a:latin typeface="Google Sans Text"/>
+              </a:rPr>
+              <a:t> is a full-stack web application developed by </a:t>
+            </a:r>
+            <a:r>
+              <a:rPr kumimoji="0" lang="en-US" altLang="en-US" sz="1800" b="0" i="0" u="none" strike="noStrike" cap="none" normalizeH="0" baseline="0" dirty="0" err="1">
+                <a:ln>
+                  <a:noFill/>
+                </a:ln>
+                <a:solidFill>
+                  <a:schemeClr val="tx1"/>
+                </a:solidFill>
+                <a:effectLst/>
+                <a:latin typeface="Google Sans Text"/>
+              </a:rPr>
+              <a:t>Projexa</a:t>
+            </a:r>
+            <a:r>
+              <a:rPr kumimoji="0" lang="en-US" altLang="en-US" sz="1800" b="0" i="0" u="none" strike="noStrike" cap="none" normalizeH="0" baseline="0" dirty="0">
+                <a:ln>
+                  <a:noFill/>
+                </a:ln>
+                <a:solidFill>
+                  <a:schemeClr val="tx1"/>
+                </a:solidFill>
+                <a:effectLst/>
+                <a:latin typeface="Google Sans Text"/>
+              </a:rPr>
+              <a:t> Team (26E1055) at K.R. Mangalam University to address the critical issue of student burnout. Unlike traditional reactive monitoring systems, </a:t>
+            </a:r>
+            <a:r>
+              <a:rPr kumimoji="0" lang="en-US" altLang="en-US" sz="1800" b="0" i="0" u="none" strike="noStrike" cap="none" normalizeH="0" baseline="0" dirty="0" err="1">
+                <a:ln>
+                  <a:noFill/>
+                </a:ln>
+                <a:solidFill>
+                  <a:schemeClr val="tx1"/>
+                </a:solidFill>
+                <a:effectLst/>
+                <a:latin typeface="Google Sans Text"/>
+              </a:rPr>
+              <a:t>MindSpace</a:t>
+            </a:r>
+            <a:r>
+              <a:rPr kumimoji="0" lang="en-US" altLang="en-US" sz="1800" b="0" i="0" u="none" strike="noStrike" cap="none" normalizeH="0" baseline="0" dirty="0">
+                <a:ln>
+                  <a:noFill/>
+                </a:ln>
+                <a:solidFill>
+                  <a:schemeClr val="tx1"/>
+                </a:solidFill>
+                <a:effectLst/>
+                <a:latin typeface="Google Sans Text"/>
+              </a:rPr>
+              <a:t> employs a multidimensional approach by merging </a:t>
+            </a:r>
+            <a:r>
+              <a:rPr kumimoji="0" lang="en-US" altLang="en-US" sz="1800" b="1" i="0" u="none" strike="noStrike" cap="none" normalizeH="0" baseline="0" dirty="0">
+                <a:ln>
+                  <a:noFill/>
+                </a:ln>
+                <a:solidFill>
+                  <a:schemeClr val="tx1"/>
+                </a:solidFill>
+                <a:effectLst/>
+                <a:latin typeface="Google Sans Text"/>
+              </a:rPr>
+              <a:t>quantitative lifestyle metrics</a:t>
+            </a:r>
+            <a:r>
+              <a:rPr kumimoji="0" lang="en-US" altLang="en-US" sz="1800" b="0" i="0" u="none" strike="noStrike" cap="none" normalizeH="0" baseline="0" dirty="0">
+                <a:ln>
+                  <a:noFill/>
+                </a:ln>
+                <a:solidFill>
+                  <a:schemeClr val="tx1"/>
+                </a:solidFill>
+                <a:effectLst/>
+                <a:latin typeface="Google Sans Text"/>
+              </a:rPr>
+              <a:t> with </a:t>
+            </a:r>
+            <a:r>
+              <a:rPr kumimoji="0" lang="en-US" altLang="en-US" sz="1800" b="1" i="0" u="none" strike="noStrike" cap="none" normalizeH="0" baseline="0" dirty="0">
+                <a:ln>
+                  <a:noFill/>
+                </a:ln>
+                <a:solidFill>
+                  <a:schemeClr val="tx1"/>
+                </a:solidFill>
+                <a:effectLst/>
+                <a:latin typeface="Google Sans Text"/>
+              </a:rPr>
+              <a:t>qualitative sentiment analysis</a:t>
+            </a:r>
+            <a:r>
+              <a:rPr kumimoji="0" lang="en-US" altLang="en-US" sz="1800" b="0" i="0" u="none" strike="noStrike" cap="none" normalizeH="0" baseline="0" dirty="0">
+                <a:ln>
+                  <a:noFill/>
+                </a:ln>
+                <a:solidFill>
+                  <a:schemeClr val="tx1"/>
+                </a:solidFill>
+                <a:effectLst/>
+                <a:latin typeface="Google Sans Text"/>
+              </a:rPr>
+              <a:t>.</a:t>
+            </a:r>
+          </a:p>
+          <a:p>
+            <a:pPr marL="285750" marR="0" lvl="0" indent="-285750" algn="l" defTabSz="914400" rtl="0" eaLnBrk="0" fontAlgn="base" latinLnBrk="0" hangingPunct="0">
               <a:lnSpc>
                 <a:spcPct val="100000"/>
               </a:lnSpc>
               <a:spcBef>
-                <a:spcPts val="0"/>
-              </a:spcBef>
-              <a:spcAft>
-                <a:spcPts val="0"/>
-              </a:spcAft>
-              <a:buClr>
-                <a:srgbClr val="000000"/>
-              </a:buClr>
-              <a:buFont typeface="Arial"/>
-              <a:defRPr sz="1400" b="0" i="0" u="none" strike="noStrike" cap="none">
-                <a:solidFill>
-                  <a:srgbClr val="000000"/>
-                </a:solidFill>
-                <a:latin typeface="Arial"/>
-                <a:ea typeface="Arial"/>
-                <a:cs typeface="Arial"/>
-                <a:sym typeface="Arial"/>
-              </a:defRPr>
-            </a:lvl1pPr>
-            <a:lvl2pPr marR="0" lvl="1" algn="l" rtl="0">
+                <a:spcPct val="0"/>
+              </a:spcBef>
+              <a:spcAft>
+                <a:spcPct val="0"/>
+              </a:spcAft>
+              <a:buClrTx/>
+              <a:buSzTx/>
+              <a:buFont typeface="Arial" panose="020B0604020202020204" pitchFamily="34" charset="0"/>
+              <a:buChar char="•"/>
+              <a:tabLst/>
+            </a:pPr>
+            <a:endParaRPr kumimoji="0" lang="en-US" altLang="en-US" sz="1800" b="0" i="0" u="none" strike="noStrike" cap="none" normalizeH="0" baseline="0" dirty="0">
+              <a:ln>
+                <a:noFill/>
+              </a:ln>
+              <a:solidFill>
+                <a:schemeClr val="tx1"/>
+              </a:solidFill>
+              <a:effectLst/>
+            </a:endParaRPr>
+          </a:p>
+          <a:p>
+            <a:pPr marL="285750" marR="0" lvl="0" indent="-285750" algn="l" defTabSz="914400" rtl="0" eaLnBrk="0" fontAlgn="base" latinLnBrk="0" hangingPunct="0">
               <a:lnSpc>
                 <a:spcPct val="100000"/>
               </a:lnSpc>
               <a:spcBef>
-                <a:spcPts val="0"/>
-              </a:spcBef>
-              <a:spcAft>
-                <a:spcPts val="0"/>
-              </a:spcAft>
-              <a:buClr>
-                <a:srgbClr val="000000"/>
-              </a:buClr>
-              <a:buFont typeface="Arial"/>
-              <a:defRPr sz="1400" b="0" i="0" u="none" strike="noStrike" cap="none">
-                <a:solidFill>
-                  <a:srgbClr val="000000"/>
-                </a:solidFill>
-                <a:latin typeface="Arial"/>
-                <a:ea typeface="Arial"/>
-                <a:cs typeface="Arial"/>
-                <a:sym typeface="Arial"/>
-              </a:defRPr>
-            </a:lvl2pPr>
-            <a:lvl3pPr marR="0" lvl="2" algn="l" rtl="0">
-              <a:lnSpc>
-                <a:spcPct val="100000"/>
-              </a:lnSpc>
-              <a:spcBef>
-                <a:spcPts val="0"/>
-              </a:spcBef>
-              <a:spcAft>
-                <a:spcPts val="0"/>
-              </a:spcAft>
-              <a:buClr>
-                <a:srgbClr val="000000"/>
-              </a:buClr>
-              <a:buFont typeface="Arial"/>
-              <a:defRPr sz="1400" b="0" i="0" u="none" strike="noStrike" cap="none">
-                <a:solidFill>
-                  <a:srgbClr val="000000"/>
-                </a:solidFill>
-                <a:latin typeface="Arial"/>
-                <a:ea typeface="Arial"/>
-                <a:cs typeface="Arial"/>
-                <a:sym typeface="Arial"/>
-              </a:defRPr>
-            </a:lvl3pPr>
-            <a:lvl4pPr marR="0" lvl="3" algn="l" rtl="0">
-              <a:lnSpc>
-                <a:spcPct val="100000"/>
-              </a:lnSpc>
-              <a:spcBef>
-                <a:spcPts val="0"/>
-              </a:spcBef>
-              <a:spcAft>
-                <a:spcPts val="0"/>
-              </a:spcAft>
-              <a:buClr>
-                <a:srgbClr val="000000"/>
-              </a:buClr>
-              <a:buFont typeface="Arial"/>
-              <a:defRPr sz="1400" b="0" i="0" u="none" strike="noStrike" cap="none">
-                <a:solidFill>
-                  <a:srgbClr val="000000"/>
-                </a:solidFill>
-                <a:latin typeface="Arial"/>
-                <a:ea typeface="Arial"/>
-                <a:cs typeface="Arial"/>
-                <a:sym typeface="Arial"/>
-              </a:defRPr>
-            </a:lvl4pPr>
-            <a:lvl5pPr marR="0" lvl="4" algn="l" rtl="0">
-              <a:lnSpc>
-                <a:spcPct val="100000"/>
-              </a:lnSpc>
-              <a:spcBef>
-                <a:spcPts val="0"/>
-              </a:spcBef>
-              <a:spcAft>
-                <a:spcPts val="0"/>
-              </a:spcAft>
-              <a:buClr>
-                <a:srgbClr val="000000"/>
-              </a:buClr>
-              <a:buFont typeface="Arial"/>
-              <a:defRPr sz="1400" b="0" i="0" u="none" strike="noStrike" cap="none">
-                <a:solidFill>
-                  <a:srgbClr val="000000"/>
-                </a:solidFill>
-                <a:latin typeface="Arial"/>
-                <a:ea typeface="Arial"/>
-                <a:cs typeface="Arial"/>
-                <a:sym typeface="Arial"/>
-              </a:defRPr>
-            </a:lvl5pPr>
-            <a:lvl6pPr marR="0" lvl="5" algn="l" rtl="0">
-              <a:lnSpc>
-                <a:spcPct val="100000"/>
-              </a:lnSpc>
-              <a:spcBef>
-                <a:spcPts val="0"/>
-              </a:spcBef>
-              <a:spcAft>
-                <a:spcPts val="0"/>
-              </a:spcAft>
-              <a:buClr>
-                <a:srgbClr val="000000"/>
-              </a:buClr>
-              <a:buFont typeface="Arial"/>
-              <a:defRPr sz="1400" b="0" i="0" u="none" strike="noStrike" cap="none">
-                <a:solidFill>
-                  <a:srgbClr val="000000"/>
-                </a:solidFill>
-                <a:latin typeface="Arial"/>
-                <a:ea typeface="Arial"/>
-                <a:cs typeface="Arial"/>
-                <a:sym typeface="Arial"/>
-              </a:defRPr>
-            </a:lvl6pPr>
-            <a:lvl7pPr marR="0" lvl="6" algn="l" rtl="0">
-              <a:lnSpc>
-                <a:spcPct val="100000"/>
-              </a:lnSpc>
-              <a:spcBef>
-                <a:spcPts val="0"/>
-              </a:spcBef>
-              <a:spcAft>
-                <a:spcPts val="0"/>
-              </a:spcAft>
-              <a:buClr>
-                <a:srgbClr val="000000"/>
-              </a:buClr>
-              <a:buFont typeface="Arial"/>
-              <a:defRPr sz="1400" b="0" i="0" u="none" strike="noStrike" cap="none">
-                <a:solidFill>
-                  <a:srgbClr val="000000"/>
-                </a:solidFill>
-                <a:latin typeface="Arial"/>
-                <a:ea typeface="Arial"/>
-                <a:cs typeface="Arial"/>
-                <a:sym typeface="Arial"/>
-              </a:defRPr>
-            </a:lvl7pPr>
-            <a:lvl8pPr marR="0" lvl="7" algn="l" rtl="0">
-              <a:lnSpc>
-                <a:spcPct val="100000"/>
-              </a:lnSpc>
-              <a:spcBef>
-                <a:spcPts val="0"/>
-              </a:spcBef>
-              <a:spcAft>
-                <a:spcPts val="0"/>
-              </a:spcAft>
-              <a:buClr>
-                <a:srgbClr val="000000"/>
-              </a:buClr>
-              <a:buFont typeface="Arial"/>
-              <a:defRPr sz="1400" b="0" i="0" u="none" strike="noStrike" cap="none">
-                <a:solidFill>
-                  <a:srgbClr val="000000"/>
-                </a:solidFill>
-                <a:latin typeface="Arial"/>
-                <a:ea typeface="Arial"/>
-                <a:cs typeface="Arial"/>
-                <a:sym typeface="Arial"/>
-              </a:defRPr>
-            </a:lvl8pPr>
-            <a:lvl9pPr marR="0" lvl="8" algn="l" rtl="0">
-              <a:lnSpc>
-                <a:spcPct val="100000"/>
-              </a:lnSpc>
-              <a:spcBef>
-                <a:spcPts val="0"/>
-              </a:spcBef>
-              <a:spcAft>
-                <a:spcPts val="0"/>
-              </a:spcAft>
-              <a:buClr>
-                <a:srgbClr val="000000"/>
-              </a:buClr>
-              <a:buFont typeface="Arial"/>
-              <a:defRPr sz="1400" b="0" i="0" u="none" strike="noStrike" cap="none">
-                <a:solidFill>
-                  <a:srgbClr val="000000"/>
-                </a:solidFill>
-                <a:latin typeface="Arial"/>
-                <a:ea typeface="Arial"/>
-                <a:cs typeface="Arial"/>
-                <a:sym typeface="Arial"/>
-              </a:defRPr>
-            </a:lvl9pPr>
-          </a:lstStyle>
-          <a:p>
-            <a:pPr eaLnBrk="0" fontAlgn="base" hangingPunct="0">
-              <a:spcBef>
                 <a:spcPct val="0"/>
               </a:spcBef>
               <a:spcAft>
                 <a:spcPct val="0"/>
               </a:spcAft>
               <a:buClrTx/>
-              <a:buFontTx/>
+              <a:buSzTx/>
+              <a:buFont typeface="Arial" panose="020B0604020202020204" pitchFamily="34" charset="0"/>
               <a:buChar char="•"/>
+              <a:tabLst/>
             </a:pPr>
             <a:r>
-              <a:rPr lang="en-US" altLang="en-US" sz="1800" b="1" dirty="0">
+              <a:rPr kumimoji="0" lang="en-US" altLang="en-US" sz="1800" b="0" i="0" u="none" strike="noStrike" cap="none" normalizeH="0" baseline="0" dirty="0">
+                <a:ln>
+                  <a:noFill/>
+                </a:ln>
                 <a:solidFill>
                   <a:schemeClr val="tx1"/>
                 </a:solidFill>
-                <a:latin typeface="Arial" panose="020B0604020202020204" pitchFamily="34" charset="0"/>
+                <a:effectLst/>
+                <a:latin typeface="Google Sans Text"/>
               </a:rPr>
-              <a:t>Target Audience / Use-cases:</a:t>
+              <a:t>The platform allows for the ingestion of academic datasets (CSV/Excel) and features a specialized "Editing Suite" to handle data cleaning and outlier removal in real-time. By utilizing a custom </a:t>
             </a:r>
-            <a:endParaRPr lang="en-US" altLang="en-US" sz="1800" dirty="0">
+            <a:r>
+              <a:rPr kumimoji="0" lang="en-US" altLang="en-US" sz="1800" b="1" i="0" u="none" strike="noStrike" cap="none" normalizeH="0" baseline="0" dirty="0">
+                <a:ln>
+                  <a:noFill/>
+                </a:ln>
+                <a:solidFill>
+                  <a:schemeClr val="tx1"/>
+                </a:solidFill>
+                <a:effectLst/>
+                <a:latin typeface="Google Sans Text"/>
+              </a:rPr>
+              <a:t>Burnout Algorithm</a:t>
+            </a:r>
+            <a:r>
+              <a:rPr kumimoji="0" lang="en-US" altLang="en-US" sz="1800" b="0" i="0" u="none" strike="noStrike" cap="none" normalizeH="0" baseline="0" dirty="0">
+                <a:ln>
+                  <a:noFill/>
+                </a:ln>
+                <a:solidFill>
+                  <a:schemeClr val="tx1"/>
+                </a:solidFill>
+                <a:effectLst/>
+                <a:latin typeface="Google Sans Text"/>
+              </a:rPr>
+              <a:t> and the </a:t>
+            </a:r>
+            <a:r>
+              <a:rPr kumimoji="0" lang="en-US" altLang="en-US" sz="1800" b="1" i="0" u="none" strike="noStrike" cap="none" normalizeH="0" baseline="0" dirty="0">
+                <a:ln>
+                  <a:noFill/>
+                </a:ln>
+                <a:solidFill>
+                  <a:schemeClr val="tx1"/>
+                </a:solidFill>
+                <a:effectLst/>
+                <a:latin typeface="Google Sans Text"/>
+              </a:rPr>
+              <a:t>NLTK (VADER) engine</a:t>
+            </a:r>
+            <a:r>
+              <a:rPr kumimoji="0" lang="en-US" altLang="en-US" sz="1800" b="0" i="0" u="none" strike="noStrike" cap="none" normalizeH="0" baseline="0" dirty="0">
+                <a:ln>
+                  <a:noFill/>
+                </a:ln>
+                <a:solidFill>
+                  <a:schemeClr val="tx1"/>
+                </a:solidFill>
+                <a:effectLst/>
+                <a:latin typeface="Google Sans Text"/>
+              </a:rPr>
+              <a:t>, the system classifies students into Low, Medium, or High-risk categories, providing university counselors and administrators with a real-time, holistic view of student well-being.</a:t>
+            </a:r>
+            <a:endParaRPr kumimoji="0" lang="en-US" altLang="en-US" sz="1800" b="0" i="0" u="none" strike="noStrike" cap="none" normalizeH="0" baseline="0" dirty="0">
+              <a:ln>
+                <a:noFill/>
+              </a:ln>
               <a:solidFill>
                 <a:schemeClr val="tx1"/>
               </a:solidFill>
-              <a:latin typeface="Arial" panose="020B0604020202020204" pitchFamily="34" charset="0"/>
-            </a:endParaRPr>
-          </a:p>
-          <a:p>
-            <a:pPr eaLnBrk="0" fontAlgn="base" hangingPunct="0">
-              <a:spcBef>
-                <a:spcPct val="0"/>
-              </a:spcBef>
-              <a:spcAft>
-                <a:spcPct val="0"/>
-              </a:spcAft>
-              <a:buClrTx/>
-              <a:buFontTx/>
-              <a:buChar char="•"/>
-            </a:pPr>
-            <a:r>
-              <a:rPr lang="en-US" altLang="en-US" sz="1800" b="1" dirty="0">
-                <a:solidFill>
-                  <a:schemeClr val="tx1"/>
-                </a:solidFill>
-                <a:latin typeface="Arial" panose="020B0604020202020204" pitchFamily="34" charset="0"/>
-              </a:rPr>
-              <a:t>University Counselors:</a:t>
-            </a:r>
-            <a:r>
-              <a:rPr lang="en-US" altLang="en-US" sz="1800" dirty="0">
-                <a:solidFill>
-                  <a:schemeClr val="tx1"/>
-                </a:solidFill>
-                <a:latin typeface="Arial" panose="020B0604020202020204" pitchFamily="34" charset="0"/>
-              </a:rPr>
-              <a:t> To identify "High Risk" students who need immediate intervention.</a:t>
-            </a:r>
-          </a:p>
-          <a:p>
-            <a:pPr eaLnBrk="0" fontAlgn="base" hangingPunct="0">
-              <a:spcBef>
-                <a:spcPct val="0"/>
-              </a:spcBef>
-              <a:spcAft>
-                <a:spcPct val="0"/>
-              </a:spcAft>
-              <a:buClrTx/>
-              <a:buFontTx/>
-              <a:buChar char="•"/>
-            </a:pPr>
-            <a:r>
-              <a:rPr lang="en-US" altLang="en-US" sz="1800" b="1" dirty="0">
-                <a:solidFill>
-                  <a:schemeClr val="tx1"/>
-                </a:solidFill>
-                <a:latin typeface="Arial" panose="020B0604020202020204" pitchFamily="34" charset="0"/>
-              </a:rPr>
-              <a:t>Administrators:</a:t>
-            </a:r>
-            <a:r>
-              <a:rPr lang="en-US" altLang="en-US" sz="1800" dirty="0">
-                <a:solidFill>
-                  <a:schemeClr val="tx1"/>
-                </a:solidFill>
-                <a:latin typeface="Arial" panose="020B0604020202020204" pitchFamily="34" charset="0"/>
-              </a:rPr>
-              <a:t> To track semester-wide stress trends against exam schedules.</a:t>
-            </a:r>
-          </a:p>
-          <a:p>
-            <a:pPr eaLnBrk="0" fontAlgn="base" hangingPunct="0">
-              <a:spcBef>
-                <a:spcPct val="0"/>
-              </a:spcBef>
-              <a:spcAft>
-                <a:spcPct val="0"/>
-              </a:spcAft>
-              <a:buClrTx/>
-              <a:buFontTx/>
-              <a:buChar char="•"/>
-            </a:pPr>
-            <a:r>
-              <a:rPr lang="en-US" altLang="en-US" sz="1800" b="1" dirty="0">
-                <a:solidFill>
-                  <a:schemeClr val="tx1"/>
-                </a:solidFill>
-                <a:latin typeface="Arial" panose="020B0604020202020204" pitchFamily="34" charset="0"/>
-              </a:rPr>
-              <a:t>Researchers:</a:t>
-            </a:r>
-            <a:r>
-              <a:rPr lang="en-US" altLang="en-US" sz="1800" dirty="0">
-                <a:solidFill>
-                  <a:schemeClr val="tx1"/>
-                </a:solidFill>
-                <a:latin typeface="Arial" panose="020B0604020202020204" pitchFamily="34" charset="0"/>
-              </a:rPr>
-              <a:t> To correlate lifestyle habits (sleep vs. study) with mental health outcomes.</a:t>
-            </a:r>
-          </a:p>
-          <a:p>
-            <a:pPr eaLnBrk="0" fontAlgn="base" hangingPunct="0">
-              <a:spcBef>
-                <a:spcPct val="0"/>
-              </a:spcBef>
-              <a:spcAft>
-                <a:spcPct val="0"/>
-              </a:spcAft>
-              <a:buClrTx/>
-              <a:buFontTx/>
-              <a:buChar char="•"/>
-            </a:pPr>
-            <a:r>
-              <a:rPr lang="en-US" altLang="en-US" sz="1800" b="1" dirty="0">
-                <a:solidFill>
-                  <a:schemeClr val="tx1"/>
-                </a:solidFill>
-                <a:latin typeface="Arial" panose="020B0604020202020204" pitchFamily="34" charset="0"/>
-              </a:rPr>
-              <a:t>Project Scope:</a:t>
-            </a:r>
-            <a:endParaRPr lang="en-US" altLang="en-US" sz="1800" dirty="0">
-              <a:solidFill>
-                <a:schemeClr val="tx1"/>
-              </a:solidFill>
-              <a:latin typeface="Arial" panose="020B0604020202020204" pitchFamily="34" charset="0"/>
-            </a:endParaRPr>
-          </a:p>
-          <a:p>
-            <a:pPr eaLnBrk="0" fontAlgn="base" hangingPunct="0">
-              <a:spcBef>
-                <a:spcPct val="0"/>
-              </a:spcBef>
-              <a:spcAft>
-                <a:spcPct val="0"/>
-              </a:spcAft>
-              <a:buClrTx/>
-              <a:buFontTx/>
-              <a:buChar char="•"/>
-            </a:pPr>
-            <a:r>
-              <a:rPr lang="en-US" altLang="en-US" sz="1800" b="1" dirty="0">
-                <a:solidFill>
-                  <a:schemeClr val="tx1"/>
-                </a:solidFill>
-                <a:latin typeface="Arial" panose="020B0604020202020204" pitchFamily="34" charset="0"/>
-              </a:rPr>
-              <a:t>In-Scope:</a:t>
-            </a:r>
-            <a:r>
-              <a:rPr lang="en-US" altLang="en-US" sz="1800" dirty="0">
-                <a:solidFill>
-                  <a:schemeClr val="tx1"/>
-                </a:solidFill>
-                <a:latin typeface="Arial" panose="020B0604020202020204" pitchFamily="34" charset="0"/>
-              </a:rPr>
-              <a:t> Web interface, Data cleaning, Burnout Algorithm, Sentiment Analysis, Visualization.</a:t>
-            </a:r>
-          </a:p>
-          <a:p>
-            <a:pPr eaLnBrk="0" fontAlgn="base" hangingPunct="0">
-              <a:spcBef>
-                <a:spcPct val="0"/>
-              </a:spcBef>
-              <a:spcAft>
-                <a:spcPct val="0"/>
-              </a:spcAft>
-              <a:buClrTx/>
-              <a:buFontTx/>
-              <a:buChar char="•"/>
-            </a:pPr>
-            <a:r>
-              <a:rPr lang="en-US" altLang="en-US" sz="1800" b="1" dirty="0">
-                <a:solidFill>
-                  <a:schemeClr val="tx1"/>
-                </a:solidFill>
-                <a:latin typeface="Arial" panose="020B0604020202020204" pitchFamily="34" charset="0"/>
-              </a:rPr>
-              <a:t>Out-of-Scope:</a:t>
-            </a:r>
-            <a:r>
-              <a:rPr lang="en-US" altLang="en-US" sz="1800" dirty="0">
-                <a:solidFill>
-                  <a:schemeClr val="tx1"/>
-                </a:solidFill>
-                <a:latin typeface="Arial" panose="020B0604020202020204" pitchFamily="34" charset="0"/>
-              </a:rPr>
-              <a:t> Medical diagnosis, mobile app version, integration with live biometric sensors.</a:t>
-            </a:r>
-          </a:p>
-          <a:p>
-            <a:pPr eaLnBrk="0" fontAlgn="base" hangingPunct="0">
-              <a:spcBef>
-                <a:spcPct val="0"/>
-              </a:spcBef>
-              <a:spcAft>
-                <a:spcPct val="0"/>
-              </a:spcAft>
-              <a:buClrTx/>
-              <a:buFontTx/>
-              <a:buNone/>
-            </a:pPr>
-            <a:endParaRPr lang="en-US" altLang="en-US" sz="1800" dirty="0">
-              <a:solidFill>
-                <a:schemeClr val="tx1"/>
-              </a:solidFill>
+              <a:effectLst/>
               <a:latin typeface="Arial" panose="020B0604020202020204" pitchFamily="34" charset="0"/>
             </a:endParaRPr>
           </a:p>
         </p:txBody>
       </p:sp>
     </p:spTree>
+    <p:extLst>
+      <p:ext uri="{BB962C8B-B14F-4D97-AF65-F5344CB8AC3E}">
+        <p14:creationId xmlns:p14="http://schemas.microsoft.com/office/powerpoint/2010/main" val="966414053"/>
+      </p:ext>
+    </p:extLst>
   </p:cSld>
   <p:clrMapOvr>
     <a:masterClrMapping/>
@@ -22534,7 +25035,13 @@
   <p:cSld>
     <p:spTree>
       <p:nvGrpSpPr>
-        <p:cNvPr id="1" name="Shape 202"/>
+        <p:cNvPr id="1" name="Shape 227">
+          <a:extLst>
+            <a:ext uri="{FF2B5EF4-FFF2-40B4-BE49-F238E27FC236}">
+              <a16:creationId xmlns:a16="http://schemas.microsoft.com/office/drawing/2014/main" id="{C29B9548-EF05-256D-9C1D-6ADFCF8CC0E7}"/>
+            </a:ext>
+          </a:extLst>
+        </p:cNvPr>
         <p:cNvGrpSpPr/>
         <p:nvPr/>
       </p:nvGrpSpPr>
@@ -22548,7 +25055,13 @@
       </p:grpSpPr>
       <p:sp>
         <p:nvSpPr>
-          <p:cNvPr id="203" name="Google Shape;203;p31"/>
+          <p:cNvPr id="228" name="Google Shape;228;p33">
+            <a:extLst>
+              <a:ext uri="{FF2B5EF4-FFF2-40B4-BE49-F238E27FC236}">
+                <a16:creationId xmlns:a16="http://schemas.microsoft.com/office/drawing/2014/main" id="{CAAFA9D8-2A35-BB1C-17A9-6DD0D15736B6}"/>
+              </a:ext>
+            </a:extLst>
+          </p:cNvPr>
           <p:cNvSpPr/>
           <p:nvPr/>
         </p:nvSpPr>
@@ -22596,7 +25109,13 @@
       </p:sp>
       <p:sp>
         <p:nvSpPr>
-          <p:cNvPr id="204" name="Google Shape;204;p31"/>
+          <p:cNvPr id="229" name="Google Shape;229;p33">
+            <a:extLst>
+              <a:ext uri="{FF2B5EF4-FFF2-40B4-BE49-F238E27FC236}">
+                <a16:creationId xmlns:a16="http://schemas.microsoft.com/office/drawing/2014/main" id="{0334093D-1D2B-8AC7-05FC-25995CB65D53}"/>
+              </a:ext>
+            </a:extLst>
+          </p:cNvPr>
           <p:cNvSpPr/>
           <p:nvPr/>
         </p:nvSpPr>
@@ -22644,7 +25163,13 @@
       </p:sp>
       <p:sp>
         <p:nvSpPr>
-          <p:cNvPr id="205" name="Google Shape;205;p31"/>
+          <p:cNvPr id="230" name="Google Shape;230;p33">
+            <a:extLst>
+              <a:ext uri="{FF2B5EF4-FFF2-40B4-BE49-F238E27FC236}">
+                <a16:creationId xmlns:a16="http://schemas.microsoft.com/office/drawing/2014/main" id="{31C85157-2630-EAAC-58EF-FDF25AC86AFB}"/>
+              </a:ext>
+            </a:extLst>
+          </p:cNvPr>
           <p:cNvSpPr/>
           <p:nvPr/>
         </p:nvSpPr>
@@ -22692,7 +25217,13 @@
       </p:sp>
       <p:sp>
         <p:nvSpPr>
-          <p:cNvPr id="206" name="Google Shape;206;p31"/>
+          <p:cNvPr id="231" name="Google Shape;231;p33">
+            <a:extLst>
+              <a:ext uri="{FF2B5EF4-FFF2-40B4-BE49-F238E27FC236}">
+                <a16:creationId xmlns:a16="http://schemas.microsoft.com/office/drawing/2014/main" id="{E472EF2B-A13A-DEF4-16F8-299CDF49D902}"/>
+              </a:ext>
+            </a:extLst>
+          </p:cNvPr>
           <p:cNvSpPr/>
           <p:nvPr/>
         </p:nvSpPr>
@@ -22740,7 +25271,13 @@
       </p:sp>
       <p:sp>
         <p:nvSpPr>
-          <p:cNvPr id="207" name="Google Shape;207;p31"/>
+          <p:cNvPr id="232" name="Google Shape;232;p33">
+            <a:extLst>
+              <a:ext uri="{FF2B5EF4-FFF2-40B4-BE49-F238E27FC236}">
+                <a16:creationId xmlns:a16="http://schemas.microsoft.com/office/drawing/2014/main" id="{3F86299E-DDA5-3F80-3BD0-55036F591517}"/>
+              </a:ext>
+            </a:extLst>
+          </p:cNvPr>
           <p:cNvSpPr/>
           <p:nvPr/>
         </p:nvSpPr>
@@ -22788,7 +25325,13 @@
       </p:sp>
       <p:sp>
         <p:nvSpPr>
-          <p:cNvPr id="208" name="Google Shape;208;p31"/>
+          <p:cNvPr id="233" name="Google Shape;233;p33">
+            <a:extLst>
+              <a:ext uri="{FF2B5EF4-FFF2-40B4-BE49-F238E27FC236}">
+                <a16:creationId xmlns:a16="http://schemas.microsoft.com/office/drawing/2014/main" id="{70A3F9E6-4F89-10DC-BD6B-D9112D40959A}"/>
+              </a:ext>
+            </a:extLst>
+          </p:cNvPr>
           <p:cNvSpPr txBox="1"/>
           <p:nvPr/>
         </p:nvSpPr>
@@ -22821,7 +25364,7 @@
               <a:buNone/>
             </a:pPr>
             <a:r>
-              <a:rPr lang="en" sz="3000" b="1">
+              <a:rPr lang="en" sz="3000" b="1" dirty="0">
                 <a:solidFill>
                   <a:schemeClr val="dk1"/>
                 </a:solidFill>
@@ -22830,9 +25373,9 @@
                 <a:cs typeface="Times New Roman"/>
                 <a:sym typeface="Times New Roman"/>
               </a:rPr>
-              <a:t>Project Flow diagram/Architecture</a:t>
+              <a:t>Detailes Progress: Development Phase</a:t>
             </a:r>
-            <a:endParaRPr sz="3000" b="1">
+            <a:endParaRPr sz="3000" b="1" dirty="0">
               <a:solidFill>
                 <a:schemeClr val="dk1"/>
               </a:solidFill>
@@ -22846,7 +25389,13 @@
       </p:sp>
       <p:sp>
         <p:nvSpPr>
-          <p:cNvPr id="209" name="Google Shape;209;p31"/>
+          <p:cNvPr id="234" name="Google Shape;234;p33">
+            <a:extLst>
+              <a:ext uri="{FF2B5EF4-FFF2-40B4-BE49-F238E27FC236}">
+                <a16:creationId xmlns:a16="http://schemas.microsoft.com/office/drawing/2014/main" id="{2BC3FAED-510B-6B09-BD7A-343BCDE31E71}"/>
+              </a:ext>
+            </a:extLst>
+          </p:cNvPr>
           <p:cNvSpPr txBox="1"/>
           <p:nvPr/>
         </p:nvSpPr>
@@ -22884,7 +25433,7 @@
                   <a:schemeClr val="lt1"/>
                 </a:solidFill>
               </a:rPr>
-              <a:t>6</a:t>
+              <a:t>8</a:t>
             </a:r>
             <a:endParaRPr sz="1400">
               <a:solidFill>
@@ -22898,214 +25447,1241 @@
           </a:p>
         </p:txBody>
       </p:sp>
-      <p:sp>
-        <p:nvSpPr>
-          <p:cNvPr id="210" name="Google Shape;210;p31"/>
-          <p:cNvSpPr txBox="1"/>
-          <p:nvPr/>
-        </p:nvSpPr>
-        <p:spPr>
-          <a:xfrm>
-            <a:off x="4983480" y="3989386"/>
-            <a:ext cx="3966300" cy="677100"/>
-          </a:xfrm>
-          <a:prstGeom prst="rect">
-            <a:avLst/>
-          </a:prstGeom>
-          <a:noFill/>
-          <a:ln>
-            <a:noFill/>
-          </a:ln>
-        </p:spPr>
-        <p:txBody>
-          <a:bodyPr spcFirstLastPara="1" wrap="square" lIns="91425" tIns="91425" rIns="91425" bIns="91425" anchor="t" anchorCtr="0">
-            <a:spAutoFit/>
-          </a:bodyPr>
-          <a:lstStyle/>
-          <a:p>
-            <a:pPr marL="0" lvl="0" indent="0" algn="ctr" rtl="0">
-              <a:spcBef>
-                <a:spcPts val="0"/>
-              </a:spcBef>
-              <a:spcAft>
-                <a:spcPts val="0"/>
-              </a:spcAft>
-              <a:buNone/>
-            </a:pPr>
-            <a:r>
-              <a:rPr lang="en" sz="1600" dirty="0">
-                <a:latin typeface="Poppins"/>
-                <a:ea typeface="Poppins"/>
-                <a:cs typeface="Poppins"/>
-                <a:sym typeface="Poppins"/>
-              </a:rPr>
-              <a:t>System Architecture showing Data Flow from Input CSV to NLTK Vader</a:t>
-            </a:r>
-            <a:endParaRPr sz="1600" dirty="0">
-              <a:latin typeface="Poppins"/>
-              <a:ea typeface="Poppins"/>
-              <a:cs typeface="Poppins"/>
-              <a:sym typeface="Poppins"/>
-            </a:endParaRPr>
-          </a:p>
-        </p:txBody>
-      </p:sp>
-      <p:pic>
-        <p:nvPicPr>
-          <p:cNvPr id="2" name="Picture 1">
+      <p:graphicFrame>
+        <p:nvGraphicFramePr>
+          <p:cNvPr id="4" name="Table 3">
             <a:extLst>
               <a:ext uri="{FF2B5EF4-FFF2-40B4-BE49-F238E27FC236}">
-                <a16:creationId xmlns:a16="http://schemas.microsoft.com/office/drawing/2014/main" id="{C8E27775-F619-D35E-241C-0F1B57FA671B}"/>
+                <a16:creationId xmlns:a16="http://schemas.microsoft.com/office/drawing/2014/main" id="{EA4798B7-7CCA-43C1-337B-DAEE4DFC47C4}"/>
               </a:ext>
             </a:extLst>
           </p:cNvPr>
-          <p:cNvPicPr>
-            <a:picLocks noChangeAspect="1"/>
-          </p:cNvPicPr>
-          <p:nvPr/>
-        </p:nvPicPr>
-        <p:blipFill>
-          <a:blip r:embed="rId3"/>
-          <a:stretch>
-            <a:fillRect/>
-          </a:stretch>
-        </p:blipFill>
-        <p:spPr>
-          <a:xfrm>
-            <a:off x="4572000" y="912000"/>
-            <a:ext cx="4331466" cy="2625951"/>
-          </a:xfrm>
-          <a:prstGeom prst="rect">
-            <a:avLst/>
-          </a:prstGeom>
-        </p:spPr>
-      </p:pic>
-      <p:pic>
-        <p:nvPicPr>
-          <p:cNvPr id="3" name="Picture 2">
-            <a:extLst>
-              <a:ext uri="{FF2B5EF4-FFF2-40B4-BE49-F238E27FC236}">
-                <a16:creationId xmlns:a16="http://schemas.microsoft.com/office/drawing/2014/main" id="{3C695CFD-EC4E-4337-BF9E-4107CB9B0BAD}"/>
-              </a:ext>
-            </a:extLst>
-          </p:cNvPr>
-          <p:cNvPicPr>
-            <a:picLocks noChangeAspect="1"/>
-          </p:cNvPicPr>
-          <p:nvPr/>
-        </p:nvPicPr>
-        <p:blipFill>
-          <a:blip r:embed="rId4"/>
-          <a:srcRect l="23574" t="6144" r="15418"/>
-          <a:stretch>
-            <a:fillRect/>
-          </a:stretch>
-        </p:blipFill>
-        <p:spPr>
-          <a:xfrm>
-            <a:off x="1188721" y="1102097"/>
-            <a:ext cx="3124200" cy="2625951"/>
-          </a:xfrm>
-          <a:prstGeom prst="rect">
-            <a:avLst/>
-          </a:prstGeom>
-        </p:spPr>
-      </p:pic>
-      <p:sp>
-        <p:nvSpPr>
-          <p:cNvPr id="4" name="Google Shape;210;p31">
-            <a:extLst>
-              <a:ext uri="{FF2B5EF4-FFF2-40B4-BE49-F238E27FC236}">
-                <a16:creationId xmlns:a16="http://schemas.microsoft.com/office/drawing/2014/main" id="{1267A0CA-BDE6-DBC1-F7EC-21020B78F23C}"/>
-              </a:ext>
-            </a:extLst>
-          </p:cNvPr>
-          <p:cNvSpPr txBox="1"/>
-          <p:nvPr/>
-        </p:nvSpPr>
-        <p:spPr>
-          <a:xfrm>
-            <a:off x="596850" y="3989386"/>
-            <a:ext cx="3966300" cy="677100"/>
-          </a:xfrm>
-          <a:prstGeom prst="rect">
-            <a:avLst/>
-          </a:prstGeom>
-          <a:noFill/>
-          <a:ln>
-            <a:noFill/>
-          </a:ln>
-        </p:spPr>
-        <p:txBody>
-          <a:bodyPr spcFirstLastPara="1" wrap="square" lIns="91425" tIns="91425" rIns="91425" bIns="91425" anchor="t" anchorCtr="0">
-            <a:spAutoFit/>
-          </a:bodyPr>
-          <a:lstStyle/>
-          <a:p>
-            <a:pPr marL="0" lvl="0" indent="0" algn="ctr" rtl="0">
-              <a:spcBef>
-                <a:spcPts val="0"/>
-              </a:spcBef>
-              <a:spcAft>
-                <a:spcPts val="0"/>
-              </a:spcAft>
-              <a:buNone/>
-            </a:pPr>
-            <a:r>
-              <a:rPr lang="en" sz="1600" dirty="0">
-                <a:latin typeface="Poppins"/>
-                <a:ea typeface="Poppins"/>
-                <a:cs typeface="Poppins"/>
-                <a:sym typeface="Poppins"/>
-              </a:rPr>
-              <a:t>System Architecture showing Data Flow For Analysis</a:t>
-            </a:r>
-            <a:endParaRPr sz="1600" dirty="0">
-              <a:latin typeface="Poppins"/>
-              <a:ea typeface="Poppins"/>
-              <a:cs typeface="Poppins"/>
-              <a:sym typeface="Poppins"/>
-            </a:endParaRPr>
-          </a:p>
-        </p:txBody>
-      </p:sp>
-      <p:cxnSp>
-        <p:nvCxnSpPr>
-          <p:cNvPr id="6" name="Straight Connector 5">
-            <a:extLst>
-              <a:ext uri="{FF2B5EF4-FFF2-40B4-BE49-F238E27FC236}">
-                <a16:creationId xmlns:a16="http://schemas.microsoft.com/office/drawing/2014/main" id="{42559515-6B3D-4D73-D550-70CCD09E7319}"/>
-              </a:ext>
-            </a:extLst>
-          </p:cNvPr>
-          <p:cNvCxnSpPr/>
-          <p:nvPr/>
-        </p:nvCxnSpPr>
-        <p:spPr>
-          <a:xfrm>
-            <a:off x="4686300" y="912000"/>
-            <a:ext cx="0" cy="3754486"/>
-          </a:xfrm>
-          <a:prstGeom prst="line">
-            <a:avLst/>
-          </a:prstGeom>
-        </p:spPr>
-        <p:style>
-          <a:lnRef idx="1">
-            <a:schemeClr val="accent1"/>
-          </a:lnRef>
-          <a:fillRef idx="0">
-            <a:schemeClr val="accent1"/>
-          </a:fillRef>
-          <a:effectRef idx="0">
-            <a:schemeClr val="accent1"/>
-          </a:effectRef>
-          <a:fontRef idx="minor">
-            <a:schemeClr val="tx1"/>
-          </a:fontRef>
-        </p:style>
-      </p:cxnSp>
+          <p:cNvGraphicFramePr>
+            <a:graphicFrameLocks noGrp="1"/>
+          </p:cNvGraphicFramePr>
+          <p:nvPr>
+            <p:extLst>
+              <p:ext uri="{D42A27DB-BD31-4B8C-83A1-F6EECF244321}">
+                <p14:modId xmlns:p14="http://schemas.microsoft.com/office/powerpoint/2010/main" val="3776484517"/>
+              </p:ext>
+            </p:extLst>
+          </p:nvPr>
+        </p:nvGraphicFramePr>
+        <p:xfrm>
+          <a:off x="193289" y="802887"/>
+          <a:ext cx="8237034" cy="4208084"/>
+        </p:xfrm>
+        <a:graphic>
+          <a:graphicData uri="http://schemas.openxmlformats.org/drawingml/2006/table">
+            <a:tbl>
+              <a:tblPr/>
+              <a:tblGrid>
+                <a:gridCol w="2745678">
+                  <a:extLst>
+                    <a:ext uri="{9D8B030D-6E8A-4147-A177-3AD203B41FA5}">
+                      <a16:colId xmlns:a16="http://schemas.microsoft.com/office/drawing/2014/main" val="2469177783"/>
+                    </a:ext>
+                  </a:extLst>
+                </a:gridCol>
+                <a:gridCol w="2745678">
+                  <a:extLst>
+                    <a:ext uri="{9D8B030D-6E8A-4147-A177-3AD203B41FA5}">
+                      <a16:colId xmlns:a16="http://schemas.microsoft.com/office/drawing/2014/main" val="804372709"/>
+                    </a:ext>
+                  </a:extLst>
+                </a:gridCol>
+                <a:gridCol w="2745678">
+                  <a:extLst>
+                    <a:ext uri="{9D8B030D-6E8A-4147-A177-3AD203B41FA5}">
+                      <a16:colId xmlns:a16="http://schemas.microsoft.com/office/drawing/2014/main" val="1091044079"/>
+                    </a:ext>
+                  </a:extLst>
+                </a:gridCol>
+              </a:tblGrid>
+              <a:tr h="188404">
+                <a:tc>
+                  <a:txBody>
+                    <a:bodyPr/>
+                    <a:lstStyle/>
+                    <a:p>
+                      <a:pPr>
+                        <a:buNone/>
+                      </a:pPr>
+                      <a:r>
+                        <a:rPr lang="en-IN" sz="1050" b="1"/>
+                        <a:t>Domain</a:t>
+                      </a:r>
+                      <a:endParaRPr lang="en-IN" sz="1050"/>
+                    </a:p>
+                  </a:txBody>
+                  <a:tcPr marL="37642" marR="37642" marT="18821" marB="18821" anchor="ctr">
+                    <a:lnL>
+                      <a:noFill/>
+                    </a:lnL>
+                    <a:lnR>
+                      <a:noFill/>
+                    </a:lnR>
+                    <a:lnT>
+                      <a:noFill/>
+                    </a:lnT>
+                    <a:lnB>
+                      <a:noFill/>
+                    </a:lnB>
+                    <a:noFill/>
+                  </a:tcPr>
+                </a:tc>
+                <a:tc>
+                  <a:txBody>
+                    <a:bodyPr/>
+                    <a:lstStyle/>
+                    <a:p>
+                      <a:pPr>
+                        <a:buNone/>
+                      </a:pPr>
+                      <a:r>
+                        <a:rPr lang="en-IN" sz="1050" b="1"/>
+                        <a:t>Component</a:t>
+                      </a:r>
+                      <a:endParaRPr lang="en-IN" sz="1050"/>
+                    </a:p>
+                  </a:txBody>
+                  <a:tcPr marL="37642" marR="37642" marT="18821" marB="18821" anchor="ctr">
+                    <a:lnL>
+                      <a:noFill/>
+                    </a:lnL>
+                    <a:lnR>
+                      <a:noFill/>
+                    </a:lnR>
+                    <a:lnT>
+                      <a:noFill/>
+                    </a:lnT>
+                    <a:lnB>
+                      <a:noFill/>
+                    </a:lnB>
+                    <a:noFill/>
+                  </a:tcPr>
+                </a:tc>
+                <a:tc>
+                  <a:txBody>
+                    <a:bodyPr/>
+                    <a:lstStyle/>
+                    <a:p>
+                      <a:pPr>
+                        <a:buNone/>
+                      </a:pPr>
+                      <a:r>
+                        <a:rPr lang="en-IN" sz="1050" b="1"/>
+                        <a:t>Progress Summary</a:t>
+                      </a:r>
+                      <a:endParaRPr lang="en-IN" sz="1050"/>
+                    </a:p>
+                  </a:txBody>
+                  <a:tcPr marL="37642" marR="37642" marT="18821" marB="18821" anchor="ctr">
+                    <a:lnL>
+                      <a:noFill/>
+                    </a:lnL>
+                    <a:lnR>
+                      <a:noFill/>
+                    </a:lnR>
+                    <a:lnT>
+                      <a:noFill/>
+                    </a:lnT>
+                    <a:lnB>
+                      <a:noFill/>
+                    </a:lnB>
+                    <a:noFill/>
+                  </a:tcPr>
+                </a:tc>
+                <a:extLst>
+                  <a:ext uri="{0D108BD9-81ED-4DB2-BD59-A6C34878D82A}">
+                    <a16:rowId xmlns:a16="http://schemas.microsoft.com/office/drawing/2014/main" val="3327820665"/>
+                  </a:ext>
+                </a:extLst>
+              </a:tr>
+              <a:tr h="372866">
+                <a:tc>
+                  <a:txBody>
+                    <a:bodyPr/>
+                    <a:lstStyle/>
+                    <a:p>
+                      <a:pPr>
+                        <a:buNone/>
+                      </a:pPr>
+                      <a:r>
+                        <a:rPr lang="en-IN" sz="1050" b="1"/>
+                        <a:t>Backend &amp; Infrastructure</a:t>
+                      </a:r>
+                      <a:endParaRPr lang="en-IN" sz="1050"/>
+                    </a:p>
+                  </a:txBody>
+                  <a:tcPr marL="37642" marR="37642" marT="18821" marB="18821" anchor="ctr">
+                    <a:lnL>
+                      <a:noFill/>
+                    </a:lnL>
+                    <a:lnR>
+                      <a:noFill/>
+                    </a:lnR>
+                    <a:lnT>
+                      <a:noFill/>
+                    </a:lnT>
+                    <a:lnB>
+                      <a:noFill/>
+                    </a:lnB>
+                    <a:noFill/>
+                  </a:tcPr>
+                </a:tc>
+                <a:tc>
+                  <a:txBody>
+                    <a:bodyPr/>
+                    <a:lstStyle/>
+                    <a:p>
+                      <a:pPr>
+                        <a:buNone/>
+                      </a:pPr>
+                      <a:r>
+                        <a:rPr lang="en-IN" sz="1050"/>
+                        <a:t>Environment Setup</a:t>
+                      </a:r>
+                    </a:p>
+                  </a:txBody>
+                  <a:tcPr marL="37642" marR="37642" marT="18821" marB="18821" anchor="ctr">
+                    <a:lnL>
+                      <a:noFill/>
+                    </a:lnL>
+                    <a:lnR>
+                      <a:noFill/>
+                    </a:lnR>
+                    <a:lnT>
+                      <a:noFill/>
+                    </a:lnT>
+                    <a:lnB>
+                      <a:noFill/>
+                    </a:lnB>
+                    <a:noFill/>
+                  </a:tcPr>
+                </a:tc>
+                <a:tc>
+                  <a:txBody>
+                    <a:bodyPr/>
+                    <a:lstStyle/>
+                    <a:p>
+                      <a:pPr>
+                        <a:buNone/>
+                      </a:pPr>
+                      <a:r>
+                        <a:rPr lang="en-US" sz="1050"/>
+                        <a:t>Flask environment configured with structured directories for efficient routing</a:t>
+                      </a:r>
+                    </a:p>
+                  </a:txBody>
+                  <a:tcPr marL="37642" marR="37642" marT="18821" marB="18821" anchor="ctr">
+                    <a:lnL>
+                      <a:noFill/>
+                    </a:lnL>
+                    <a:lnR>
+                      <a:noFill/>
+                    </a:lnR>
+                    <a:lnT>
+                      <a:noFill/>
+                    </a:lnT>
+                    <a:lnB>
+                      <a:noFill/>
+                    </a:lnB>
+                    <a:noFill/>
+                  </a:tcPr>
+                </a:tc>
+                <a:extLst>
+                  <a:ext uri="{0D108BD9-81ED-4DB2-BD59-A6C34878D82A}">
+                    <a16:rowId xmlns:a16="http://schemas.microsoft.com/office/drawing/2014/main" val="4027635076"/>
+                  </a:ext>
+                </a:extLst>
+              </a:tr>
+              <a:tr h="372866">
+                <a:tc>
+                  <a:txBody>
+                    <a:bodyPr/>
+                    <a:lstStyle/>
+                    <a:p>
+                      <a:pPr>
+                        <a:buNone/>
+                      </a:pPr>
+                      <a:endParaRPr lang="en-IN" sz="1050" dirty="0"/>
+                    </a:p>
+                  </a:txBody>
+                  <a:tcPr marL="37642" marR="37642" marT="18821" marB="18821" anchor="ctr">
+                    <a:lnL>
+                      <a:noFill/>
+                    </a:lnL>
+                    <a:lnR>
+                      <a:noFill/>
+                    </a:lnR>
+                    <a:lnT>
+                      <a:noFill/>
+                    </a:lnT>
+                    <a:lnB>
+                      <a:noFill/>
+                    </a:lnB>
+                    <a:noFill/>
+                  </a:tcPr>
+                </a:tc>
+                <a:tc>
+                  <a:txBody>
+                    <a:bodyPr/>
+                    <a:lstStyle/>
+                    <a:p>
+                      <a:pPr>
+                        <a:buNone/>
+                      </a:pPr>
+                      <a:r>
+                        <a:rPr lang="en-IN" sz="1050"/>
+                        <a:t>Routing &amp; APIs</a:t>
+                      </a:r>
+                    </a:p>
+                  </a:txBody>
+                  <a:tcPr marL="37642" marR="37642" marT="18821" marB="18821" anchor="ctr">
+                    <a:lnL>
+                      <a:noFill/>
+                    </a:lnL>
+                    <a:lnR>
+                      <a:noFill/>
+                    </a:lnR>
+                    <a:lnT>
+                      <a:noFill/>
+                    </a:lnT>
+                    <a:lnB>
+                      <a:noFill/>
+                    </a:lnB>
+                    <a:noFill/>
+                  </a:tcPr>
+                </a:tc>
+                <a:tc>
+                  <a:txBody>
+                    <a:bodyPr/>
+                    <a:lstStyle/>
+                    <a:p>
+                      <a:pPr>
+                        <a:buNone/>
+                      </a:pPr>
+                      <a:r>
+                        <a:rPr lang="en-US" sz="1050"/>
+                        <a:t>RESTful APIs implemented (</a:t>
+                      </a:r>
+                      <a:r>
+                        <a:rPr lang="en-US" sz="1050">
+                          <a:latin typeface="Courier New" panose="02070309020205020404" pitchFamily="49" charset="0"/>
+                        </a:rPr>
+                        <a:t>/upload</a:t>
+                      </a:r>
+                      <a:r>
+                        <a:rPr lang="en-US" sz="1050"/>
+                        <a:t>, </a:t>
+                      </a:r>
+                      <a:r>
+                        <a:rPr lang="en-US" sz="1050">
+                          <a:latin typeface="Courier New" panose="02070309020205020404" pitchFamily="49" charset="0"/>
+                        </a:rPr>
+                        <a:t>/edit</a:t>
+                      </a:r>
+                      <a:r>
+                        <a:rPr lang="en-US" sz="1050"/>
+                        <a:t>) for data handling</a:t>
+                      </a:r>
+                    </a:p>
+                  </a:txBody>
+                  <a:tcPr marL="37642" marR="37642" marT="18821" marB="18821" anchor="ctr">
+                    <a:lnL>
+                      <a:noFill/>
+                    </a:lnL>
+                    <a:lnR>
+                      <a:noFill/>
+                    </a:lnR>
+                    <a:lnT>
+                      <a:noFill/>
+                    </a:lnT>
+                    <a:lnB>
+                      <a:noFill/>
+                    </a:lnB>
+                    <a:noFill/>
+                  </a:tcPr>
+                </a:tc>
+                <a:extLst>
+                  <a:ext uri="{0D108BD9-81ED-4DB2-BD59-A6C34878D82A}">
+                    <a16:rowId xmlns:a16="http://schemas.microsoft.com/office/drawing/2014/main" val="54683705"/>
+                  </a:ext>
+                </a:extLst>
+              </a:tr>
+              <a:tr h="340929">
+                <a:tc>
+                  <a:txBody>
+                    <a:bodyPr/>
+                    <a:lstStyle/>
+                    <a:p>
+                      <a:pPr>
+                        <a:buNone/>
+                      </a:pPr>
+                      <a:endParaRPr lang="en-IN" sz="1050"/>
+                    </a:p>
+                  </a:txBody>
+                  <a:tcPr marL="37642" marR="37642" marT="18821" marB="18821" anchor="ctr">
+                    <a:lnL>
+                      <a:noFill/>
+                    </a:lnL>
+                    <a:lnR>
+                      <a:noFill/>
+                    </a:lnR>
+                    <a:lnT>
+                      <a:noFill/>
+                    </a:lnT>
+                    <a:lnB>
+                      <a:noFill/>
+                    </a:lnB>
+                    <a:noFill/>
+                  </a:tcPr>
+                </a:tc>
+                <a:tc>
+                  <a:txBody>
+                    <a:bodyPr/>
+                    <a:lstStyle/>
+                    <a:p>
+                      <a:pPr>
+                        <a:buNone/>
+                      </a:pPr>
+                      <a:r>
+                        <a:rPr lang="en-IN" sz="1050" dirty="0"/>
+                        <a:t>Session Management</a:t>
+                      </a:r>
+                    </a:p>
+                  </a:txBody>
+                  <a:tcPr marL="37642" marR="37642" marT="18821" marB="18821" anchor="ctr">
+                    <a:lnL>
+                      <a:noFill/>
+                    </a:lnL>
+                    <a:lnR>
+                      <a:noFill/>
+                    </a:lnR>
+                    <a:lnT>
+                      <a:noFill/>
+                    </a:lnT>
+                    <a:lnB>
+                      <a:noFill/>
+                    </a:lnB>
+                    <a:noFill/>
+                  </a:tcPr>
+                </a:tc>
+                <a:tc>
+                  <a:txBody>
+                    <a:bodyPr/>
+                    <a:lstStyle/>
+                    <a:p>
+                      <a:pPr>
+                        <a:buNone/>
+                      </a:pPr>
+                      <a:r>
+                        <a:rPr lang="en-IN" sz="1050"/>
+                        <a:t>SQLite integrated for persistent storage &amp; student record handling</a:t>
+                      </a:r>
+                    </a:p>
+                  </a:txBody>
+                  <a:tcPr marL="37642" marR="37642" marT="18821" marB="18821" anchor="ctr">
+                    <a:lnL>
+                      <a:noFill/>
+                    </a:lnL>
+                    <a:lnR>
+                      <a:noFill/>
+                    </a:lnR>
+                    <a:lnT>
+                      <a:noFill/>
+                    </a:lnT>
+                    <a:lnB>
+                      <a:noFill/>
+                    </a:lnB>
+                    <a:noFill/>
+                  </a:tcPr>
+                </a:tc>
+                <a:extLst>
+                  <a:ext uri="{0D108BD9-81ED-4DB2-BD59-A6C34878D82A}">
+                    <a16:rowId xmlns:a16="http://schemas.microsoft.com/office/drawing/2014/main" val="1150696328"/>
+                  </a:ext>
+                </a:extLst>
+              </a:tr>
+              <a:tr h="340929">
+                <a:tc>
+                  <a:txBody>
+                    <a:bodyPr/>
+                    <a:lstStyle/>
+                    <a:p>
+                      <a:pPr>
+                        <a:buNone/>
+                      </a:pPr>
+                      <a:r>
+                        <a:rPr lang="en-IN" sz="1050" b="1"/>
+                        <a:t>Core Analytics Engine</a:t>
+                      </a:r>
+                      <a:endParaRPr lang="en-IN" sz="1050"/>
+                    </a:p>
+                  </a:txBody>
+                  <a:tcPr marL="37642" marR="37642" marT="18821" marB="18821" anchor="ctr">
+                    <a:lnL>
+                      <a:noFill/>
+                    </a:lnL>
+                    <a:lnR>
+                      <a:noFill/>
+                    </a:lnR>
+                    <a:lnT>
+                      <a:noFill/>
+                    </a:lnT>
+                    <a:lnB>
+                      <a:noFill/>
+                    </a:lnB>
+                    <a:noFill/>
+                  </a:tcPr>
+                </a:tc>
+                <a:tc>
+                  <a:txBody>
+                    <a:bodyPr/>
+                    <a:lstStyle/>
+                    <a:p>
+                      <a:pPr>
+                        <a:buNone/>
+                      </a:pPr>
+                      <a:r>
+                        <a:rPr lang="en-IN" sz="1050"/>
+                        <a:t>Burnout Quantification</a:t>
+                      </a:r>
+                    </a:p>
+                  </a:txBody>
+                  <a:tcPr marL="37642" marR="37642" marT="18821" marB="18821" anchor="ctr">
+                    <a:lnL>
+                      <a:noFill/>
+                    </a:lnL>
+                    <a:lnR>
+                      <a:noFill/>
+                    </a:lnR>
+                    <a:lnT>
+                      <a:noFill/>
+                    </a:lnT>
+                    <a:lnB>
+                      <a:noFill/>
+                    </a:lnB>
+                    <a:noFill/>
+                  </a:tcPr>
+                </a:tc>
+                <a:tc>
+                  <a:txBody>
+                    <a:bodyPr/>
+                    <a:lstStyle/>
+                    <a:p>
+                      <a:pPr>
+                        <a:buNone/>
+                      </a:pPr>
+                      <a:r>
+                        <a:rPr lang="en-US" sz="1050"/>
+                        <a:t>Burnout Score formula implemented for risk evaluation</a:t>
+                      </a:r>
+                    </a:p>
+                  </a:txBody>
+                  <a:tcPr marL="37642" marR="37642" marT="18821" marB="18821" anchor="ctr">
+                    <a:lnL>
+                      <a:noFill/>
+                    </a:lnL>
+                    <a:lnR>
+                      <a:noFill/>
+                    </a:lnR>
+                    <a:lnT>
+                      <a:noFill/>
+                    </a:lnT>
+                    <a:lnB>
+                      <a:noFill/>
+                    </a:lnB>
+                    <a:noFill/>
+                  </a:tcPr>
+                </a:tc>
+                <a:extLst>
+                  <a:ext uri="{0D108BD9-81ED-4DB2-BD59-A6C34878D82A}">
+                    <a16:rowId xmlns:a16="http://schemas.microsoft.com/office/drawing/2014/main" val="504287607"/>
+                  </a:ext>
+                </a:extLst>
+              </a:tr>
+              <a:tr h="372866">
+                <a:tc>
+                  <a:txBody>
+                    <a:bodyPr/>
+                    <a:lstStyle/>
+                    <a:p>
+                      <a:pPr>
+                        <a:buNone/>
+                      </a:pPr>
+                      <a:endParaRPr lang="en-IN" sz="1050"/>
+                    </a:p>
+                  </a:txBody>
+                  <a:tcPr marL="37642" marR="37642" marT="18821" marB="18821" anchor="ctr">
+                    <a:lnL>
+                      <a:noFill/>
+                    </a:lnL>
+                    <a:lnR>
+                      <a:noFill/>
+                    </a:lnR>
+                    <a:lnT>
+                      <a:noFill/>
+                    </a:lnT>
+                    <a:lnB>
+                      <a:noFill/>
+                    </a:lnB>
+                    <a:noFill/>
+                  </a:tcPr>
+                </a:tc>
+                <a:tc>
+                  <a:txBody>
+                    <a:bodyPr/>
+                    <a:lstStyle/>
+                    <a:p>
+                      <a:pPr>
+                        <a:buNone/>
+                      </a:pPr>
+                      <a:r>
+                        <a:rPr lang="en-IN" sz="1050"/>
+                        <a:t>Data Pre-processing</a:t>
+                      </a:r>
+                    </a:p>
+                  </a:txBody>
+                  <a:tcPr marL="37642" marR="37642" marT="18821" marB="18821" anchor="ctr">
+                    <a:lnL>
+                      <a:noFill/>
+                    </a:lnL>
+                    <a:lnR>
+                      <a:noFill/>
+                    </a:lnR>
+                    <a:lnT>
+                      <a:noFill/>
+                    </a:lnT>
+                    <a:lnB>
+                      <a:noFill/>
+                    </a:lnB>
+                    <a:noFill/>
+                  </a:tcPr>
+                </a:tc>
+                <a:tc>
+                  <a:txBody>
+                    <a:bodyPr/>
+                    <a:lstStyle/>
+                    <a:p>
+                      <a:pPr>
+                        <a:buNone/>
+                      </a:pPr>
+                      <a:r>
+                        <a:rPr lang="en-IN" sz="1050"/>
+                        <a:t>Pandas/NumPy pipeline: missing values handled, stress levels normalized (1–10)</a:t>
+                      </a:r>
+                    </a:p>
+                  </a:txBody>
+                  <a:tcPr marL="37642" marR="37642" marT="18821" marB="18821" anchor="ctr">
+                    <a:lnL>
+                      <a:noFill/>
+                    </a:lnL>
+                    <a:lnR>
+                      <a:noFill/>
+                    </a:lnR>
+                    <a:lnT>
+                      <a:noFill/>
+                    </a:lnT>
+                    <a:lnB>
+                      <a:noFill/>
+                    </a:lnB>
+                    <a:noFill/>
+                  </a:tcPr>
+                </a:tc>
+                <a:extLst>
+                  <a:ext uri="{0D108BD9-81ED-4DB2-BD59-A6C34878D82A}">
+                    <a16:rowId xmlns:a16="http://schemas.microsoft.com/office/drawing/2014/main" val="1416051049"/>
+                  </a:ext>
+                </a:extLst>
+              </a:tr>
+              <a:tr h="340929">
+                <a:tc>
+                  <a:txBody>
+                    <a:bodyPr/>
+                    <a:lstStyle/>
+                    <a:p>
+                      <a:pPr>
+                        <a:buNone/>
+                      </a:pPr>
+                      <a:r>
+                        <a:rPr lang="en-IN" sz="1050" b="1"/>
+                        <a:t>NLP Module</a:t>
+                      </a:r>
+                      <a:endParaRPr lang="en-IN" sz="1050"/>
+                    </a:p>
+                  </a:txBody>
+                  <a:tcPr marL="37642" marR="37642" marT="18821" marB="18821" anchor="ctr">
+                    <a:lnL>
+                      <a:noFill/>
+                    </a:lnL>
+                    <a:lnR>
+                      <a:noFill/>
+                    </a:lnR>
+                    <a:lnT>
+                      <a:noFill/>
+                    </a:lnT>
+                    <a:lnB>
+                      <a:noFill/>
+                    </a:lnB>
+                    <a:noFill/>
+                  </a:tcPr>
+                </a:tc>
+                <a:tc>
+                  <a:txBody>
+                    <a:bodyPr/>
+                    <a:lstStyle/>
+                    <a:p>
+                      <a:pPr>
+                        <a:buNone/>
+                      </a:pPr>
+                      <a:r>
+                        <a:rPr lang="en-IN" sz="1050"/>
+                        <a:t>Sentiment Analysis</a:t>
+                      </a:r>
+                    </a:p>
+                  </a:txBody>
+                  <a:tcPr marL="37642" marR="37642" marT="18821" marB="18821" anchor="ctr">
+                    <a:lnL>
+                      <a:noFill/>
+                    </a:lnL>
+                    <a:lnR>
+                      <a:noFill/>
+                    </a:lnR>
+                    <a:lnT>
+                      <a:noFill/>
+                    </a:lnT>
+                    <a:lnB>
+                      <a:noFill/>
+                    </a:lnB>
+                    <a:noFill/>
+                  </a:tcPr>
+                </a:tc>
+                <a:tc>
+                  <a:txBody>
+                    <a:bodyPr/>
+                    <a:lstStyle/>
+                    <a:p>
+                      <a:pPr>
+                        <a:buNone/>
+                      </a:pPr>
+                      <a:r>
+                        <a:rPr lang="en-IN" sz="1050"/>
+                        <a:t>Integrated NLTK VADER for processing student feedback</a:t>
+                      </a:r>
+                    </a:p>
+                  </a:txBody>
+                  <a:tcPr marL="37642" marR="37642" marT="18821" marB="18821" anchor="ctr">
+                    <a:lnL>
+                      <a:noFill/>
+                    </a:lnL>
+                    <a:lnR>
+                      <a:noFill/>
+                    </a:lnR>
+                    <a:lnT>
+                      <a:noFill/>
+                    </a:lnT>
+                    <a:lnB>
+                      <a:noFill/>
+                    </a:lnB>
+                    <a:noFill/>
+                  </a:tcPr>
+                </a:tc>
+                <a:extLst>
+                  <a:ext uri="{0D108BD9-81ED-4DB2-BD59-A6C34878D82A}">
+                    <a16:rowId xmlns:a16="http://schemas.microsoft.com/office/drawing/2014/main" val="3115110355"/>
+                  </a:ext>
+                </a:extLst>
+              </a:tr>
+              <a:tr h="372866">
+                <a:tc>
+                  <a:txBody>
+                    <a:bodyPr/>
+                    <a:lstStyle/>
+                    <a:p>
+                      <a:pPr>
+                        <a:buNone/>
+                      </a:pPr>
+                      <a:endParaRPr lang="en-IN" sz="1050"/>
+                    </a:p>
+                  </a:txBody>
+                  <a:tcPr marL="37642" marR="37642" marT="18821" marB="18821" anchor="ctr">
+                    <a:lnL>
+                      <a:noFill/>
+                    </a:lnL>
+                    <a:lnR>
+                      <a:noFill/>
+                    </a:lnR>
+                    <a:lnT>
+                      <a:noFill/>
+                    </a:lnT>
+                    <a:lnB>
+                      <a:noFill/>
+                    </a:lnB>
+                    <a:noFill/>
+                  </a:tcPr>
+                </a:tc>
+                <a:tc>
+                  <a:txBody>
+                    <a:bodyPr/>
+                    <a:lstStyle/>
+                    <a:p>
+                      <a:pPr>
+                        <a:buNone/>
+                      </a:pPr>
+                      <a:r>
+                        <a:rPr lang="en-IN" sz="1050"/>
+                        <a:t>Risk Correlation</a:t>
+                      </a:r>
+                    </a:p>
+                  </a:txBody>
+                  <a:tcPr marL="37642" marR="37642" marT="18821" marB="18821" anchor="ctr">
+                    <a:lnL>
+                      <a:noFill/>
+                    </a:lnL>
+                    <a:lnR>
+                      <a:noFill/>
+                    </a:lnR>
+                    <a:lnT>
+                      <a:noFill/>
+                    </a:lnT>
+                    <a:lnB>
+                      <a:noFill/>
+                    </a:lnB>
+                    <a:noFill/>
+                  </a:tcPr>
+                </a:tc>
+                <a:tc>
+                  <a:txBody>
+                    <a:bodyPr/>
+                    <a:lstStyle/>
+                    <a:p>
+                      <a:pPr>
+                        <a:buNone/>
+                      </a:pPr>
+                      <a:r>
+                        <a:rPr lang="en-US" sz="1050"/>
+                        <a:t>Linked Mood Scores (-1 to +1) with Burnout Scores to detect hidden risk cases</a:t>
+                      </a:r>
+                    </a:p>
+                  </a:txBody>
+                  <a:tcPr marL="37642" marR="37642" marT="18821" marB="18821" anchor="ctr">
+                    <a:lnL>
+                      <a:noFill/>
+                    </a:lnL>
+                    <a:lnR>
+                      <a:noFill/>
+                    </a:lnR>
+                    <a:lnT>
+                      <a:noFill/>
+                    </a:lnT>
+                    <a:lnB>
+                      <a:noFill/>
+                    </a:lnB>
+                    <a:noFill/>
+                  </a:tcPr>
+                </a:tc>
+                <a:extLst>
+                  <a:ext uri="{0D108BD9-81ED-4DB2-BD59-A6C34878D82A}">
+                    <a16:rowId xmlns:a16="http://schemas.microsoft.com/office/drawing/2014/main" val="3789033381"/>
+                  </a:ext>
+                </a:extLst>
+              </a:tr>
+              <a:tr h="340929">
+                <a:tc>
+                  <a:txBody>
+                    <a:bodyPr/>
+                    <a:lstStyle/>
+                    <a:p>
+                      <a:pPr>
+                        <a:buNone/>
+                      </a:pPr>
+                      <a:r>
+                        <a:rPr lang="en-IN" sz="1050" b="1"/>
+                        <a:t>Frontend &amp; Visualization</a:t>
+                      </a:r>
+                      <a:endParaRPr lang="en-IN" sz="1050"/>
+                    </a:p>
+                  </a:txBody>
+                  <a:tcPr marL="37642" marR="37642" marT="18821" marB="18821" anchor="ctr">
+                    <a:lnL>
+                      <a:noFill/>
+                    </a:lnL>
+                    <a:lnR>
+                      <a:noFill/>
+                    </a:lnR>
+                    <a:lnT>
+                      <a:noFill/>
+                    </a:lnT>
+                    <a:lnB>
+                      <a:noFill/>
+                    </a:lnB>
+                    <a:noFill/>
+                  </a:tcPr>
+                </a:tc>
+                <a:tc>
+                  <a:txBody>
+                    <a:bodyPr/>
+                    <a:lstStyle/>
+                    <a:p>
+                      <a:pPr>
+                        <a:buNone/>
+                      </a:pPr>
+                      <a:r>
+                        <a:rPr lang="en-IN" sz="1050" dirty="0"/>
+                        <a:t>UI Design</a:t>
+                      </a:r>
+                    </a:p>
+                  </a:txBody>
+                  <a:tcPr marL="37642" marR="37642" marT="18821" marB="18821" anchor="ctr">
+                    <a:lnL>
+                      <a:noFill/>
+                    </a:lnL>
+                    <a:lnR>
+                      <a:noFill/>
+                    </a:lnR>
+                    <a:lnT>
+                      <a:noFill/>
+                    </a:lnT>
+                    <a:lnB>
+                      <a:noFill/>
+                    </a:lnB>
+                    <a:noFill/>
+                  </a:tcPr>
+                </a:tc>
+                <a:tc>
+                  <a:txBody>
+                    <a:bodyPr/>
+                    <a:lstStyle/>
+                    <a:p>
+                      <a:pPr>
+                        <a:buNone/>
+                      </a:pPr>
+                      <a:r>
+                        <a:rPr lang="en-US" sz="1050"/>
+                        <a:t>Responsive HTML/CSS interface with upload &amp; live editing features</a:t>
+                      </a:r>
+                    </a:p>
+                  </a:txBody>
+                  <a:tcPr marL="37642" marR="37642" marT="18821" marB="18821" anchor="ctr">
+                    <a:lnL>
+                      <a:noFill/>
+                    </a:lnL>
+                    <a:lnR>
+                      <a:noFill/>
+                    </a:lnR>
+                    <a:lnT>
+                      <a:noFill/>
+                    </a:lnT>
+                    <a:lnB>
+                      <a:noFill/>
+                    </a:lnB>
+                    <a:noFill/>
+                  </a:tcPr>
+                </a:tc>
+                <a:extLst>
+                  <a:ext uri="{0D108BD9-81ED-4DB2-BD59-A6C34878D82A}">
+                    <a16:rowId xmlns:a16="http://schemas.microsoft.com/office/drawing/2014/main" val="3915908006"/>
+                  </a:ext>
+                </a:extLst>
+              </a:tr>
+              <a:tr h="372866">
+                <a:tc>
+                  <a:txBody>
+                    <a:bodyPr/>
+                    <a:lstStyle/>
+                    <a:p>
+                      <a:pPr>
+                        <a:buNone/>
+                      </a:pPr>
+                      <a:endParaRPr lang="en-IN" sz="1050"/>
+                    </a:p>
+                  </a:txBody>
+                  <a:tcPr marL="37642" marR="37642" marT="18821" marB="18821" anchor="ctr">
+                    <a:lnL>
+                      <a:noFill/>
+                    </a:lnL>
+                    <a:lnR>
+                      <a:noFill/>
+                    </a:lnR>
+                    <a:lnT>
+                      <a:noFill/>
+                    </a:lnT>
+                    <a:lnB>
+                      <a:noFill/>
+                    </a:lnB>
+                    <a:noFill/>
+                  </a:tcPr>
+                </a:tc>
+                <a:tc>
+                  <a:txBody>
+                    <a:bodyPr/>
+                    <a:lstStyle/>
+                    <a:p>
+                      <a:pPr>
+                        <a:buNone/>
+                      </a:pPr>
+                      <a:r>
+                        <a:rPr lang="en-IN" sz="1050"/>
+                        <a:t>Dashboard</a:t>
+                      </a:r>
+                    </a:p>
+                  </a:txBody>
+                  <a:tcPr marL="37642" marR="37642" marT="18821" marB="18821" anchor="ctr">
+                    <a:lnL>
+                      <a:noFill/>
+                    </a:lnL>
+                    <a:lnR>
+                      <a:noFill/>
+                    </a:lnR>
+                    <a:lnT>
+                      <a:noFill/>
+                    </a:lnT>
+                    <a:lnB>
+                      <a:noFill/>
+                    </a:lnB>
+                    <a:noFill/>
+                  </a:tcPr>
+                </a:tc>
+                <a:tc>
+                  <a:txBody>
+                    <a:bodyPr/>
+                    <a:lstStyle/>
+                    <a:p>
+                      <a:pPr>
+                        <a:buNone/>
+                      </a:pPr>
+                      <a:r>
+                        <a:rPr lang="en-US" sz="1050"/>
+                        <a:t>Real-time charts (heatmaps, histograms, pie charts) using Matplotlib/Chart.js</a:t>
+                      </a:r>
+                    </a:p>
+                  </a:txBody>
+                  <a:tcPr marL="37642" marR="37642" marT="18821" marB="18821" anchor="ctr">
+                    <a:lnL>
+                      <a:noFill/>
+                    </a:lnL>
+                    <a:lnR>
+                      <a:noFill/>
+                    </a:lnR>
+                    <a:lnT>
+                      <a:noFill/>
+                    </a:lnT>
+                    <a:lnB>
+                      <a:noFill/>
+                    </a:lnB>
+                    <a:noFill/>
+                  </a:tcPr>
+                </a:tc>
+                <a:extLst>
+                  <a:ext uri="{0D108BD9-81ED-4DB2-BD59-A6C34878D82A}">
+                    <a16:rowId xmlns:a16="http://schemas.microsoft.com/office/drawing/2014/main" val="2495612507"/>
+                  </a:ext>
+                </a:extLst>
+              </a:tr>
+              <a:tr h="340929">
+                <a:tc>
+                  <a:txBody>
+                    <a:bodyPr/>
+                    <a:lstStyle/>
+                    <a:p>
+                      <a:pPr>
+                        <a:buNone/>
+                      </a:pPr>
+                      <a:r>
+                        <a:rPr lang="en-IN" sz="1050" b="1"/>
+                        <a:t>QA &amp; Documentation</a:t>
+                      </a:r>
+                      <a:endParaRPr lang="en-IN" sz="1050"/>
+                    </a:p>
+                  </a:txBody>
+                  <a:tcPr marL="37642" marR="37642" marT="18821" marB="18821" anchor="ctr">
+                    <a:lnL>
+                      <a:noFill/>
+                    </a:lnL>
+                    <a:lnR>
+                      <a:noFill/>
+                    </a:lnR>
+                    <a:lnT>
+                      <a:noFill/>
+                    </a:lnT>
+                    <a:lnB>
+                      <a:noFill/>
+                    </a:lnB>
+                    <a:noFill/>
+                  </a:tcPr>
+                </a:tc>
+                <a:tc>
+                  <a:txBody>
+                    <a:bodyPr/>
+                    <a:lstStyle/>
+                    <a:p>
+                      <a:pPr>
+                        <a:buNone/>
+                      </a:pPr>
+                      <a:r>
+                        <a:rPr lang="en-IN" sz="1050"/>
+                        <a:t>Testing</a:t>
+                      </a:r>
+                    </a:p>
+                  </a:txBody>
+                  <a:tcPr marL="37642" marR="37642" marT="18821" marB="18821" anchor="ctr">
+                    <a:lnL>
+                      <a:noFill/>
+                    </a:lnL>
+                    <a:lnR>
+                      <a:noFill/>
+                    </a:lnR>
+                    <a:lnT>
+                      <a:noFill/>
+                    </a:lnT>
+                    <a:lnB>
+                      <a:noFill/>
+                    </a:lnB>
+                    <a:noFill/>
+                  </a:tcPr>
+                </a:tc>
+                <a:tc>
+                  <a:txBody>
+                    <a:bodyPr/>
+                    <a:lstStyle/>
+                    <a:p>
+                      <a:pPr>
+                        <a:buNone/>
+                      </a:pPr>
+                      <a:r>
+                        <a:rPr lang="en-US" sz="1050"/>
+                        <a:t>Debugged CRUD operations ensuring data integrity</a:t>
+                      </a:r>
+                    </a:p>
+                  </a:txBody>
+                  <a:tcPr marL="37642" marR="37642" marT="18821" marB="18821" anchor="ctr">
+                    <a:lnL>
+                      <a:noFill/>
+                    </a:lnL>
+                    <a:lnR>
+                      <a:noFill/>
+                    </a:lnR>
+                    <a:lnT>
+                      <a:noFill/>
+                    </a:lnT>
+                    <a:lnB>
+                      <a:noFill/>
+                    </a:lnB>
+                    <a:noFill/>
+                  </a:tcPr>
+                </a:tc>
+                <a:extLst>
+                  <a:ext uri="{0D108BD9-81ED-4DB2-BD59-A6C34878D82A}">
+                    <a16:rowId xmlns:a16="http://schemas.microsoft.com/office/drawing/2014/main" val="2721017222"/>
+                  </a:ext>
+                </a:extLst>
+              </a:tr>
+              <a:tr h="340929">
+                <a:tc>
+                  <a:txBody>
+                    <a:bodyPr/>
+                    <a:lstStyle/>
+                    <a:p>
+                      <a:pPr>
+                        <a:buNone/>
+                      </a:pPr>
+                      <a:endParaRPr lang="en-IN" sz="1050"/>
+                    </a:p>
+                  </a:txBody>
+                  <a:tcPr marL="37642" marR="37642" marT="18821" marB="18821" anchor="ctr">
+                    <a:lnL>
+                      <a:noFill/>
+                    </a:lnL>
+                    <a:lnR>
+                      <a:noFill/>
+                    </a:lnR>
+                    <a:lnT>
+                      <a:noFill/>
+                    </a:lnT>
+                    <a:lnB>
+                      <a:noFill/>
+                    </a:lnB>
+                    <a:noFill/>
+                  </a:tcPr>
+                </a:tc>
+                <a:tc>
+                  <a:txBody>
+                    <a:bodyPr/>
+                    <a:lstStyle/>
+                    <a:p>
+                      <a:pPr>
+                        <a:buNone/>
+                      </a:pPr>
+                      <a:r>
+                        <a:rPr lang="en-IN" sz="1050"/>
+                        <a:t>Documentation</a:t>
+                      </a:r>
+                    </a:p>
+                  </a:txBody>
+                  <a:tcPr marL="37642" marR="37642" marT="18821" marB="18821" anchor="ctr">
+                    <a:lnL>
+                      <a:noFill/>
+                    </a:lnL>
+                    <a:lnR>
+                      <a:noFill/>
+                    </a:lnR>
+                    <a:lnT>
+                      <a:noFill/>
+                    </a:lnT>
+                    <a:lnB>
+                      <a:noFill/>
+                    </a:lnB>
+                    <a:noFill/>
+                  </a:tcPr>
+                </a:tc>
+                <a:tc>
+                  <a:txBody>
+                    <a:bodyPr/>
+                    <a:lstStyle/>
+                    <a:p>
+                      <a:pPr>
+                        <a:buNone/>
+                      </a:pPr>
+                      <a:r>
+                        <a:rPr lang="en-US" sz="1050" dirty="0"/>
+                        <a:t>Completed synopsis &amp; initial README with architecture details</a:t>
+                      </a:r>
+                    </a:p>
+                  </a:txBody>
+                  <a:tcPr marL="37642" marR="37642" marT="18821" marB="18821" anchor="ctr">
+                    <a:lnL>
+                      <a:noFill/>
+                    </a:lnL>
+                    <a:lnR>
+                      <a:noFill/>
+                    </a:lnR>
+                    <a:lnT>
+                      <a:noFill/>
+                    </a:lnT>
+                    <a:lnB>
+                      <a:noFill/>
+                    </a:lnB>
+                    <a:noFill/>
+                  </a:tcPr>
+                </a:tc>
+                <a:extLst>
+                  <a:ext uri="{0D108BD9-81ED-4DB2-BD59-A6C34878D82A}">
+                    <a16:rowId xmlns:a16="http://schemas.microsoft.com/office/drawing/2014/main" val="185367423"/>
+                  </a:ext>
+                </a:extLst>
+              </a:tr>
+            </a:tbl>
+          </a:graphicData>
+        </a:graphic>
+      </p:graphicFrame>
     </p:spTree>
+    <p:extLst>
+      <p:ext uri="{BB962C8B-B14F-4D97-AF65-F5344CB8AC3E}">
+        <p14:creationId xmlns:p14="http://schemas.microsoft.com/office/powerpoint/2010/main" val="1478815585"/>
+      </p:ext>
+    </p:extLst>
   </p:cSld>
   <p:clrMapOvr>
     <a:masterClrMapping/>
@@ -23118,7 +26694,7 @@
   <p:cSld>
     <p:spTree>
       <p:nvGrpSpPr>
-        <p:cNvPr id="1" name="Shape 215"/>
+        <p:cNvPr id="1" name="Shape 227"/>
         <p:cNvGrpSpPr/>
         <p:nvPr/>
       </p:nvGrpSpPr>
@@ -23132,7 +26708,7 @@
       </p:grpSpPr>
       <p:sp>
         <p:nvSpPr>
-          <p:cNvPr id="216" name="Google Shape;216;p32"/>
+          <p:cNvPr id="228" name="Google Shape;228;p33"/>
           <p:cNvSpPr/>
           <p:nvPr/>
         </p:nvSpPr>
@@ -23180,7 +26756,7 @@
       </p:sp>
       <p:sp>
         <p:nvSpPr>
-          <p:cNvPr id="217" name="Google Shape;217;p32"/>
+          <p:cNvPr id="229" name="Google Shape;229;p33"/>
           <p:cNvSpPr/>
           <p:nvPr/>
         </p:nvSpPr>
@@ -23228,7 +26804,7 @@
       </p:sp>
       <p:sp>
         <p:nvSpPr>
-          <p:cNvPr id="218" name="Google Shape;218;p32"/>
+          <p:cNvPr id="230" name="Google Shape;230;p33"/>
           <p:cNvSpPr/>
           <p:nvPr/>
         </p:nvSpPr>
@@ -23276,7 +26852,7 @@
       </p:sp>
       <p:sp>
         <p:nvSpPr>
-          <p:cNvPr id="219" name="Google Shape;219;p32"/>
+          <p:cNvPr id="231" name="Google Shape;231;p33"/>
           <p:cNvSpPr/>
           <p:nvPr/>
         </p:nvSpPr>
@@ -23324,7 +26900,7 @@
       </p:sp>
       <p:sp>
         <p:nvSpPr>
-          <p:cNvPr id="220" name="Google Shape;220;p32"/>
+          <p:cNvPr id="232" name="Google Shape;232;p33"/>
           <p:cNvSpPr/>
           <p:nvPr/>
         </p:nvSpPr>
@@ -23372,7 +26948,7 @@
       </p:sp>
       <p:sp>
         <p:nvSpPr>
-          <p:cNvPr id="221" name="Google Shape;221;p32"/>
+          <p:cNvPr id="233" name="Google Shape;233;p33"/>
           <p:cNvSpPr txBox="1"/>
           <p:nvPr/>
         </p:nvSpPr>
@@ -23414,7 +26990,7 @@
                 <a:cs typeface="Times New Roman"/>
                 <a:sym typeface="Times New Roman"/>
               </a:rPr>
-              <a:t>Data and Resources</a:t>
+              <a:t>Methodology</a:t>
             </a:r>
             <a:endParaRPr sz="3000" b="1">
               <a:solidFill>
@@ -23430,7 +27006,7 @@
       </p:sp>
       <p:sp>
         <p:nvSpPr>
-          <p:cNvPr id="222" name="Google Shape;222;p32"/>
+          <p:cNvPr id="234" name="Google Shape;234;p33"/>
           <p:cNvSpPr txBox="1"/>
           <p:nvPr/>
         </p:nvSpPr>
@@ -23468,7 +27044,7 @@
                   <a:schemeClr val="lt1"/>
                 </a:solidFill>
               </a:rPr>
-              <a:t>7</a:t>
+              <a:t>8</a:t>
             </a:r>
             <a:endParaRPr sz="1400">
               <a:solidFill>
@@ -23484,10 +27060,10 @@
       </p:sp>
       <p:sp>
         <p:nvSpPr>
-          <p:cNvPr id="7" name="Rectangle 1">
+          <p:cNvPr id="3" name="Rectangle 1">
             <a:extLst>
               <a:ext uri="{FF2B5EF4-FFF2-40B4-BE49-F238E27FC236}">
-                <a16:creationId xmlns:a16="http://schemas.microsoft.com/office/drawing/2014/main" id="{FCE34896-846B-F642-4FDB-F0A56C11B6FE}"/>
+                <a16:creationId xmlns:a16="http://schemas.microsoft.com/office/drawing/2014/main" id="{C1937573-DF9F-FF56-D613-AC1B37C9818C}"/>
               </a:ext>
             </a:extLst>
           </p:cNvPr>
@@ -23498,8 +27074,8 @@
         </p:nvSpPr>
         <p:spPr bwMode="auto">
           <a:xfrm>
-            <a:off x="553640" y="1291803"/>
-            <a:ext cx="8125540" cy="3139321"/>
+            <a:off x="365385" y="1053155"/>
+            <a:ext cx="8515350" cy="3462486"/>
           </a:xfrm>
           <a:prstGeom prst="rect">
             <a:avLst/>
@@ -23539,7 +27115,7 @@
           </a:extLst>
         </p:spPr>
         <p:txBody>
-          <a:bodyPr vert="horz" wrap="square" lIns="91440" tIns="45720" rIns="91440" bIns="45720" numCol="1" anchor="ctr" anchorCtr="0" compatLnSpc="1">
+          <a:bodyPr vert="horz" wrap="square" lIns="91440" tIns="0" rIns="91440" bIns="45720" numCol="1" anchor="ctr" anchorCtr="0" compatLnSpc="1">
             <a:prstTxWarp prst="textNoShape">
               <a:avLst/>
             </a:prstTxWarp>
@@ -23791,15 +27367,17 @@
                 <a:solidFill>
                   <a:schemeClr val="tx1"/>
                 </a:solidFill>
-                <a:latin typeface="Arial" panose="020B0604020202020204" pitchFamily="34" charset="0"/>
+                <a:latin typeface="Times New Roman" panose="02020603050405020304" pitchFamily="18" charset="0"/>
+                <a:cs typeface="Times New Roman" panose="02020603050405020304" pitchFamily="18" charset="0"/>
               </a:rPr>
-              <a:t>Data Sources:</a:t>
+              <a:t>Tech Stack:</a:t>
             </a:r>
             <a:endParaRPr lang="en-US" altLang="en-US" sz="1800" dirty="0">
               <a:solidFill>
                 <a:schemeClr val="tx1"/>
               </a:solidFill>
-              <a:latin typeface="Arial" panose="020B0604020202020204" pitchFamily="34" charset="0"/>
+              <a:latin typeface="Times New Roman" panose="02020603050405020304" pitchFamily="18" charset="0"/>
+              <a:cs typeface="Times New Roman" panose="02020603050405020304" pitchFamily="18" charset="0"/>
             </a:endParaRPr>
           </a:p>
           <a:p>
@@ -23819,19 +27397,38 @@
                 <a:solidFill>
                   <a:schemeClr val="tx1"/>
                 </a:solidFill>
-                <a:latin typeface="Arial" panose="020B0604020202020204" pitchFamily="34" charset="0"/>
+                <a:latin typeface="Times New Roman" panose="02020603050405020304" pitchFamily="18" charset="0"/>
+                <a:cs typeface="Times New Roman" panose="02020603050405020304" pitchFamily="18" charset="0"/>
               </a:rPr>
-              <a:t>Student Stress Dataset (Kaggle):</a:t>
+              <a:t>Backend:</a:t>
             </a:r>
             <a:r>
               <a:rPr lang="en-US" altLang="en-US" sz="1800" dirty="0">
                 <a:solidFill>
                   <a:schemeClr val="tx1"/>
                 </a:solidFill>
-                <a:latin typeface="Arial" panose="020B0604020202020204" pitchFamily="34" charset="0"/>
+                <a:latin typeface="Times New Roman" panose="02020603050405020304" pitchFamily="18" charset="0"/>
+                <a:cs typeface="Times New Roman" panose="02020603050405020304" pitchFamily="18" charset="0"/>
               </a:rPr>
-              <a:t> For calibration of lifestyle metrics (Sleep, Study, Stress).</a:t>
+              <a:t> Flask (Python) - </a:t>
             </a:r>
+            <a:r>
+              <a:rPr lang="en-US" altLang="en-US" sz="1800" i="1" dirty="0">
+                <a:solidFill>
+                  <a:schemeClr val="tx1"/>
+                </a:solidFill>
+                <a:latin typeface="Times New Roman" panose="02020603050405020304" pitchFamily="18" charset="0"/>
+                <a:cs typeface="Times New Roman" panose="02020603050405020304" pitchFamily="18" charset="0"/>
+              </a:rPr>
+              <a:t>Chosen for lightweight routing.</a:t>
+            </a:r>
+            <a:endParaRPr lang="en-US" altLang="en-US" sz="1800" dirty="0">
+              <a:solidFill>
+                <a:schemeClr val="tx1"/>
+              </a:solidFill>
+              <a:latin typeface="Times New Roman" panose="02020603050405020304" pitchFamily="18" charset="0"/>
+              <a:cs typeface="Times New Roman" panose="02020603050405020304" pitchFamily="18" charset="0"/>
+            </a:endParaRPr>
           </a:p>
           <a:p>
             <a:pPr eaLnBrk="0" fontAlgn="base" hangingPunct="0">
@@ -23850,19 +27447,38 @@
                 <a:solidFill>
                   <a:schemeClr val="tx1"/>
                 </a:solidFill>
-                <a:latin typeface="Arial" panose="020B0604020202020204" pitchFamily="34" charset="0"/>
+                <a:latin typeface="Times New Roman" panose="02020603050405020304" pitchFamily="18" charset="0"/>
+                <a:cs typeface="Times New Roman" panose="02020603050405020304" pitchFamily="18" charset="0"/>
               </a:rPr>
-              <a:t>Student Mental Health Dataset:</a:t>
+              <a:t>Analytics:</a:t>
             </a:r>
             <a:r>
               <a:rPr lang="en-US" altLang="en-US" sz="1800" dirty="0">
                 <a:solidFill>
                   <a:schemeClr val="tx1"/>
                 </a:solidFill>
-                <a:latin typeface="Arial" panose="020B0604020202020204" pitchFamily="34" charset="0"/>
+                <a:latin typeface="Times New Roman" panose="02020603050405020304" pitchFamily="18" charset="0"/>
+                <a:cs typeface="Times New Roman" panose="02020603050405020304" pitchFamily="18" charset="0"/>
               </a:rPr>
-              <a:t> For validating risk factors.</a:t>
+              <a:t> Pandas &amp; NumPy - </a:t>
             </a:r>
+            <a:r>
+              <a:rPr lang="en-US" altLang="en-US" sz="1800" i="1" dirty="0">
+                <a:solidFill>
+                  <a:schemeClr val="tx1"/>
+                </a:solidFill>
+                <a:latin typeface="Times New Roman" panose="02020603050405020304" pitchFamily="18" charset="0"/>
+                <a:cs typeface="Times New Roman" panose="02020603050405020304" pitchFamily="18" charset="0"/>
+              </a:rPr>
+              <a:t>Chosen for vectorized data cleaning.</a:t>
+            </a:r>
+            <a:endParaRPr lang="en-US" altLang="en-US" sz="1800" dirty="0">
+              <a:solidFill>
+                <a:schemeClr val="tx1"/>
+              </a:solidFill>
+              <a:latin typeface="Times New Roman" panose="02020603050405020304" pitchFamily="18" charset="0"/>
+              <a:cs typeface="Times New Roman" panose="02020603050405020304" pitchFamily="18" charset="0"/>
+            </a:endParaRPr>
           </a:p>
           <a:p>
             <a:pPr eaLnBrk="0" fontAlgn="base" hangingPunct="0">
@@ -23881,19 +27497,58 @@
                 <a:solidFill>
                   <a:schemeClr val="tx1"/>
                 </a:solidFill>
-                <a:latin typeface="Arial" panose="020B0604020202020204" pitchFamily="34" charset="0"/>
+                <a:latin typeface="Times New Roman" panose="02020603050405020304" pitchFamily="18" charset="0"/>
+                <a:cs typeface="Times New Roman" panose="02020603050405020304" pitchFamily="18" charset="0"/>
               </a:rPr>
-              <a:t>Reddit Mental Health Text:</a:t>
+              <a:t>NLP:</a:t>
             </a:r>
             <a:r>
               <a:rPr lang="en-US" altLang="en-US" sz="1800" dirty="0">
                 <a:solidFill>
                   <a:schemeClr val="tx1"/>
                 </a:solidFill>
-                <a:latin typeface="Arial" panose="020B0604020202020204" pitchFamily="34" charset="0"/>
+                <a:latin typeface="Times New Roman" panose="02020603050405020304" pitchFamily="18" charset="0"/>
+                <a:cs typeface="Times New Roman" panose="02020603050405020304" pitchFamily="18" charset="0"/>
               </a:rPr>
-              <a:t> Used to test the VADER sentiment engine on informal language.</a:t>
+              <a:t> NLTK - Natural Language Tool Kit (VADER – Valence Aware Dictionary and </a:t>
             </a:r>
+            <a:r>
+              <a:rPr lang="en-US" altLang="en-US" sz="1800" dirty="0" err="1">
+                <a:solidFill>
+                  <a:schemeClr val="tx1"/>
+                </a:solidFill>
+                <a:latin typeface="Times New Roman" panose="02020603050405020304" pitchFamily="18" charset="0"/>
+                <a:cs typeface="Times New Roman" panose="02020603050405020304" pitchFamily="18" charset="0"/>
+              </a:rPr>
+              <a:t>sEntiment</a:t>
+            </a:r>
+            <a:r>
+              <a:rPr lang="en-US" altLang="en-US" sz="1800" dirty="0">
+                <a:solidFill>
+                  <a:schemeClr val="tx1"/>
+                </a:solidFill>
+                <a:latin typeface="Times New Roman" panose="02020603050405020304" pitchFamily="18" charset="0"/>
+                <a:cs typeface="Times New Roman" panose="02020603050405020304" pitchFamily="18" charset="0"/>
+              </a:rPr>
+              <a:t> Reasoner) - </a:t>
+            </a:r>
+            <a:r>
+              <a:rPr lang="en-US" altLang="en-US" sz="1800" i="1" dirty="0">
+                <a:solidFill>
+                  <a:schemeClr val="tx1"/>
+                </a:solidFill>
+                <a:latin typeface="Times New Roman" panose="02020603050405020304" pitchFamily="18" charset="0"/>
+                <a:cs typeface="Times New Roman" panose="02020603050405020304" pitchFamily="18" charset="0"/>
+              </a:rPr>
+              <a:t>Chosen for efficient, rule-based sentiment scoring.</a:t>
+            </a:r>
+            <a:endParaRPr lang="en-US" altLang="en-US" sz="1800" dirty="0">
+              <a:solidFill>
+                <a:schemeClr val="tx1"/>
+              </a:solidFill>
+              <a:latin typeface="Times New Roman" panose="02020603050405020304" pitchFamily="18" charset="0"/>
+              <a:cs typeface="Times New Roman" panose="02020603050405020304" pitchFamily="18" charset="0"/>
+            </a:endParaRPr>
           </a:p>
           <a:p>
             <a:pPr eaLnBrk="0" fontAlgn="base" hangingPunct="0">
@@ -23912,16 +27567,21 @@
                 <a:solidFill>
                   <a:schemeClr val="tx1"/>
                 </a:solidFill>
-                <a:latin typeface="Arial" panose="020B0604020202020204" pitchFamily="34" charset="0"/>
+                <a:latin typeface="Times New Roman" panose="02020603050405020304" pitchFamily="18" charset="0"/>
+                <a:cs typeface="Times New Roman" panose="02020603050405020304" pitchFamily="18" charset="0"/>
               </a:rPr>
-              <a:t>Hardware/Software:</a:t>
+              <a:t>Frontend:</a:t>
             </a:r>
-            <a:endParaRPr lang="en-US" altLang="en-US" sz="1800" dirty="0">
-              <a:solidFill>
-                <a:schemeClr val="tx1"/>
-              </a:solidFill>
-              <a:latin typeface="Arial" panose="020B0604020202020204" pitchFamily="34" charset="0"/>
-            </a:endParaRPr>
+            <a:r>
+              <a:rPr lang="en-US" altLang="en-US" sz="1800" dirty="0">
+                <a:solidFill>
+                  <a:schemeClr val="tx1"/>
+                </a:solidFill>
+                <a:latin typeface="Times New Roman" panose="02020603050405020304" pitchFamily="18" charset="0"/>
+                <a:cs typeface="Times New Roman" panose="02020603050405020304" pitchFamily="18" charset="0"/>
+              </a:rPr>
+              <a:t> HTML5, CSS3.</a:t>
+            </a:r>
           </a:p>
           <a:p>
             <a:pPr eaLnBrk="0" fontAlgn="base" hangingPunct="0">
@@ -23940,19 +27600,18 @@
                 <a:solidFill>
                   <a:schemeClr val="tx1"/>
                 </a:solidFill>
-                <a:latin typeface="Arial" panose="020B0604020202020204" pitchFamily="34" charset="0"/>
+                <a:latin typeface="Times New Roman" panose="02020603050405020304" pitchFamily="18" charset="0"/>
+                <a:cs typeface="Times New Roman" panose="02020603050405020304" pitchFamily="18" charset="0"/>
               </a:rPr>
-              <a:t>Language:</a:t>
+              <a:t>The Algorithm:</a:t>
             </a:r>
-            <a:r>
-              <a:rPr lang="en-US" altLang="en-US" sz="1800" dirty="0">
-                <a:solidFill>
-                  <a:schemeClr val="tx1"/>
-                </a:solidFill>
-                <a:latin typeface="Arial" panose="020B0604020202020204" pitchFamily="34" charset="0"/>
-              </a:rPr>
-              <a:t> Python 3.x</a:t>
-            </a:r>
+            <a:endParaRPr lang="en-US" altLang="en-US" sz="1800" dirty="0">
+              <a:solidFill>
+                <a:schemeClr val="tx1"/>
+              </a:solidFill>
+              <a:latin typeface="Times New Roman" panose="02020603050405020304" pitchFamily="18" charset="0"/>
+              <a:cs typeface="Times New Roman" panose="02020603050405020304" pitchFamily="18" charset="0"/>
+            </a:endParaRPr>
           </a:p>
           <a:p>
             <a:pPr eaLnBrk="0" fontAlgn="base" hangingPunct="0">
@@ -23967,23 +27626,35 @@
               <a:buChar char="•"/>
             </a:pPr>
             <a:r>
-              <a:rPr lang="en-US" altLang="en-US" sz="1800" b="1" dirty="0">
+              <a:rPr lang="en-US" altLang="en-US" sz="2000" dirty="0">
                 <a:solidFill>
                   <a:schemeClr val="tx1"/>
                 </a:solidFill>
-                <a:latin typeface="Arial" panose="020B0604020202020204" pitchFamily="34" charset="0"/>
+                <a:latin typeface="Times New Roman" panose="02020603050405020304" pitchFamily="18" charset="0"/>
+                <a:cs typeface="Times New Roman" panose="02020603050405020304" pitchFamily="18" charset="0"/>
               </a:rPr>
-              <a:t>Database:</a:t>
+              <a:t>Formula: </a:t>
             </a:r>
-            <a:r>
-              <a:rPr lang="en-US" altLang="en-US" sz="1800" dirty="0">
-                <a:solidFill>
-                  <a:schemeClr val="tx1"/>
-                </a:solidFill>
-                <a:latin typeface="Arial" panose="020B0604020202020204" pitchFamily="34" charset="0"/>
-              </a:rPr>
-              <a:t> SQLite (Session storage)</a:t>
-            </a:r>
+          </a:p>
+          <a:p>
+            <a:pPr eaLnBrk="0" fontAlgn="base" hangingPunct="0">
+              <a:spcBef>
+                <a:spcPct val="0"/>
+              </a:spcBef>
+              <a:spcAft>
+                <a:spcPct val="0"/>
+              </a:spcAft>
+              <a:buClrTx/>
+              <a:buFontTx/>
+              <a:buChar char="•"/>
+            </a:pPr>
+            <a:endParaRPr lang="en-US" altLang="en-US" sz="2000" dirty="0">
+              <a:solidFill>
+                <a:schemeClr val="tx1"/>
+              </a:solidFill>
+              <a:latin typeface="Times New Roman" panose="02020603050405020304" pitchFamily="18" charset="0"/>
+              <a:cs typeface="Times New Roman" panose="02020603050405020304" pitchFamily="18" charset="0"/>
+            </a:endParaRPr>
           </a:p>
           <a:p>
             <a:pPr eaLnBrk="0" fontAlgn="base" hangingPunct="0">
@@ -23998,22 +27669,37 @@
               <a:buChar char="•"/>
             </a:pPr>
             <a:r>
-              <a:rPr lang="en-US" altLang="en-US" sz="1800" b="1" dirty="0">
+              <a:rPr lang="en-US" altLang="en-US" sz="2000" dirty="0">
                 <a:solidFill>
                   <a:schemeClr val="tx1"/>
                 </a:solidFill>
-                <a:latin typeface="Arial" panose="020B0604020202020204" pitchFamily="34" charset="0"/>
+                <a:latin typeface="Times New Roman" panose="02020603050405020304" pitchFamily="18" charset="0"/>
+                <a:cs typeface="Times New Roman" panose="02020603050405020304" pitchFamily="18" charset="0"/>
               </a:rPr>
-              <a:t>IDE:</a:t>
+              <a:t>Burnout Score = ((Study / Sleep) * Stress) * 10$</a:t>
             </a:r>
+          </a:p>
+          <a:p>
+            <a:pPr eaLnBrk="0" fontAlgn="base" hangingPunct="0">
+              <a:spcBef>
+                <a:spcPct val="0"/>
+              </a:spcBef>
+              <a:spcAft>
+                <a:spcPct val="0"/>
+              </a:spcAft>
+              <a:buClrTx/>
+              <a:buFontTx/>
+              <a:buChar char="•"/>
+            </a:pPr>
             <a:r>
               <a:rPr lang="en-US" altLang="en-US" sz="1800" dirty="0">
                 <a:solidFill>
                   <a:schemeClr val="tx1"/>
                 </a:solidFill>
-                <a:latin typeface="Arial" panose="020B0604020202020204" pitchFamily="34" charset="0"/>
+                <a:latin typeface="Times New Roman" panose="02020603050405020304" pitchFamily="18" charset="0"/>
+                <a:cs typeface="Times New Roman" panose="02020603050405020304" pitchFamily="18" charset="0"/>
               </a:rPr>
-              <a:t> VS Code / PyCharm</a:t>
+              <a:t>Sentiment: Compound Polarity Score (-1 to +1).</a:t>
             </a:r>
           </a:p>
           <a:p>
@@ -24032,11 +27718,42 @@
               <a:solidFill>
                 <a:schemeClr val="tx1"/>
               </a:solidFill>
-              <a:latin typeface="Arial" panose="020B0604020202020204" pitchFamily="34" charset="0"/>
+              <a:latin typeface="Times New Roman" panose="02020603050405020304" pitchFamily="18" charset="0"/>
+              <a:cs typeface="Times New Roman" panose="02020603050405020304" pitchFamily="18" charset="0"/>
             </a:endParaRPr>
           </a:p>
         </p:txBody>
       </p:sp>
+      <p:pic>
+        <p:nvPicPr>
+          <p:cNvPr id="2" name="Picture 1">
+            <a:extLst>
+              <a:ext uri="{FF2B5EF4-FFF2-40B4-BE49-F238E27FC236}">
+                <a16:creationId xmlns:a16="http://schemas.microsoft.com/office/drawing/2014/main" id="{CE2A0253-6351-4460-B17F-66890980FA7A}"/>
+              </a:ext>
+            </a:extLst>
+          </p:cNvPr>
+          <p:cNvPicPr>
+            <a:picLocks noChangeAspect="1"/>
+          </p:cNvPicPr>
+          <p:nvPr/>
+        </p:nvPicPr>
+        <p:blipFill>
+          <a:blip r:embed="rId3"/>
+          <a:stretch>
+            <a:fillRect/>
+          </a:stretch>
+        </p:blipFill>
+        <p:spPr>
+          <a:xfrm>
+            <a:off x="1571318" y="2971801"/>
+            <a:ext cx="4622245" cy="647700"/>
+          </a:xfrm>
+          <a:prstGeom prst="rect">
+            <a:avLst/>
+          </a:prstGeom>
+        </p:spPr>
+      </p:pic>
     </p:spTree>
   </p:cSld>
   <p:clrMapOvr>
